--- a/Note/Lecture5_py.pptx
+++ b/Note/Lecture5_py.pptx
@@ -5,7 +5,7 @@
     <p:sldMasterId id="2147483648" r:id="rId1"/>
   </p:sldMasterIdLst>
   <p:notesMasterIdLst>
-    <p:notesMasterId r:id="rId19"/>
+    <p:notesMasterId r:id="rId23"/>
   </p:notesMasterIdLst>
   <p:sldIdLst>
     <p:sldId id="272" r:id="rId2"/>
@@ -13,18 +13,22 @@
     <p:sldId id="274" r:id="rId4"/>
     <p:sldId id="257" r:id="rId5"/>
     <p:sldId id="275" r:id="rId6"/>
-    <p:sldId id="258" r:id="rId7"/>
-    <p:sldId id="273" r:id="rId8"/>
-    <p:sldId id="259" r:id="rId9"/>
-    <p:sldId id="260" r:id="rId10"/>
-    <p:sldId id="261" r:id="rId11"/>
-    <p:sldId id="276" r:id="rId12"/>
-    <p:sldId id="277" r:id="rId13"/>
-    <p:sldId id="262" r:id="rId14"/>
-    <p:sldId id="263" r:id="rId15"/>
-    <p:sldId id="279" r:id="rId16"/>
-    <p:sldId id="278" r:id="rId17"/>
-    <p:sldId id="280" r:id="rId18"/>
+    <p:sldId id="281" r:id="rId7"/>
+    <p:sldId id="282" r:id="rId8"/>
+    <p:sldId id="283" r:id="rId9"/>
+    <p:sldId id="284" r:id="rId10"/>
+    <p:sldId id="258" r:id="rId11"/>
+    <p:sldId id="273" r:id="rId12"/>
+    <p:sldId id="259" r:id="rId13"/>
+    <p:sldId id="260" r:id="rId14"/>
+    <p:sldId id="261" r:id="rId15"/>
+    <p:sldId id="276" r:id="rId16"/>
+    <p:sldId id="277" r:id="rId17"/>
+    <p:sldId id="262" r:id="rId18"/>
+    <p:sldId id="263" r:id="rId19"/>
+    <p:sldId id="279" r:id="rId20"/>
+    <p:sldId id="278" r:id="rId21"/>
+    <p:sldId id="280" r:id="rId22"/>
   </p:sldIdLst>
   <p:sldSz cx="18288000" cy="10287000"/>
   <p:notesSz cx="18288000" cy="10287000"/>
@@ -134,7 +138,7 @@
           <a:p>
             <a:fld id="{83839AE6-08B4-437E-A34C-2008EE279F5F}" type="datetimeFigureOut">
               <a:rPr lang="en-US" smtClean="0"/>
-              <a:t>8/7/2025</a:t>
+              <a:t>7/24/2026</a:t>
             </a:fld>
             <a:endParaRPr lang="en-US"/>
           </a:p>
@@ -634,7 +638,7 @@
           <a:p>
             <a:fld id="{1D8BD707-D9CF-40AE-B4C6-C98DA3205C09}" type="datetimeFigureOut">
               <a:rPr lang="en-US"/>
-              <a:t>8/7/2025</a:t>
+              <a:t>7/24/2026</a:t>
             </a:fld>
             <a:endParaRPr lang="en-US"/>
           </a:p>
@@ -809,7 +813,7 @@
           <a:p>
             <a:fld id="{1D8BD707-D9CF-40AE-B4C6-C98DA3205C09}" type="datetimeFigureOut">
               <a:rPr lang="en-US"/>
-              <a:t>8/7/2025</a:t>
+              <a:t>7/24/2026</a:t>
             </a:fld>
             <a:endParaRPr lang="en-US"/>
           </a:p>
@@ -1023,7 +1027,7 @@
           <a:p>
             <a:fld id="{1D8BD707-D9CF-40AE-B4C6-C98DA3205C09}" type="datetimeFigureOut">
               <a:rPr lang="en-US"/>
-              <a:t>8/7/2025</a:t>
+              <a:t>7/24/2026</a:t>
             </a:fld>
             <a:endParaRPr lang="en-US"/>
           </a:p>
@@ -1171,7 +1175,7 @@
           <a:p>
             <a:fld id="{1D8BD707-D9CF-40AE-B4C6-C98DA3205C09}" type="datetimeFigureOut">
               <a:rPr lang="en-US"/>
-              <a:t>8/7/2025</a:t>
+              <a:t>7/24/2026</a:t>
             </a:fld>
             <a:endParaRPr lang="en-US"/>
           </a:p>
@@ -1290,7 +1294,7 @@
           <a:p>
             <a:fld id="{1D8BD707-D9CF-40AE-B4C6-C98DA3205C09}" type="datetimeFigureOut">
               <a:rPr lang="en-US"/>
-              <a:t>8/7/2025</a:t>
+              <a:t>7/24/2026</a:t>
             </a:fld>
             <a:endParaRPr lang="en-US"/>
           </a:p>
@@ -1563,7 +1567,7 @@
           <a:p>
             <a:fld id="{1D8BD707-D9CF-40AE-B4C6-C98DA3205C09}" type="datetimeFigureOut">
               <a:rPr lang="en-US"/>
-              <a:t>8/7/2025</a:t>
+              <a:t>7/24/2026</a:t>
             </a:fld>
             <a:endParaRPr lang="en-US"/>
           </a:p>
@@ -2058,6 +2062,3160 @@
       <p:sp>
         <p:nvSpPr>
           <p:cNvPr id="2" name="object 2"/>
+          <p:cNvSpPr txBox="1">
+            <a:spLocks noGrp="1"/>
+          </p:cNvSpPr>
+          <p:nvPr>
+            <p:ph type="title"/>
+          </p:nvPr>
+        </p:nvSpPr>
+        <p:spPr>
+          <a:xfrm>
+            <a:off x="953066" y="995044"/>
+            <a:ext cx="5577840" cy="848360"/>
+          </a:xfrm>
+          <a:prstGeom prst="rect">
+            <a:avLst/>
+          </a:prstGeom>
+        </p:spPr>
+        <p:txBody>
+          <a:bodyPr vert="horz" wrap="square" lIns="0" tIns="12700" rIns="0" bIns="0" rtlCol="0">
+            <a:spAutoFit/>
+          </a:bodyPr>
+          <a:lstStyle/>
+          <a:p>
+            <a:pPr marL="12700">
+              <a:lnSpc>
+                <a:spcPct val="100000"/>
+              </a:lnSpc>
+              <a:spcBef>
+                <a:spcPts val="100"/>
+              </a:spcBef>
+            </a:pPr>
+            <a:r>
+              <a:rPr spc="-114" dirty="0">
+                <a:solidFill>
+                  <a:srgbClr val="FFFFFF"/>
+                </a:solidFill>
+              </a:rPr>
+              <a:t>Dictionary</a:t>
+            </a:r>
+            <a:r>
+              <a:rPr spc="-360" dirty="0">
+                <a:solidFill>
+                  <a:srgbClr val="FFFFFF"/>
+                </a:solidFill>
+              </a:rPr>
+              <a:t> </a:t>
+            </a:r>
+            <a:r>
+              <a:rPr spc="-65" dirty="0"/>
+              <a:t>Methods</a:t>
+            </a:r>
+          </a:p>
+        </p:txBody>
+      </p:sp>
+      <p:sp>
+        <p:nvSpPr>
+          <p:cNvPr id="3" name="object 3"/>
+          <p:cNvSpPr/>
+          <p:nvPr/>
+        </p:nvSpPr>
+        <p:spPr>
+          <a:xfrm>
+            <a:off x="989579" y="1844140"/>
+            <a:ext cx="5652135" cy="24130"/>
+          </a:xfrm>
+          <a:custGeom>
+            <a:avLst/>
+            <a:gdLst/>
+            <a:ahLst/>
+            <a:cxnLst/>
+            <a:rect l="l" t="t" r="r" b="b"/>
+            <a:pathLst>
+              <a:path w="5652134" h="24130">
+                <a:moveTo>
+                  <a:pt x="0" y="23613"/>
+                </a:moveTo>
+                <a:lnTo>
+                  <a:pt x="5651551" y="0"/>
+                </a:lnTo>
+              </a:path>
+            </a:pathLst>
+          </a:custGeom>
+          <a:ln w="47624">
+            <a:solidFill>
+              <a:srgbClr val="FFFFFF"/>
+            </a:solidFill>
+          </a:ln>
+        </p:spPr>
+        <p:txBody>
+          <a:bodyPr wrap="square" lIns="0" tIns="0" rIns="0" bIns="0" rtlCol="0"/>
+          <a:lstStyle/>
+          <a:p>
+            <a:endParaRPr/>
+          </a:p>
+        </p:txBody>
+      </p:sp>
+      <p:sp>
+        <p:nvSpPr>
+          <p:cNvPr id="4" name="object 4"/>
+          <p:cNvSpPr txBox="1"/>
+          <p:nvPr/>
+        </p:nvSpPr>
+        <p:spPr>
+          <a:xfrm>
+            <a:off x="953066" y="2504502"/>
+            <a:ext cx="12568555" cy="5354320"/>
+          </a:xfrm>
+          <a:prstGeom prst="rect">
+            <a:avLst/>
+          </a:prstGeom>
+        </p:spPr>
+        <p:txBody>
+          <a:bodyPr vert="horz" wrap="square" lIns="0" tIns="12700" rIns="0" bIns="0" rtlCol="0">
+            <a:spAutoFit/>
+          </a:bodyPr>
+          <a:lstStyle/>
+          <a:p>
+            <a:pPr marL="75565">
+              <a:lnSpc>
+                <a:spcPct val="100000"/>
+              </a:lnSpc>
+              <a:spcBef>
+                <a:spcPts val="100"/>
+              </a:spcBef>
+              <a:tabLst>
+                <a:tab pos="2802890" algn="l"/>
+              </a:tabLst>
+            </a:pPr>
+            <a:r>
+              <a:rPr sz="3200" spc="-65" dirty="0">
+                <a:solidFill>
+                  <a:srgbClr val="FFFFFF"/>
+                </a:solidFill>
+                <a:latin typeface="Arial MT"/>
+                <a:cs typeface="Arial MT"/>
+              </a:rPr>
+              <a:t>myDict.</a:t>
+            </a:r>
+            <a:r>
+              <a:rPr sz="3200" b="1" spc="-65" dirty="0">
+                <a:solidFill>
+                  <a:srgbClr val="3BE2EC"/>
+                </a:solidFill>
+                <a:latin typeface="Arial"/>
+                <a:cs typeface="Arial"/>
+              </a:rPr>
+              <a:t>keys</a:t>
+            </a:r>
+            <a:r>
+              <a:rPr sz="3200" spc="-65" dirty="0">
+                <a:solidFill>
+                  <a:srgbClr val="FFFFFF"/>
+                </a:solidFill>
+                <a:latin typeface="Arial MT"/>
+                <a:cs typeface="Arial MT"/>
+              </a:rPr>
+              <a:t>(</a:t>
+            </a:r>
+            <a:r>
+              <a:rPr sz="3200" spc="-150" dirty="0">
+                <a:solidFill>
+                  <a:srgbClr val="FFFFFF"/>
+                </a:solidFill>
+                <a:latin typeface="Arial MT"/>
+                <a:cs typeface="Arial MT"/>
+              </a:rPr>
+              <a:t> </a:t>
+            </a:r>
+            <a:r>
+              <a:rPr sz="3200" spc="-50" dirty="0">
+                <a:solidFill>
+                  <a:srgbClr val="FFFFFF"/>
+                </a:solidFill>
+                <a:latin typeface="Arial MT"/>
+                <a:cs typeface="Arial MT"/>
+              </a:rPr>
+              <a:t>)</a:t>
+            </a:r>
+            <a:r>
+              <a:rPr sz="3200" dirty="0">
+                <a:solidFill>
+                  <a:srgbClr val="FFFFFF"/>
+                </a:solidFill>
+                <a:latin typeface="Arial MT"/>
+                <a:cs typeface="Arial MT"/>
+              </a:rPr>
+              <a:t>	</a:t>
+            </a:r>
+            <a:r>
+              <a:rPr sz="3200" dirty="0">
+                <a:solidFill>
+                  <a:srgbClr val="32BD15"/>
+                </a:solidFill>
+                <a:latin typeface="Arial MT"/>
+                <a:cs typeface="Arial MT"/>
+              </a:rPr>
+              <a:t>#returns</a:t>
+            </a:r>
+            <a:r>
+              <a:rPr sz="3200" spc="120" dirty="0">
+                <a:solidFill>
+                  <a:srgbClr val="32BD15"/>
+                </a:solidFill>
+                <a:latin typeface="Arial MT"/>
+                <a:cs typeface="Arial MT"/>
+              </a:rPr>
+              <a:t> </a:t>
+            </a:r>
+            <a:r>
+              <a:rPr sz="3200" dirty="0">
+                <a:solidFill>
+                  <a:srgbClr val="32BD15"/>
+                </a:solidFill>
+                <a:latin typeface="Arial MT"/>
+                <a:cs typeface="Arial MT"/>
+              </a:rPr>
+              <a:t>all</a:t>
+            </a:r>
+            <a:r>
+              <a:rPr sz="3200" spc="120" dirty="0">
+                <a:solidFill>
+                  <a:srgbClr val="32BD15"/>
+                </a:solidFill>
+                <a:latin typeface="Arial MT"/>
+                <a:cs typeface="Arial MT"/>
+              </a:rPr>
+              <a:t> </a:t>
+            </a:r>
+            <a:r>
+              <a:rPr sz="3200" spc="-20" dirty="0">
+                <a:solidFill>
+                  <a:srgbClr val="32BD15"/>
+                </a:solidFill>
+                <a:latin typeface="Arial MT"/>
+                <a:cs typeface="Arial MT"/>
+              </a:rPr>
+              <a:t>keys</a:t>
+            </a:r>
+            <a:endParaRPr sz="3200" dirty="0">
+              <a:latin typeface="Arial MT"/>
+              <a:cs typeface="Arial MT"/>
+            </a:endParaRPr>
+          </a:p>
+          <a:p>
+            <a:pPr>
+              <a:lnSpc>
+                <a:spcPct val="100000"/>
+              </a:lnSpc>
+              <a:spcBef>
+                <a:spcPts val="2005"/>
+              </a:spcBef>
+            </a:pPr>
+            <a:endParaRPr sz="3200" dirty="0">
+              <a:latin typeface="Arial MT"/>
+              <a:cs typeface="Arial MT"/>
+            </a:endParaRPr>
+          </a:p>
+          <a:p>
+            <a:pPr marL="75565">
+              <a:lnSpc>
+                <a:spcPct val="100000"/>
+              </a:lnSpc>
+              <a:spcBef>
+                <a:spcPts val="5"/>
+              </a:spcBef>
+              <a:tabLst>
+                <a:tab pos="3125470" algn="l"/>
+              </a:tabLst>
+            </a:pPr>
+            <a:r>
+              <a:rPr sz="3200" spc="-85" dirty="0">
+                <a:solidFill>
+                  <a:srgbClr val="FFFFFF"/>
+                </a:solidFill>
+                <a:latin typeface="Arial MT"/>
+                <a:cs typeface="Arial MT"/>
+              </a:rPr>
+              <a:t>myDict.</a:t>
+            </a:r>
+            <a:r>
+              <a:rPr sz="3200" b="1" spc="-85" dirty="0">
+                <a:solidFill>
+                  <a:srgbClr val="3BE2EC"/>
+                </a:solidFill>
+                <a:latin typeface="Arial"/>
+                <a:cs typeface="Arial"/>
+              </a:rPr>
+              <a:t>values</a:t>
+            </a:r>
+            <a:r>
+              <a:rPr sz="3200" b="1" spc="-85" dirty="0">
+                <a:solidFill>
+                  <a:srgbClr val="FFFFFF"/>
+                </a:solidFill>
+                <a:latin typeface="Arial"/>
+                <a:cs typeface="Arial"/>
+              </a:rPr>
+              <a:t>( </a:t>
+            </a:r>
+            <a:r>
+              <a:rPr sz="3200" b="1" spc="-50" dirty="0">
+                <a:solidFill>
+                  <a:srgbClr val="FFFFFF"/>
+                </a:solidFill>
+                <a:latin typeface="Arial"/>
+                <a:cs typeface="Arial"/>
+              </a:rPr>
+              <a:t>)</a:t>
+            </a:r>
+            <a:r>
+              <a:rPr sz="3200" b="1" dirty="0">
+                <a:solidFill>
+                  <a:srgbClr val="FFFFFF"/>
+                </a:solidFill>
+                <a:latin typeface="Arial"/>
+                <a:cs typeface="Arial"/>
+              </a:rPr>
+              <a:t>	</a:t>
+            </a:r>
+            <a:r>
+              <a:rPr sz="3200" dirty="0">
+                <a:solidFill>
+                  <a:srgbClr val="32BD15"/>
+                </a:solidFill>
+                <a:latin typeface="Arial MT"/>
+                <a:cs typeface="Arial MT"/>
+              </a:rPr>
+              <a:t>#returns</a:t>
+            </a:r>
+            <a:r>
+              <a:rPr sz="3200" spc="120" dirty="0">
+                <a:solidFill>
+                  <a:srgbClr val="32BD15"/>
+                </a:solidFill>
+                <a:latin typeface="Arial MT"/>
+                <a:cs typeface="Arial MT"/>
+              </a:rPr>
+              <a:t> </a:t>
+            </a:r>
+            <a:r>
+              <a:rPr sz="3200" dirty="0">
+                <a:solidFill>
+                  <a:srgbClr val="32BD15"/>
+                </a:solidFill>
+                <a:latin typeface="Arial MT"/>
+                <a:cs typeface="Arial MT"/>
+              </a:rPr>
+              <a:t>all</a:t>
+            </a:r>
+            <a:r>
+              <a:rPr sz="3200" spc="120" dirty="0">
+                <a:solidFill>
+                  <a:srgbClr val="32BD15"/>
+                </a:solidFill>
+                <a:latin typeface="Arial MT"/>
+                <a:cs typeface="Arial MT"/>
+              </a:rPr>
+              <a:t> </a:t>
+            </a:r>
+            <a:r>
+              <a:rPr sz="3200" spc="-10" dirty="0">
+                <a:solidFill>
+                  <a:srgbClr val="32BD15"/>
+                </a:solidFill>
+                <a:latin typeface="Arial MT"/>
+                <a:cs typeface="Arial MT"/>
+              </a:rPr>
+              <a:t>values</a:t>
+            </a:r>
+            <a:endParaRPr sz="3200" dirty="0">
+              <a:latin typeface="Arial MT"/>
+              <a:cs typeface="Arial MT"/>
+            </a:endParaRPr>
+          </a:p>
+          <a:p>
+            <a:pPr marL="12700" marR="2601595" indent="62865">
+              <a:lnSpc>
+                <a:spcPct val="248200"/>
+              </a:lnSpc>
+              <a:tabLst>
+                <a:tab pos="2972435" algn="l"/>
+                <a:tab pos="3717290" algn="l"/>
+              </a:tabLst>
+            </a:pPr>
+            <a:r>
+              <a:rPr sz="3200" spc="-60" dirty="0">
+                <a:solidFill>
+                  <a:srgbClr val="FFFFFF"/>
+                </a:solidFill>
+                <a:latin typeface="Arial MT"/>
+                <a:cs typeface="Arial MT"/>
+              </a:rPr>
+              <a:t>myDict.</a:t>
+            </a:r>
+            <a:r>
+              <a:rPr sz="3200" b="1" spc="-60" dirty="0">
+                <a:solidFill>
+                  <a:srgbClr val="3BE2EC"/>
+                </a:solidFill>
+                <a:latin typeface="Arial"/>
+                <a:cs typeface="Arial"/>
+              </a:rPr>
+              <a:t>items</a:t>
+            </a:r>
+            <a:r>
+              <a:rPr sz="3200" b="1" spc="-60" dirty="0">
+                <a:solidFill>
+                  <a:srgbClr val="FFFFFF"/>
+                </a:solidFill>
+                <a:latin typeface="Arial"/>
+                <a:cs typeface="Arial"/>
+              </a:rPr>
+              <a:t>(</a:t>
+            </a:r>
+            <a:r>
+              <a:rPr sz="3200" b="1" spc="-95" dirty="0">
+                <a:solidFill>
+                  <a:srgbClr val="FFFFFF"/>
+                </a:solidFill>
+                <a:latin typeface="Arial"/>
+                <a:cs typeface="Arial"/>
+              </a:rPr>
+              <a:t> </a:t>
+            </a:r>
+            <a:r>
+              <a:rPr sz="3200" b="1" spc="-50" dirty="0">
+                <a:solidFill>
+                  <a:srgbClr val="FFFFFF"/>
+                </a:solidFill>
+                <a:latin typeface="Arial"/>
+                <a:cs typeface="Arial"/>
+              </a:rPr>
+              <a:t>)</a:t>
+            </a:r>
+            <a:r>
+              <a:rPr sz="3200" b="1" dirty="0">
+                <a:solidFill>
+                  <a:srgbClr val="FFFFFF"/>
+                </a:solidFill>
+                <a:latin typeface="Arial"/>
+                <a:cs typeface="Arial"/>
+              </a:rPr>
+              <a:t>	</a:t>
+            </a:r>
+            <a:r>
+              <a:rPr sz="3200" dirty="0">
+                <a:solidFill>
+                  <a:srgbClr val="32BD15"/>
+                </a:solidFill>
+                <a:latin typeface="Arial MT"/>
+                <a:cs typeface="Arial MT"/>
+              </a:rPr>
+              <a:t>#returns</a:t>
+            </a:r>
+            <a:r>
+              <a:rPr sz="3200" spc="-85" dirty="0">
+                <a:solidFill>
+                  <a:srgbClr val="32BD15"/>
+                </a:solidFill>
+                <a:latin typeface="Arial MT"/>
+                <a:cs typeface="Arial MT"/>
+              </a:rPr>
+              <a:t> </a:t>
+            </a:r>
+            <a:r>
+              <a:rPr sz="3200" dirty="0">
+                <a:solidFill>
+                  <a:srgbClr val="32BD15"/>
+                </a:solidFill>
+                <a:latin typeface="Arial MT"/>
+                <a:cs typeface="Arial MT"/>
+              </a:rPr>
+              <a:t>all</a:t>
+            </a:r>
+            <a:r>
+              <a:rPr sz="3200" spc="-60" dirty="0">
+                <a:solidFill>
+                  <a:srgbClr val="32BD15"/>
+                </a:solidFill>
+                <a:latin typeface="Arial MT"/>
+                <a:cs typeface="Arial MT"/>
+              </a:rPr>
+              <a:t> </a:t>
+            </a:r>
+            <a:r>
+              <a:rPr sz="3200" i="1" spc="-30" dirty="0">
+                <a:solidFill>
+                  <a:srgbClr val="FFFFFF"/>
+                </a:solidFill>
+                <a:latin typeface="Arial"/>
+                <a:cs typeface="Arial"/>
+              </a:rPr>
+              <a:t>(key,</a:t>
+            </a:r>
+            <a:r>
+              <a:rPr sz="3200" i="1" spc="-50" dirty="0">
+                <a:solidFill>
+                  <a:srgbClr val="FFFFFF"/>
+                </a:solidFill>
+                <a:latin typeface="Arial"/>
+                <a:cs typeface="Arial"/>
+              </a:rPr>
+              <a:t> </a:t>
+            </a:r>
+            <a:r>
+              <a:rPr sz="3200" i="1" spc="-20" dirty="0">
+                <a:solidFill>
+                  <a:srgbClr val="FFFFFF"/>
+                </a:solidFill>
+                <a:latin typeface="Arial"/>
+                <a:cs typeface="Arial"/>
+              </a:rPr>
+              <a:t>val)</a:t>
+            </a:r>
+            <a:r>
+              <a:rPr sz="3200" i="1" spc="-65" dirty="0">
+                <a:solidFill>
+                  <a:srgbClr val="FFFFFF"/>
+                </a:solidFill>
+                <a:latin typeface="Arial"/>
+                <a:cs typeface="Arial"/>
+              </a:rPr>
+              <a:t> </a:t>
+            </a:r>
+            <a:r>
+              <a:rPr sz="3200" spc="-20" dirty="0">
+                <a:solidFill>
+                  <a:srgbClr val="32BD15"/>
+                </a:solidFill>
+                <a:latin typeface="Arial MT"/>
+                <a:cs typeface="Arial MT"/>
+              </a:rPr>
+              <a:t>pairs</a:t>
+            </a:r>
+            <a:r>
+              <a:rPr sz="3200" spc="-60" dirty="0">
+                <a:solidFill>
+                  <a:srgbClr val="32BD15"/>
+                </a:solidFill>
+                <a:latin typeface="Arial MT"/>
+                <a:cs typeface="Arial MT"/>
+              </a:rPr>
+              <a:t> </a:t>
+            </a:r>
+            <a:r>
+              <a:rPr sz="3200" spc="-225" dirty="0">
+                <a:solidFill>
+                  <a:srgbClr val="32BD15"/>
+                </a:solidFill>
+                <a:latin typeface="Arial MT"/>
+                <a:cs typeface="Arial MT"/>
+              </a:rPr>
+              <a:t>as</a:t>
+            </a:r>
+            <a:r>
+              <a:rPr sz="3200" spc="-45" dirty="0">
+                <a:solidFill>
+                  <a:srgbClr val="32BD15"/>
+                </a:solidFill>
+                <a:latin typeface="Arial MT"/>
+                <a:cs typeface="Arial MT"/>
+              </a:rPr>
+              <a:t> </a:t>
+            </a:r>
+            <a:r>
+              <a:rPr sz="3200" spc="-10" dirty="0">
+                <a:solidFill>
+                  <a:srgbClr val="32BD15"/>
+                </a:solidFill>
+                <a:latin typeface="Arial MT"/>
+                <a:cs typeface="Arial MT"/>
+              </a:rPr>
+              <a:t>tuples </a:t>
+            </a:r>
+            <a:r>
+              <a:rPr sz="3200" spc="-35" dirty="0">
+                <a:solidFill>
+                  <a:srgbClr val="FFFFFF"/>
+                </a:solidFill>
+                <a:latin typeface="Arial MT"/>
+                <a:cs typeface="Arial MT"/>
+              </a:rPr>
+              <a:t>myDict.</a:t>
+            </a:r>
+            <a:r>
+              <a:rPr sz="3200" b="1" spc="-35" dirty="0">
+                <a:solidFill>
+                  <a:srgbClr val="3BE2EC"/>
+                </a:solidFill>
+                <a:latin typeface="Arial"/>
+                <a:cs typeface="Arial"/>
+              </a:rPr>
+              <a:t>get</a:t>
+            </a:r>
+            <a:r>
+              <a:rPr sz="3200" b="1" spc="-35" dirty="0">
+                <a:solidFill>
+                  <a:srgbClr val="FFFFFF"/>
+                </a:solidFill>
+                <a:latin typeface="Arial"/>
+                <a:cs typeface="Arial"/>
+              </a:rPr>
+              <a:t>(</a:t>
+            </a:r>
+            <a:r>
+              <a:rPr sz="3200" b="1" spc="-90" dirty="0">
+                <a:solidFill>
+                  <a:srgbClr val="FFFFFF"/>
+                </a:solidFill>
+                <a:latin typeface="Arial"/>
+                <a:cs typeface="Arial"/>
+              </a:rPr>
+              <a:t> </a:t>
+            </a:r>
+            <a:r>
+              <a:rPr sz="3200" spc="100" dirty="0">
+                <a:solidFill>
+                  <a:srgbClr val="FFFFFF"/>
+                </a:solidFill>
+                <a:latin typeface="Arial MT"/>
+                <a:cs typeface="Arial MT"/>
+              </a:rPr>
+              <a:t>“key““</a:t>
+            </a:r>
+            <a:r>
+              <a:rPr sz="3200" spc="-160" dirty="0">
+                <a:solidFill>
+                  <a:srgbClr val="FFFFFF"/>
+                </a:solidFill>
+                <a:latin typeface="Arial MT"/>
+                <a:cs typeface="Arial MT"/>
+              </a:rPr>
+              <a:t> </a:t>
+            </a:r>
+            <a:r>
+              <a:rPr sz="3200" b="1" spc="-50" dirty="0">
+                <a:solidFill>
+                  <a:srgbClr val="FFFFFF"/>
+                </a:solidFill>
+                <a:latin typeface="Arial"/>
+                <a:cs typeface="Arial"/>
+              </a:rPr>
+              <a:t>)</a:t>
+            </a:r>
+            <a:r>
+              <a:rPr sz="3200" b="1" dirty="0">
+                <a:solidFill>
+                  <a:srgbClr val="FFFFFF"/>
+                </a:solidFill>
+                <a:latin typeface="Arial"/>
+                <a:cs typeface="Arial"/>
+              </a:rPr>
+              <a:t>	</a:t>
+            </a:r>
+            <a:r>
+              <a:rPr sz="3200" dirty="0">
+                <a:solidFill>
+                  <a:srgbClr val="32BD15"/>
+                </a:solidFill>
+                <a:latin typeface="Arial MT"/>
+                <a:cs typeface="Arial MT"/>
+              </a:rPr>
+              <a:t>#returns</a:t>
+            </a:r>
+            <a:r>
+              <a:rPr sz="3200" spc="-35" dirty="0">
+                <a:solidFill>
+                  <a:srgbClr val="32BD15"/>
+                </a:solidFill>
+                <a:latin typeface="Arial MT"/>
+                <a:cs typeface="Arial MT"/>
+              </a:rPr>
+              <a:t> </a:t>
+            </a:r>
+            <a:r>
+              <a:rPr sz="3200" dirty="0">
+                <a:solidFill>
+                  <a:srgbClr val="32BD15"/>
+                </a:solidFill>
+                <a:latin typeface="Arial MT"/>
+                <a:cs typeface="Arial MT"/>
+              </a:rPr>
+              <a:t>the</a:t>
+            </a:r>
+            <a:r>
+              <a:rPr sz="3200" spc="-35" dirty="0">
+                <a:solidFill>
+                  <a:srgbClr val="32BD15"/>
+                </a:solidFill>
+                <a:latin typeface="Arial MT"/>
+                <a:cs typeface="Arial MT"/>
+              </a:rPr>
+              <a:t> </a:t>
+            </a:r>
+            <a:r>
+              <a:rPr sz="3200" spc="-30" dirty="0">
+                <a:solidFill>
+                  <a:srgbClr val="32BD15"/>
+                </a:solidFill>
+                <a:latin typeface="Arial MT"/>
+                <a:cs typeface="Arial MT"/>
+              </a:rPr>
+              <a:t>key </a:t>
+            </a:r>
+            <a:r>
+              <a:rPr sz="3200" spc="-35" dirty="0">
+                <a:solidFill>
+                  <a:srgbClr val="32BD15"/>
+                </a:solidFill>
+                <a:latin typeface="Arial MT"/>
+                <a:cs typeface="Arial MT"/>
+              </a:rPr>
+              <a:t>according </a:t>
+            </a:r>
+            <a:r>
+              <a:rPr sz="3200" spc="55" dirty="0">
+                <a:solidFill>
+                  <a:srgbClr val="32BD15"/>
+                </a:solidFill>
+                <a:latin typeface="Arial MT"/>
+                <a:cs typeface="Arial MT"/>
+              </a:rPr>
+              <a:t>to</a:t>
+            </a:r>
+            <a:r>
+              <a:rPr sz="3200" spc="-30" dirty="0">
+                <a:solidFill>
+                  <a:srgbClr val="32BD15"/>
+                </a:solidFill>
+                <a:latin typeface="Arial MT"/>
+                <a:cs typeface="Arial MT"/>
+              </a:rPr>
+              <a:t> </a:t>
+            </a:r>
+            <a:r>
+              <a:rPr sz="3200" spc="-35" dirty="0">
+                <a:solidFill>
+                  <a:srgbClr val="32BD15"/>
+                </a:solidFill>
+                <a:latin typeface="Arial MT"/>
+                <a:cs typeface="Arial MT"/>
+              </a:rPr>
+              <a:t>value</a:t>
+            </a:r>
+            <a:endParaRPr sz="3200" dirty="0">
+              <a:latin typeface="Arial MT"/>
+              <a:cs typeface="Arial MT"/>
+            </a:endParaRPr>
+          </a:p>
+          <a:p>
+            <a:pPr>
+              <a:lnSpc>
+                <a:spcPct val="100000"/>
+              </a:lnSpc>
+              <a:spcBef>
+                <a:spcPts val="2005"/>
+              </a:spcBef>
+            </a:pPr>
+            <a:endParaRPr sz="3200" dirty="0">
+              <a:latin typeface="Arial MT"/>
+              <a:cs typeface="Arial MT"/>
+            </a:endParaRPr>
+          </a:p>
+          <a:p>
+            <a:pPr marL="75565">
+              <a:lnSpc>
+                <a:spcPct val="100000"/>
+              </a:lnSpc>
+              <a:spcBef>
+                <a:spcPts val="5"/>
+              </a:spcBef>
+              <a:tabLst>
+                <a:tab pos="4757420" algn="l"/>
+              </a:tabLst>
+            </a:pPr>
+            <a:r>
+              <a:rPr sz="3200" spc="-55" dirty="0">
+                <a:solidFill>
+                  <a:srgbClr val="FFFFFF"/>
+                </a:solidFill>
+                <a:latin typeface="Arial MT"/>
+                <a:cs typeface="Arial MT"/>
+              </a:rPr>
+              <a:t>myDict.</a:t>
+            </a:r>
+            <a:r>
+              <a:rPr sz="3200" b="1" spc="-55" dirty="0">
+                <a:solidFill>
+                  <a:srgbClr val="3BE2EC"/>
+                </a:solidFill>
+                <a:latin typeface="Arial"/>
+                <a:cs typeface="Arial"/>
+              </a:rPr>
+              <a:t>update</a:t>
+            </a:r>
+            <a:r>
+              <a:rPr sz="3200" b="1" spc="-55" dirty="0">
+                <a:solidFill>
+                  <a:srgbClr val="FFFFFF"/>
+                </a:solidFill>
+                <a:latin typeface="Arial"/>
+                <a:cs typeface="Arial"/>
+              </a:rPr>
+              <a:t>(</a:t>
+            </a:r>
+            <a:r>
+              <a:rPr sz="3200" b="1" spc="-130" dirty="0">
+                <a:solidFill>
+                  <a:srgbClr val="FFFFFF"/>
+                </a:solidFill>
+                <a:latin typeface="Arial"/>
+                <a:cs typeface="Arial"/>
+              </a:rPr>
+              <a:t> </a:t>
+            </a:r>
+            <a:r>
+              <a:rPr sz="3200" spc="-40" dirty="0">
+                <a:solidFill>
+                  <a:srgbClr val="FFFFFF"/>
+                </a:solidFill>
+                <a:latin typeface="Arial MT"/>
+                <a:cs typeface="Arial MT"/>
+              </a:rPr>
+              <a:t>newDict</a:t>
+            </a:r>
+            <a:r>
+              <a:rPr sz="3200" spc="-120" dirty="0">
+                <a:solidFill>
+                  <a:srgbClr val="FFFFFF"/>
+                </a:solidFill>
+                <a:latin typeface="Arial MT"/>
+                <a:cs typeface="Arial MT"/>
+              </a:rPr>
+              <a:t> </a:t>
+            </a:r>
+            <a:r>
+              <a:rPr sz="3200" b="1" spc="-50" dirty="0">
+                <a:solidFill>
+                  <a:srgbClr val="FFFFFF"/>
+                </a:solidFill>
+                <a:latin typeface="Arial"/>
+                <a:cs typeface="Arial"/>
+              </a:rPr>
+              <a:t>)</a:t>
+            </a:r>
+            <a:r>
+              <a:rPr sz="3200" b="1" dirty="0">
+                <a:solidFill>
+                  <a:srgbClr val="FFFFFF"/>
+                </a:solidFill>
+                <a:latin typeface="Arial"/>
+                <a:cs typeface="Arial"/>
+              </a:rPr>
+              <a:t>	</a:t>
+            </a:r>
+            <a:r>
+              <a:rPr sz="3200" dirty="0">
+                <a:solidFill>
+                  <a:srgbClr val="32BD15"/>
+                </a:solidFill>
+                <a:latin typeface="Arial MT"/>
+                <a:cs typeface="Arial MT"/>
+              </a:rPr>
+              <a:t>#inserts</a:t>
+            </a:r>
+            <a:r>
+              <a:rPr sz="3200" spc="-100" dirty="0">
+                <a:solidFill>
+                  <a:srgbClr val="32BD15"/>
+                </a:solidFill>
+                <a:latin typeface="Arial MT"/>
+                <a:cs typeface="Arial MT"/>
+              </a:rPr>
+              <a:t> </a:t>
+            </a:r>
+            <a:r>
+              <a:rPr sz="3200" dirty="0">
+                <a:solidFill>
+                  <a:srgbClr val="32BD15"/>
+                </a:solidFill>
+                <a:latin typeface="Arial MT"/>
+                <a:cs typeface="Arial MT"/>
+              </a:rPr>
+              <a:t>the</a:t>
+            </a:r>
+            <a:r>
+              <a:rPr sz="3200" spc="-100" dirty="0">
+                <a:solidFill>
+                  <a:srgbClr val="32BD15"/>
+                </a:solidFill>
+                <a:latin typeface="Arial MT"/>
+                <a:cs typeface="Arial MT"/>
+              </a:rPr>
+              <a:t> </a:t>
+            </a:r>
+            <a:r>
+              <a:rPr sz="3200" spc="-40" dirty="0">
+                <a:solidFill>
+                  <a:srgbClr val="32BD15"/>
+                </a:solidFill>
+                <a:latin typeface="Arial MT"/>
+                <a:cs typeface="Arial MT"/>
+              </a:rPr>
+              <a:t>specified</a:t>
+            </a:r>
+            <a:r>
+              <a:rPr sz="3200" spc="-95" dirty="0">
+                <a:solidFill>
+                  <a:srgbClr val="32BD15"/>
+                </a:solidFill>
+                <a:latin typeface="Arial MT"/>
+                <a:cs typeface="Arial MT"/>
+              </a:rPr>
+              <a:t> </a:t>
+            </a:r>
+            <a:r>
+              <a:rPr sz="3200" spc="-25" dirty="0">
+                <a:solidFill>
+                  <a:srgbClr val="32BD15"/>
+                </a:solidFill>
+                <a:latin typeface="Arial MT"/>
+                <a:cs typeface="Arial MT"/>
+              </a:rPr>
+              <a:t>items</a:t>
+            </a:r>
+            <a:r>
+              <a:rPr sz="3200" spc="-100" dirty="0">
+                <a:solidFill>
+                  <a:srgbClr val="32BD15"/>
+                </a:solidFill>
+                <a:latin typeface="Arial MT"/>
+                <a:cs typeface="Arial MT"/>
+              </a:rPr>
+              <a:t> </a:t>
+            </a:r>
+            <a:r>
+              <a:rPr sz="3200" spc="55" dirty="0">
+                <a:solidFill>
+                  <a:srgbClr val="32BD15"/>
+                </a:solidFill>
+                <a:latin typeface="Arial MT"/>
+                <a:cs typeface="Arial MT"/>
+              </a:rPr>
+              <a:t>to</a:t>
+            </a:r>
+            <a:r>
+              <a:rPr sz="3200" spc="-100" dirty="0">
+                <a:solidFill>
+                  <a:srgbClr val="32BD15"/>
+                </a:solidFill>
+                <a:latin typeface="Arial MT"/>
+                <a:cs typeface="Arial MT"/>
+              </a:rPr>
+              <a:t> </a:t>
+            </a:r>
+            <a:r>
+              <a:rPr sz="3200" dirty="0">
+                <a:solidFill>
+                  <a:srgbClr val="32BD15"/>
+                </a:solidFill>
+                <a:latin typeface="Arial MT"/>
+                <a:cs typeface="Arial MT"/>
+              </a:rPr>
+              <a:t>the</a:t>
+            </a:r>
+            <a:r>
+              <a:rPr sz="3200" spc="-95" dirty="0">
+                <a:solidFill>
+                  <a:srgbClr val="32BD15"/>
+                </a:solidFill>
+                <a:latin typeface="Arial MT"/>
+                <a:cs typeface="Arial MT"/>
+              </a:rPr>
+              <a:t> </a:t>
+            </a:r>
+            <a:r>
+              <a:rPr sz="3200" spc="-10" dirty="0">
+                <a:solidFill>
+                  <a:srgbClr val="32BD15"/>
+                </a:solidFill>
+                <a:latin typeface="Arial MT"/>
+                <a:cs typeface="Arial MT"/>
+              </a:rPr>
+              <a:t>dictionary</a:t>
+            </a:r>
+            <a:endParaRPr sz="3200" dirty="0">
+              <a:latin typeface="Arial MT"/>
+              <a:cs typeface="Arial MT"/>
+            </a:endParaRPr>
+          </a:p>
+        </p:txBody>
+      </p:sp>
+    </p:spTree>
+  </p:cSld>
+  <p:clrMapOvr>
+    <a:masterClrMapping/>
+  </p:clrMapOvr>
+  <p:transition spd="med">
+    <p:pull/>
+  </p:transition>
+</p:sld>
+</file>
+
+<file path=ppt/slides/slide11.xml><?xml version="1.0" encoding="utf-8"?>
+<p:sld xmlns:a="http://schemas.openxmlformats.org/drawingml/2006/main" xmlns:r="http://schemas.openxmlformats.org/officeDocument/2006/relationships" xmlns:p="http://schemas.openxmlformats.org/presentationml/2006/main">
+  <p:cSld>
+    <p:spTree>
+      <p:nvGrpSpPr>
+        <p:cNvPr id="1" name=""/>
+        <p:cNvGrpSpPr/>
+        <p:nvPr/>
+      </p:nvGrpSpPr>
+      <p:grpSpPr>
+        <a:xfrm>
+          <a:off x="0" y="0"/>
+          <a:ext cx="0" cy="0"/>
+          <a:chOff x="0" y="0"/>
+          <a:chExt cx="0" cy="0"/>
+        </a:xfrm>
+      </p:grpSpPr>
+      <p:sp>
+        <p:nvSpPr>
+          <p:cNvPr id="2" name="Title 1">
+            <a:extLst>
+              <a:ext uri="{FF2B5EF4-FFF2-40B4-BE49-F238E27FC236}">
+                <a16:creationId xmlns:a16="http://schemas.microsoft.com/office/drawing/2014/main" id="{D6B6F1A2-1212-CAC1-7792-BE0997E74BCC}"/>
+              </a:ext>
+            </a:extLst>
+          </p:cNvPr>
+          <p:cNvSpPr>
+            <a:spLocks noGrp="1"/>
+          </p:cNvSpPr>
+          <p:nvPr>
+            <p:ph type="title"/>
+          </p:nvPr>
+        </p:nvSpPr>
+        <p:spPr/>
+        <p:txBody>
+          <a:bodyPr/>
+          <a:lstStyle/>
+          <a:p>
+            <a:r>
+              <a:rPr lang="en-US" spc="-114" dirty="0">
+                <a:solidFill>
+                  <a:srgbClr val="FFFFFF"/>
+                </a:solidFill>
+              </a:rPr>
+              <a:t>Dictionary</a:t>
+            </a:r>
+            <a:r>
+              <a:rPr lang="en-US" spc="-360" dirty="0">
+                <a:solidFill>
+                  <a:srgbClr val="FFFFFF"/>
+                </a:solidFill>
+              </a:rPr>
+              <a:t> </a:t>
+            </a:r>
+            <a:r>
+              <a:rPr lang="en-US" spc="-65" dirty="0"/>
+              <a:t>Methods</a:t>
+            </a:r>
+            <a:endParaRPr lang="en-US" dirty="0"/>
+          </a:p>
+        </p:txBody>
+      </p:sp>
+      <p:pic>
+        <p:nvPicPr>
+          <p:cNvPr id="5" name="Picture 4" descr="A screenshot of a computer program&#10;&#10;AI-generated content may be incorrect.">
+            <a:extLst>
+              <a:ext uri="{FF2B5EF4-FFF2-40B4-BE49-F238E27FC236}">
+                <a16:creationId xmlns:a16="http://schemas.microsoft.com/office/drawing/2014/main" id="{72FBB29C-EDDC-589A-C13A-AEFF782B072D}"/>
+              </a:ext>
+            </a:extLst>
+          </p:cNvPr>
+          <p:cNvPicPr>
+            <a:picLocks noChangeAspect="1"/>
+          </p:cNvPicPr>
+          <p:nvPr/>
+        </p:nvPicPr>
+        <p:blipFill>
+          <a:blip r:embed="rId2">
+            <a:extLst>
+              <a:ext uri="{28A0092B-C50C-407E-A947-70E740481C1C}">
+                <a14:useLocalDpi xmlns:a14="http://schemas.microsoft.com/office/drawing/2010/main" val="0"/>
+              </a:ext>
+            </a:extLst>
+          </a:blip>
+          <a:srcRect l="6560" t="11008" r="5251" b="6499"/>
+          <a:stretch>
+            <a:fillRect/>
+          </a:stretch>
+        </p:blipFill>
+        <p:spPr>
+          <a:xfrm>
+            <a:off x="6786224" y="494581"/>
+            <a:ext cx="10638694" cy="9791700"/>
+          </a:xfrm>
+          <a:prstGeom prst="rect">
+            <a:avLst/>
+          </a:prstGeom>
+        </p:spPr>
+      </p:pic>
+    </p:spTree>
+    <p:extLst>
+      <p:ext uri="{BB962C8B-B14F-4D97-AF65-F5344CB8AC3E}">
+        <p14:creationId xmlns:p14="http://schemas.microsoft.com/office/powerpoint/2010/main" val="816274206"/>
+      </p:ext>
+    </p:extLst>
+  </p:cSld>
+  <p:clrMapOvr>
+    <a:masterClrMapping/>
+  </p:clrMapOvr>
+  <p:transition spd="med">
+    <p:pull/>
+  </p:transition>
+</p:sld>
+</file>
+
+<file path=ppt/slides/slide12.xml><?xml version="1.0" encoding="utf-8"?>
+<p:sld xmlns:a="http://schemas.openxmlformats.org/drawingml/2006/main" xmlns:r="http://schemas.openxmlformats.org/officeDocument/2006/relationships" xmlns:p="http://schemas.openxmlformats.org/presentationml/2006/main">
+  <p:cSld>
+    <p:spTree>
+      <p:nvGrpSpPr>
+        <p:cNvPr id="1" name=""/>
+        <p:cNvGrpSpPr/>
+        <p:nvPr/>
+      </p:nvGrpSpPr>
+      <p:grpSpPr>
+        <a:xfrm>
+          <a:off x="0" y="0"/>
+          <a:ext cx="0" cy="0"/>
+          <a:chOff x="0" y="0"/>
+          <a:chExt cx="0" cy="0"/>
+        </a:xfrm>
+      </p:grpSpPr>
+      <p:sp>
+        <p:nvSpPr>
+          <p:cNvPr id="2" name="object 2"/>
+          <p:cNvSpPr txBox="1">
+            <a:spLocks noGrp="1"/>
+          </p:cNvSpPr>
+          <p:nvPr>
+            <p:ph type="title"/>
+          </p:nvPr>
+        </p:nvSpPr>
+        <p:spPr>
+          <a:prstGeom prst="rect">
+            <a:avLst/>
+          </a:prstGeom>
+        </p:spPr>
+        <p:txBody>
+          <a:bodyPr vert="horz" wrap="square" lIns="0" tIns="12700" rIns="0" bIns="0" rtlCol="0">
+            <a:spAutoFit/>
+          </a:bodyPr>
+          <a:lstStyle/>
+          <a:p>
+            <a:pPr marL="12700">
+              <a:lnSpc>
+                <a:spcPct val="100000"/>
+              </a:lnSpc>
+              <a:spcBef>
+                <a:spcPts val="100"/>
+              </a:spcBef>
+            </a:pPr>
+            <a:r>
+              <a:rPr spc="-114" dirty="0"/>
+              <a:t>Set</a:t>
+            </a:r>
+            <a:r>
+              <a:rPr spc="-335" dirty="0"/>
+              <a:t> </a:t>
+            </a:r>
+            <a:r>
+              <a:rPr dirty="0">
+                <a:solidFill>
+                  <a:srgbClr val="FFFFFF"/>
+                </a:solidFill>
+              </a:rPr>
+              <a:t>in</a:t>
+            </a:r>
+            <a:r>
+              <a:rPr spc="-330" dirty="0">
+                <a:solidFill>
+                  <a:srgbClr val="FFFFFF"/>
+                </a:solidFill>
+              </a:rPr>
+              <a:t> </a:t>
+            </a:r>
+            <a:r>
+              <a:rPr spc="-114" dirty="0">
+                <a:solidFill>
+                  <a:srgbClr val="FFFFFF"/>
+                </a:solidFill>
+              </a:rPr>
+              <a:t>Python</a:t>
+            </a:r>
+          </a:p>
+        </p:txBody>
+      </p:sp>
+      <p:sp>
+        <p:nvSpPr>
+          <p:cNvPr id="3" name="object 3"/>
+          <p:cNvSpPr txBox="1"/>
+          <p:nvPr/>
+        </p:nvSpPr>
+        <p:spPr>
+          <a:xfrm>
+            <a:off x="1016000" y="7572712"/>
+            <a:ext cx="2738120" cy="513080"/>
+          </a:xfrm>
+          <a:prstGeom prst="rect">
+            <a:avLst/>
+          </a:prstGeom>
+        </p:spPr>
+        <p:txBody>
+          <a:bodyPr vert="horz" wrap="square" lIns="0" tIns="12700" rIns="0" bIns="0" rtlCol="0">
+            <a:spAutoFit/>
+          </a:bodyPr>
+          <a:lstStyle/>
+          <a:p>
+            <a:pPr marL="12700">
+              <a:lnSpc>
+                <a:spcPct val="100000"/>
+              </a:lnSpc>
+              <a:spcBef>
+                <a:spcPts val="100"/>
+              </a:spcBef>
+            </a:pPr>
+            <a:r>
+              <a:rPr sz="3200" dirty="0">
+                <a:solidFill>
+                  <a:srgbClr val="FFFFFF"/>
+                </a:solidFill>
+                <a:latin typeface="Arial MT"/>
+                <a:cs typeface="Arial MT"/>
+              </a:rPr>
+              <a:t>null_set</a:t>
+            </a:r>
+            <a:r>
+              <a:rPr sz="3200" spc="-70" dirty="0">
+                <a:solidFill>
+                  <a:srgbClr val="FFFFFF"/>
+                </a:solidFill>
+                <a:latin typeface="Arial MT"/>
+                <a:cs typeface="Arial MT"/>
+              </a:rPr>
+              <a:t> </a:t>
+            </a:r>
+            <a:r>
+              <a:rPr sz="3200" spc="90" dirty="0">
+                <a:solidFill>
+                  <a:srgbClr val="FFFFFF"/>
+                </a:solidFill>
+                <a:latin typeface="Arial MT"/>
+                <a:cs typeface="Arial MT"/>
+              </a:rPr>
+              <a:t>=</a:t>
+            </a:r>
+            <a:r>
+              <a:rPr sz="3200" spc="-70" dirty="0">
+                <a:solidFill>
+                  <a:srgbClr val="FFFFFF"/>
+                </a:solidFill>
+                <a:latin typeface="Arial MT"/>
+                <a:cs typeface="Arial MT"/>
+              </a:rPr>
+              <a:t> </a:t>
+            </a:r>
+            <a:r>
+              <a:rPr sz="3200" spc="-105" dirty="0">
+                <a:solidFill>
+                  <a:srgbClr val="FFFFFF"/>
+                </a:solidFill>
+                <a:latin typeface="Arial MT"/>
+                <a:cs typeface="Arial MT"/>
+              </a:rPr>
+              <a:t>set(</a:t>
+            </a:r>
+            <a:r>
+              <a:rPr sz="3200" spc="-70" dirty="0">
+                <a:solidFill>
+                  <a:srgbClr val="FFFFFF"/>
+                </a:solidFill>
+                <a:latin typeface="Arial MT"/>
+                <a:cs typeface="Arial MT"/>
+              </a:rPr>
+              <a:t> </a:t>
+            </a:r>
+            <a:r>
+              <a:rPr sz="3200" spc="-50" dirty="0">
+                <a:solidFill>
+                  <a:srgbClr val="FFFFFF"/>
+                </a:solidFill>
+                <a:latin typeface="Arial MT"/>
+                <a:cs typeface="Arial MT"/>
+              </a:rPr>
+              <a:t>)</a:t>
+            </a:r>
+            <a:endParaRPr sz="3200">
+              <a:latin typeface="Arial MT"/>
+              <a:cs typeface="Arial MT"/>
+            </a:endParaRPr>
+          </a:p>
+        </p:txBody>
+      </p:sp>
+      <p:sp>
+        <p:nvSpPr>
+          <p:cNvPr id="4" name="object 4"/>
+          <p:cNvSpPr txBox="1"/>
+          <p:nvPr/>
+        </p:nvSpPr>
+        <p:spPr>
+          <a:xfrm>
+            <a:off x="4621817" y="7572712"/>
+            <a:ext cx="3224530" cy="513080"/>
+          </a:xfrm>
+          <a:prstGeom prst="rect">
+            <a:avLst/>
+          </a:prstGeom>
+        </p:spPr>
+        <p:txBody>
+          <a:bodyPr vert="horz" wrap="square" lIns="0" tIns="12700" rIns="0" bIns="0" rtlCol="0">
+            <a:spAutoFit/>
+          </a:bodyPr>
+          <a:lstStyle/>
+          <a:p>
+            <a:pPr marL="12700">
+              <a:lnSpc>
+                <a:spcPct val="100000"/>
+              </a:lnSpc>
+              <a:spcBef>
+                <a:spcPts val="100"/>
+              </a:spcBef>
+            </a:pPr>
+            <a:r>
+              <a:rPr sz="3200" dirty="0">
+                <a:solidFill>
+                  <a:srgbClr val="32BD15"/>
+                </a:solidFill>
+                <a:latin typeface="Arial MT"/>
+                <a:cs typeface="Arial MT"/>
+              </a:rPr>
+              <a:t>#empty</a:t>
+            </a:r>
+            <a:r>
+              <a:rPr sz="3200" spc="-10" dirty="0">
+                <a:solidFill>
+                  <a:srgbClr val="32BD15"/>
+                </a:solidFill>
+                <a:latin typeface="Arial MT"/>
+                <a:cs typeface="Arial MT"/>
+              </a:rPr>
+              <a:t> </a:t>
+            </a:r>
+            <a:r>
+              <a:rPr sz="3200" spc="-45" dirty="0">
+                <a:solidFill>
+                  <a:srgbClr val="32BD15"/>
+                </a:solidFill>
+                <a:latin typeface="Arial MT"/>
+                <a:cs typeface="Arial MT"/>
+              </a:rPr>
+              <a:t>set</a:t>
+            </a:r>
+            <a:r>
+              <a:rPr sz="3200" spc="-10" dirty="0">
+                <a:solidFill>
+                  <a:srgbClr val="32BD15"/>
+                </a:solidFill>
+                <a:latin typeface="Arial MT"/>
+                <a:cs typeface="Arial MT"/>
+              </a:rPr>
+              <a:t> </a:t>
+            </a:r>
+            <a:r>
+              <a:rPr sz="3200" spc="-65" dirty="0">
+                <a:solidFill>
+                  <a:srgbClr val="32BD15"/>
+                </a:solidFill>
+                <a:latin typeface="Arial MT"/>
+                <a:cs typeface="Arial MT"/>
+              </a:rPr>
+              <a:t>syntax</a:t>
+            </a:r>
+            <a:endParaRPr sz="3200">
+              <a:latin typeface="Arial MT"/>
+              <a:cs typeface="Arial MT"/>
+            </a:endParaRPr>
+          </a:p>
+        </p:txBody>
+      </p:sp>
+      <p:sp>
+        <p:nvSpPr>
+          <p:cNvPr id="5" name="object 5"/>
+          <p:cNvSpPr/>
+          <p:nvPr/>
+        </p:nvSpPr>
+        <p:spPr>
+          <a:xfrm>
+            <a:off x="989578" y="1844188"/>
+            <a:ext cx="3766185" cy="24130"/>
+          </a:xfrm>
+          <a:custGeom>
+            <a:avLst/>
+            <a:gdLst/>
+            <a:ahLst/>
+            <a:cxnLst/>
+            <a:rect l="l" t="t" r="r" b="b"/>
+            <a:pathLst>
+              <a:path w="3766185" h="24130">
+                <a:moveTo>
+                  <a:pt x="0" y="23515"/>
+                </a:moveTo>
+                <a:lnTo>
+                  <a:pt x="3765702" y="0"/>
+                </a:lnTo>
+              </a:path>
+            </a:pathLst>
+          </a:custGeom>
+          <a:ln w="47625">
+            <a:solidFill>
+              <a:srgbClr val="FFFFFF"/>
+            </a:solidFill>
+          </a:ln>
+        </p:spPr>
+        <p:txBody>
+          <a:bodyPr wrap="square" lIns="0" tIns="0" rIns="0" bIns="0" rtlCol="0"/>
+          <a:lstStyle/>
+          <a:p>
+            <a:endParaRPr/>
+          </a:p>
+        </p:txBody>
+      </p:sp>
+      <p:sp>
+        <p:nvSpPr>
+          <p:cNvPr id="6" name="object 6"/>
+          <p:cNvSpPr txBox="1"/>
+          <p:nvPr/>
+        </p:nvSpPr>
+        <p:spPr>
+          <a:xfrm>
+            <a:off x="953066" y="2048136"/>
+            <a:ext cx="10615930" cy="4633595"/>
+          </a:xfrm>
+          <a:prstGeom prst="rect">
+            <a:avLst/>
+          </a:prstGeom>
+        </p:spPr>
+        <p:txBody>
+          <a:bodyPr vert="horz" wrap="square" lIns="0" tIns="210820" rIns="0" bIns="0" rtlCol="0">
+            <a:spAutoFit/>
+          </a:bodyPr>
+          <a:lstStyle/>
+          <a:p>
+            <a:pPr marL="12700">
+              <a:lnSpc>
+                <a:spcPct val="100000"/>
+              </a:lnSpc>
+              <a:spcBef>
+                <a:spcPts val="1660"/>
+              </a:spcBef>
+            </a:pPr>
+            <a:r>
+              <a:rPr sz="3200" spc="-75" dirty="0">
+                <a:solidFill>
+                  <a:srgbClr val="FFFFFF"/>
+                </a:solidFill>
+                <a:latin typeface="Tahoma"/>
+                <a:cs typeface="Tahoma"/>
+              </a:rPr>
+              <a:t>Set</a:t>
+            </a:r>
+            <a:r>
+              <a:rPr sz="3200" spc="-200" dirty="0">
+                <a:solidFill>
+                  <a:srgbClr val="FFFFFF"/>
+                </a:solidFill>
+                <a:latin typeface="Tahoma"/>
+                <a:cs typeface="Tahoma"/>
+              </a:rPr>
+              <a:t> </a:t>
+            </a:r>
+            <a:r>
+              <a:rPr sz="3200" spc="55" dirty="0">
+                <a:solidFill>
+                  <a:srgbClr val="FFFFFF"/>
+                </a:solidFill>
+                <a:latin typeface="Tahoma"/>
+                <a:cs typeface="Tahoma"/>
+              </a:rPr>
+              <a:t>is</a:t>
+            </a:r>
+            <a:r>
+              <a:rPr sz="3200" spc="-200" dirty="0">
+                <a:solidFill>
+                  <a:srgbClr val="FFFFFF"/>
+                </a:solidFill>
+                <a:latin typeface="Tahoma"/>
+                <a:cs typeface="Tahoma"/>
+              </a:rPr>
+              <a:t> </a:t>
+            </a:r>
+            <a:r>
+              <a:rPr sz="3200" spc="-70" dirty="0">
+                <a:solidFill>
+                  <a:srgbClr val="FFFFFF"/>
+                </a:solidFill>
+                <a:latin typeface="Tahoma"/>
+                <a:cs typeface="Tahoma"/>
+              </a:rPr>
+              <a:t>the</a:t>
+            </a:r>
+            <a:r>
+              <a:rPr sz="3200" spc="-195" dirty="0">
+                <a:solidFill>
+                  <a:srgbClr val="FFFFFF"/>
+                </a:solidFill>
+                <a:latin typeface="Tahoma"/>
+                <a:cs typeface="Tahoma"/>
+              </a:rPr>
+              <a:t> </a:t>
+            </a:r>
+            <a:r>
+              <a:rPr sz="3200" spc="-45" dirty="0">
+                <a:solidFill>
+                  <a:srgbClr val="FFFFFF"/>
+                </a:solidFill>
+                <a:latin typeface="Tahoma"/>
+                <a:cs typeface="Tahoma"/>
+              </a:rPr>
+              <a:t>collection</a:t>
+            </a:r>
+            <a:r>
+              <a:rPr sz="3200" spc="-200" dirty="0">
+                <a:solidFill>
+                  <a:srgbClr val="FFFFFF"/>
+                </a:solidFill>
+                <a:latin typeface="Tahoma"/>
+                <a:cs typeface="Tahoma"/>
+              </a:rPr>
+              <a:t> </a:t>
+            </a:r>
+            <a:r>
+              <a:rPr sz="3200" spc="-70" dirty="0">
+                <a:solidFill>
+                  <a:srgbClr val="FFFFFF"/>
+                </a:solidFill>
+                <a:latin typeface="Tahoma"/>
+                <a:cs typeface="Tahoma"/>
+              </a:rPr>
+              <a:t>of</a:t>
+            </a:r>
+            <a:r>
+              <a:rPr sz="3200" spc="-200" dirty="0">
+                <a:solidFill>
+                  <a:srgbClr val="FFFFFF"/>
+                </a:solidFill>
+                <a:latin typeface="Tahoma"/>
+                <a:cs typeface="Tahoma"/>
+              </a:rPr>
+              <a:t> </a:t>
+            </a:r>
+            <a:r>
+              <a:rPr sz="3200" spc="-70" dirty="0">
+                <a:solidFill>
+                  <a:srgbClr val="FFFFFF"/>
+                </a:solidFill>
+                <a:latin typeface="Tahoma"/>
+                <a:cs typeface="Tahoma"/>
+              </a:rPr>
+              <a:t>the</a:t>
+            </a:r>
+            <a:r>
+              <a:rPr sz="3200" spc="-195" dirty="0">
+                <a:solidFill>
+                  <a:srgbClr val="FFFFFF"/>
+                </a:solidFill>
+                <a:latin typeface="Tahoma"/>
+                <a:cs typeface="Tahoma"/>
+              </a:rPr>
+              <a:t> </a:t>
+            </a:r>
+            <a:r>
+              <a:rPr sz="3200" spc="-80" dirty="0">
+                <a:solidFill>
+                  <a:srgbClr val="FFFFFF"/>
+                </a:solidFill>
+                <a:latin typeface="Tahoma"/>
+                <a:cs typeface="Tahoma"/>
+              </a:rPr>
+              <a:t>unordered</a:t>
+            </a:r>
+            <a:r>
+              <a:rPr sz="3200" spc="-200" dirty="0">
+                <a:solidFill>
+                  <a:srgbClr val="FFFFFF"/>
+                </a:solidFill>
+                <a:latin typeface="Tahoma"/>
+                <a:cs typeface="Tahoma"/>
+              </a:rPr>
+              <a:t> </a:t>
+            </a:r>
+            <a:r>
+              <a:rPr sz="3200" spc="-10" dirty="0">
+                <a:solidFill>
+                  <a:srgbClr val="FFFFFF"/>
+                </a:solidFill>
+                <a:latin typeface="Tahoma"/>
+                <a:cs typeface="Tahoma"/>
+              </a:rPr>
+              <a:t>items.</a:t>
+            </a:r>
+            <a:endParaRPr sz="3200">
+              <a:latin typeface="Tahoma"/>
+              <a:cs typeface="Tahoma"/>
+            </a:endParaRPr>
+          </a:p>
+          <a:p>
+            <a:pPr marL="12700">
+              <a:lnSpc>
+                <a:spcPct val="100000"/>
+              </a:lnSpc>
+              <a:spcBef>
+                <a:spcPts val="1560"/>
+              </a:spcBef>
+            </a:pPr>
+            <a:r>
+              <a:rPr sz="3200" spc="-150" dirty="0">
+                <a:solidFill>
+                  <a:srgbClr val="FFFFFF"/>
+                </a:solidFill>
+                <a:latin typeface="Tahoma"/>
+                <a:cs typeface="Tahoma"/>
+              </a:rPr>
+              <a:t>Each</a:t>
+            </a:r>
+            <a:r>
+              <a:rPr sz="3200" spc="-204" dirty="0">
+                <a:solidFill>
+                  <a:srgbClr val="FFFFFF"/>
+                </a:solidFill>
+                <a:latin typeface="Tahoma"/>
+                <a:cs typeface="Tahoma"/>
+              </a:rPr>
+              <a:t> </a:t>
+            </a:r>
+            <a:r>
+              <a:rPr sz="3200" spc="-120" dirty="0">
+                <a:solidFill>
+                  <a:srgbClr val="FFFFFF"/>
+                </a:solidFill>
+                <a:latin typeface="Tahoma"/>
+                <a:cs typeface="Tahoma"/>
+              </a:rPr>
+              <a:t>element</a:t>
+            </a:r>
+            <a:r>
+              <a:rPr sz="3200" spc="-200" dirty="0">
+                <a:solidFill>
+                  <a:srgbClr val="FFFFFF"/>
+                </a:solidFill>
+                <a:latin typeface="Tahoma"/>
+                <a:cs typeface="Tahoma"/>
+              </a:rPr>
+              <a:t> </a:t>
+            </a:r>
+            <a:r>
+              <a:rPr sz="3200" dirty="0">
+                <a:solidFill>
+                  <a:srgbClr val="FFFFFF"/>
+                </a:solidFill>
+                <a:latin typeface="Tahoma"/>
+                <a:cs typeface="Tahoma"/>
+              </a:rPr>
+              <a:t>in</a:t>
+            </a:r>
+            <a:r>
+              <a:rPr sz="3200" spc="-204" dirty="0">
+                <a:solidFill>
+                  <a:srgbClr val="FFFFFF"/>
+                </a:solidFill>
+                <a:latin typeface="Tahoma"/>
+                <a:cs typeface="Tahoma"/>
+              </a:rPr>
+              <a:t> </a:t>
+            </a:r>
+            <a:r>
+              <a:rPr sz="3200" spc="-70" dirty="0">
+                <a:solidFill>
+                  <a:srgbClr val="FFFFFF"/>
+                </a:solidFill>
+                <a:latin typeface="Tahoma"/>
+                <a:cs typeface="Tahoma"/>
+              </a:rPr>
+              <a:t>the</a:t>
+            </a:r>
+            <a:r>
+              <a:rPr sz="3200" spc="-200" dirty="0">
+                <a:solidFill>
+                  <a:srgbClr val="FFFFFF"/>
+                </a:solidFill>
+                <a:latin typeface="Tahoma"/>
+                <a:cs typeface="Tahoma"/>
+              </a:rPr>
+              <a:t> </a:t>
+            </a:r>
+            <a:r>
+              <a:rPr sz="3200" spc="-45" dirty="0">
+                <a:solidFill>
+                  <a:srgbClr val="FFFFFF"/>
+                </a:solidFill>
+                <a:latin typeface="Tahoma"/>
+                <a:cs typeface="Tahoma"/>
+              </a:rPr>
+              <a:t>set</a:t>
+            </a:r>
+            <a:r>
+              <a:rPr sz="3200" spc="-200" dirty="0">
+                <a:solidFill>
+                  <a:srgbClr val="FFFFFF"/>
+                </a:solidFill>
+                <a:latin typeface="Tahoma"/>
+                <a:cs typeface="Tahoma"/>
+              </a:rPr>
+              <a:t> </a:t>
+            </a:r>
+            <a:r>
+              <a:rPr sz="3200" spc="-95" dirty="0">
+                <a:solidFill>
+                  <a:srgbClr val="FFFFFF"/>
+                </a:solidFill>
+                <a:latin typeface="Tahoma"/>
+                <a:cs typeface="Tahoma"/>
+              </a:rPr>
+              <a:t>must</a:t>
+            </a:r>
+            <a:r>
+              <a:rPr sz="3200" spc="-204" dirty="0">
+                <a:solidFill>
+                  <a:srgbClr val="FFFFFF"/>
+                </a:solidFill>
+                <a:latin typeface="Tahoma"/>
+                <a:cs typeface="Tahoma"/>
+              </a:rPr>
+              <a:t> </a:t>
+            </a:r>
+            <a:r>
+              <a:rPr sz="3200" spc="-165" dirty="0">
+                <a:solidFill>
+                  <a:srgbClr val="FFFFFF"/>
+                </a:solidFill>
+                <a:latin typeface="Tahoma"/>
+                <a:cs typeface="Tahoma"/>
+              </a:rPr>
+              <a:t>be</a:t>
+            </a:r>
+            <a:r>
+              <a:rPr sz="3200" spc="-200" dirty="0">
+                <a:solidFill>
+                  <a:srgbClr val="FFFFFF"/>
+                </a:solidFill>
+                <a:latin typeface="Tahoma"/>
+                <a:cs typeface="Tahoma"/>
+              </a:rPr>
+              <a:t> </a:t>
+            </a:r>
+            <a:r>
+              <a:rPr sz="3200" spc="-90" dirty="0">
+                <a:solidFill>
+                  <a:srgbClr val="FFFFFF"/>
+                </a:solidFill>
+                <a:latin typeface="Tahoma"/>
+                <a:cs typeface="Tahoma"/>
+              </a:rPr>
+              <a:t>unique</a:t>
+            </a:r>
+            <a:r>
+              <a:rPr sz="3200" spc="-200" dirty="0">
+                <a:solidFill>
+                  <a:srgbClr val="FFFFFF"/>
+                </a:solidFill>
+                <a:latin typeface="Tahoma"/>
+                <a:cs typeface="Tahoma"/>
+              </a:rPr>
+              <a:t> </a:t>
+            </a:r>
+            <a:r>
+              <a:rPr sz="3200" spc="-180" dirty="0">
+                <a:solidFill>
+                  <a:srgbClr val="FFFFFF"/>
+                </a:solidFill>
+                <a:latin typeface="Tahoma"/>
+                <a:cs typeface="Tahoma"/>
+              </a:rPr>
+              <a:t>&amp;</a:t>
+            </a:r>
+            <a:r>
+              <a:rPr sz="3200" spc="-204" dirty="0">
+                <a:solidFill>
+                  <a:srgbClr val="FFFFFF"/>
+                </a:solidFill>
+                <a:latin typeface="Tahoma"/>
+                <a:cs typeface="Tahoma"/>
+              </a:rPr>
+              <a:t> </a:t>
+            </a:r>
+            <a:r>
+              <a:rPr sz="3200" spc="-10" dirty="0">
+                <a:solidFill>
+                  <a:srgbClr val="FFFFFF"/>
+                </a:solidFill>
+                <a:latin typeface="Tahoma"/>
+                <a:cs typeface="Tahoma"/>
+              </a:rPr>
+              <a:t>immutable.</a:t>
+            </a:r>
+            <a:endParaRPr sz="3200">
+              <a:latin typeface="Tahoma"/>
+              <a:cs typeface="Tahoma"/>
+            </a:endParaRPr>
+          </a:p>
+          <a:p>
+            <a:pPr>
+              <a:lnSpc>
+                <a:spcPct val="100000"/>
+              </a:lnSpc>
+            </a:pPr>
+            <a:endParaRPr sz="3200">
+              <a:latin typeface="Tahoma"/>
+              <a:cs typeface="Tahoma"/>
+            </a:endParaRPr>
+          </a:p>
+          <a:p>
+            <a:pPr>
+              <a:lnSpc>
+                <a:spcPct val="100000"/>
+              </a:lnSpc>
+              <a:spcBef>
+                <a:spcPts val="1255"/>
+              </a:spcBef>
+            </a:pPr>
+            <a:endParaRPr sz="3200">
+              <a:latin typeface="Tahoma"/>
+              <a:cs typeface="Tahoma"/>
+            </a:endParaRPr>
+          </a:p>
+          <a:p>
+            <a:pPr marL="12700">
+              <a:lnSpc>
+                <a:spcPct val="100000"/>
+              </a:lnSpc>
+            </a:pPr>
+            <a:r>
+              <a:rPr sz="3200" spc="-65" dirty="0">
+                <a:solidFill>
+                  <a:srgbClr val="FFFFFF"/>
+                </a:solidFill>
+                <a:latin typeface="Arial MT"/>
+                <a:cs typeface="Arial MT"/>
+              </a:rPr>
+              <a:t>nums</a:t>
+            </a:r>
+            <a:r>
+              <a:rPr sz="3200" spc="-40" dirty="0">
+                <a:solidFill>
+                  <a:srgbClr val="FFFFFF"/>
+                </a:solidFill>
+                <a:latin typeface="Arial MT"/>
+                <a:cs typeface="Arial MT"/>
+              </a:rPr>
+              <a:t> </a:t>
+            </a:r>
+            <a:r>
+              <a:rPr sz="3200" spc="90" dirty="0">
+                <a:solidFill>
+                  <a:srgbClr val="FFFFFF"/>
+                </a:solidFill>
+                <a:latin typeface="Arial MT"/>
+                <a:cs typeface="Arial MT"/>
+              </a:rPr>
+              <a:t>=</a:t>
+            </a:r>
+            <a:r>
+              <a:rPr sz="3200" spc="-40" dirty="0">
+                <a:solidFill>
+                  <a:srgbClr val="FFFFFF"/>
+                </a:solidFill>
+                <a:latin typeface="Arial MT"/>
+                <a:cs typeface="Arial MT"/>
+              </a:rPr>
+              <a:t> </a:t>
+            </a:r>
+            <a:r>
+              <a:rPr sz="3200" dirty="0">
+                <a:solidFill>
+                  <a:srgbClr val="FFFFFF"/>
+                </a:solidFill>
+                <a:latin typeface="Arial MT"/>
+                <a:cs typeface="Arial MT"/>
+              </a:rPr>
+              <a:t>{</a:t>
+            </a:r>
+            <a:r>
+              <a:rPr sz="3200" spc="-35" dirty="0">
+                <a:solidFill>
+                  <a:srgbClr val="FFFFFF"/>
+                </a:solidFill>
+                <a:latin typeface="Arial MT"/>
+                <a:cs typeface="Arial MT"/>
+              </a:rPr>
+              <a:t> </a:t>
+            </a:r>
+            <a:r>
+              <a:rPr sz="3200" dirty="0">
+                <a:solidFill>
+                  <a:srgbClr val="FFFFFF"/>
+                </a:solidFill>
+                <a:latin typeface="Arial MT"/>
+                <a:cs typeface="Arial MT"/>
+              </a:rPr>
+              <a:t>1,</a:t>
+            </a:r>
+            <a:r>
+              <a:rPr sz="3200" spc="-40" dirty="0">
+                <a:solidFill>
+                  <a:srgbClr val="FFFFFF"/>
+                </a:solidFill>
+                <a:latin typeface="Arial MT"/>
+                <a:cs typeface="Arial MT"/>
+              </a:rPr>
+              <a:t> </a:t>
+            </a:r>
+            <a:r>
+              <a:rPr sz="3200" dirty="0">
+                <a:solidFill>
+                  <a:srgbClr val="FFFFFF"/>
+                </a:solidFill>
+                <a:latin typeface="Arial MT"/>
+                <a:cs typeface="Arial MT"/>
+              </a:rPr>
+              <a:t>2,</a:t>
+            </a:r>
+            <a:r>
+              <a:rPr sz="3200" spc="-35" dirty="0">
+                <a:solidFill>
+                  <a:srgbClr val="FFFFFF"/>
+                </a:solidFill>
+                <a:latin typeface="Arial MT"/>
+                <a:cs typeface="Arial MT"/>
+              </a:rPr>
+              <a:t> </a:t>
+            </a:r>
+            <a:r>
+              <a:rPr sz="3200" dirty="0">
+                <a:solidFill>
+                  <a:srgbClr val="FFFFFF"/>
+                </a:solidFill>
+                <a:latin typeface="Arial MT"/>
+                <a:cs typeface="Arial MT"/>
+              </a:rPr>
+              <a:t>3,</a:t>
+            </a:r>
+            <a:r>
+              <a:rPr sz="3200" spc="-40" dirty="0">
+                <a:solidFill>
+                  <a:srgbClr val="FFFFFF"/>
+                </a:solidFill>
+                <a:latin typeface="Arial MT"/>
+                <a:cs typeface="Arial MT"/>
+              </a:rPr>
+              <a:t> </a:t>
+            </a:r>
+            <a:r>
+              <a:rPr sz="3200" dirty="0">
+                <a:solidFill>
+                  <a:srgbClr val="FFFFFF"/>
+                </a:solidFill>
+                <a:latin typeface="Arial MT"/>
+                <a:cs typeface="Arial MT"/>
+              </a:rPr>
+              <a:t>4</a:t>
+            </a:r>
+            <a:r>
+              <a:rPr sz="3200" spc="-35" dirty="0">
+                <a:solidFill>
+                  <a:srgbClr val="FFFFFF"/>
+                </a:solidFill>
+                <a:latin typeface="Arial MT"/>
+                <a:cs typeface="Arial MT"/>
+              </a:rPr>
+              <a:t> </a:t>
+            </a:r>
+            <a:r>
+              <a:rPr sz="3200" spc="-50" dirty="0">
+                <a:solidFill>
+                  <a:srgbClr val="FFFFFF"/>
+                </a:solidFill>
+                <a:latin typeface="Arial MT"/>
+                <a:cs typeface="Arial MT"/>
+              </a:rPr>
+              <a:t>}</a:t>
+            </a:r>
+            <a:endParaRPr sz="3200">
+              <a:latin typeface="Arial MT"/>
+              <a:cs typeface="Arial MT"/>
+            </a:endParaRPr>
+          </a:p>
+          <a:p>
+            <a:pPr marL="12700">
+              <a:lnSpc>
+                <a:spcPct val="100000"/>
+              </a:lnSpc>
+              <a:spcBef>
+                <a:spcPts val="3440"/>
+              </a:spcBef>
+            </a:pPr>
+            <a:r>
+              <a:rPr sz="3200" spc="-35" dirty="0">
+                <a:solidFill>
+                  <a:srgbClr val="FFFFFF"/>
+                </a:solidFill>
+                <a:latin typeface="Arial MT"/>
+                <a:cs typeface="Arial MT"/>
+              </a:rPr>
+              <a:t>set2</a:t>
+            </a:r>
+            <a:r>
+              <a:rPr sz="3200" spc="-40" dirty="0">
+                <a:solidFill>
+                  <a:srgbClr val="FFFFFF"/>
+                </a:solidFill>
+                <a:latin typeface="Arial MT"/>
+                <a:cs typeface="Arial MT"/>
+              </a:rPr>
+              <a:t> </a:t>
+            </a:r>
+            <a:r>
+              <a:rPr sz="3200" spc="90" dirty="0">
+                <a:solidFill>
+                  <a:srgbClr val="FFFFFF"/>
+                </a:solidFill>
+                <a:latin typeface="Arial MT"/>
+                <a:cs typeface="Arial MT"/>
+              </a:rPr>
+              <a:t>=</a:t>
+            </a:r>
+            <a:r>
+              <a:rPr sz="3200" spc="-40" dirty="0">
+                <a:solidFill>
+                  <a:srgbClr val="FFFFFF"/>
+                </a:solidFill>
+                <a:latin typeface="Arial MT"/>
+                <a:cs typeface="Arial MT"/>
+              </a:rPr>
+              <a:t> </a:t>
+            </a:r>
+            <a:r>
+              <a:rPr sz="3200" dirty="0">
+                <a:solidFill>
+                  <a:srgbClr val="FFFFFF"/>
+                </a:solidFill>
+                <a:latin typeface="Arial MT"/>
+                <a:cs typeface="Arial MT"/>
+              </a:rPr>
+              <a:t>{</a:t>
+            </a:r>
+            <a:r>
+              <a:rPr sz="3200" spc="-40" dirty="0">
+                <a:solidFill>
+                  <a:srgbClr val="FFFFFF"/>
+                </a:solidFill>
+                <a:latin typeface="Arial MT"/>
+                <a:cs typeface="Arial MT"/>
+              </a:rPr>
+              <a:t> </a:t>
+            </a:r>
+            <a:r>
+              <a:rPr sz="3200" dirty="0">
+                <a:solidFill>
+                  <a:srgbClr val="FFFFFF"/>
+                </a:solidFill>
+                <a:latin typeface="Arial MT"/>
+                <a:cs typeface="Arial MT"/>
+              </a:rPr>
+              <a:t>1,</a:t>
+            </a:r>
+            <a:r>
+              <a:rPr sz="3200" spc="-35" dirty="0">
+                <a:solidFill>
+                  <a:srgbClr val="FFFFFF"/>
+                </a:solidFill>
+                <a:latin typeface="Arial MT"/>
+                <a:cs typeface="Arial MT"/>
+              </a:rPr>
+              <a:t> </a:t>
+            </a:r>
+            <a:r>
+              <a:rPr sz="3200" dirty="0">
+                <a:solidFill>
+                  <a:srgbClr val="FFFFFF"/>
+                </a:solidFill>
+                <a:latin typeface="Arial MT"/>
+                <a:cs typeface="Arial MT"/>
+              </a:rPr>
+              <a:t>2,</a:t>
+            </a:r>
+            <a:r>
+              <a:rPr sz="3200" spc="-40" dirty="0">
+                <a:solidFill>
+                  <a:srgbClr val="FFFFFF"/>
+                </a:solidFill>
+                <a:latin typeface="Arial MT"/>
+                <a:cs typeface="Arial MT"/>
+              </a:rPr>
+              <a:t> </a:t>
+            </a:r>
+            <a:r>
+              <a:rPr sz="3200" dirty="0">
+                <a:solidFill>
+                  <a:srgbClr val="FFFFFF"/>
+                </a:solidFill>
+                <a:latin typeface="Arial MT"/>
+                <a:cs typeface="Arial MT"/>
+              </a:rPr>
+              <a:t>2,</a:t>
+            </a:r>
+            <a:r>
+              <a:rPr sz="3200" spc="-40" dirty="0">
+                <a:solidFill>
+                  <a:srgbClr val="FFFFFF"/>
+                </a:solidFill>
+                <a:latin typeface="Arial MT"/>
+                <a:cs typeface="Arial MT"/>
+              </a:rPr>
+              <a:t> </a:t>
+            </a:r>
+            <a:r>
+              <a:rPr sz="3200" dirty="0">
+                <a:solidFill>
+                  <a:srgbClr val="FFFFFF"/>
+                </a:solidFill>
+                <a:latin typeface="Arial MT"/>
+                <a:cs typeface="Arial MT"/>
+              </a:rPr>
+              <a:t>2</a:t>
+            </a:r>
+            <a:r>
+              <a:rPr sz="3200" spc="-35" dirty="0">
+                <a:solidFill>
+                  <a:srgbClr val="FFFFFF"/>
+                </a:solidFill>
+                <a:latin typeface="Arial MT"/>
+                <a:cs typeface="Arial MT"/>
+              </a:rPr>
+              <a:t> </a:t>
+            </a:r>
+            <a:r>
+              <a:rPr sz="3200" spc="-50" dirty="0">
+                <a:solidFill>
+                  <a:srgbClr val="FFFFFF"/>
+                </a:solidFill>
+                <a:latin typeface="Arial MT"/>
+                <a:cs typeface="Arial MT"/>
+              </a:rPr>
+              <a:t>}</a:t>
+            </a:r>
+            <a:endParaRPr sz="3200">
+              <a:latin typeface="Arial MT"/>
+              <a:cs typeface="Arial MT"/>
+            </a:endParaRPr>
+          </a:p>
+          <a:p>
+            <a:pPr marL="12700">
+              <a:lnSpc>
+                <a:spcPct val="100000"/>
+              </a:lnSpc>
+              <a:spcBef>
+                <a:spcPts val="1540"/>
+              </a:spcBef>
+            </a:pPr>
+            <a:r>
+              <a:rPr sz="3200" dirty="0">
+                <a:solidFill>
+                  <a:srgbClr val="32BD15"/>
+                </a:solidFill>
+                <a:latin typeface="Arial MT"/>
+                <a:cs typeface="Arial MT"/>
+              </a:rPr>
+              <a:t>#repeated</a:t>
+            </a:r>
+            <a:r>
+              <a:rPr sz="3200" spc="-125" dirty="0">
+                <a:solidFill>
+                  <a:srgbClr val="32BD15"/>
+                </a:solidFill>
+                <a:latin typeface="Arial MT"/>
+                <a:cs typeface="Arial MT"/>
+              </a:rPr>
+              <a:t> </a:t>
+            </a:r>
+            <a:r>
+              <a:rPr sz="3200" spc="-60" dirty="0">
+                <a:solidFill>
+                  <a:srgbClr val="32BD15"/>
+                </a:solidFill>
+                <a:latin typeface="Arial MT"/>
+                <a:cs typeface="Arial MT"/>
+              </a:rPr>
+              <a:t>elements</a:t>
+            </a:r>
+            <a:r>
+              <a:rPr sz="3200" spc="-114" dirty="0">
+                <a:solidFill>
+                  <a:srgbClr val="32BD15"/>
+                </a:solidFill>
+                <a:latin typeface="Arial MT"/>
+                <a:cs typeface="Arial MT"/>
+              </a:rPr>
+              <a:t> </a:t>
+            </a:r>
+            <a:r>
+              <a:rPr sz="3200" dirty="0">
+                <a:solidFill>
+                  <a:srgbClr val="32BD15"/>
+                </a:solidFill>
+                <a:latin typeface="Arial MT"/>
+                <a:cs typeface="Arial MT"/>
+              </a:rPr>
+              <a:t>stored</a:t>
+            </a:r>
+            <a:r>
+              <a:rPr sz="3200" spc="-114" dirty="0">
+                <a:solidFill>
+                  <a:srgbClr val="32BD15"/>
+                </a:solidFill>
+                <a:latin typeface="Arial MT"/>
+                <a:cs typeface="Arial MT"/>
+              </a:rPr>
+              <a:t> </a:t>
+            </a:r>
+            <a:r>
+              <a:rPr sz="3200" dirty="0">
+                <a:solidFill>
+                  <a:srgbClr val="32BD15"/>
+                </a:solidFill>
+                <a:latin typeface="Arial MT"/>
+                <a:cs typeface="Arial MT"/>
+              </a:rPr>
+              <a:t>only</a:t>
+            </a:r>
+            <a:r>
+              <a:rPr sz="3200" spc="-110" dirty="0">
+                <a:solidFill>
+                  <a:srgbClr val="32BD15"/>
+                </a:solidFill>
+                <a:latin typeface="Arial MT"/>
+                <a:cs typeface="Arial MT"/>
+              </a:rPr>
+              <a:t> </a:t>
+            </a:r>
+            <a:r>
+              <a:rPr sz="3200" spc="-20" dirty="0">
+                <a:solidFill>
+                  <a:srgbClr val="32BD15"/>
+                </a:solidFill>
+                <a:latin typeface="Arial MT"/>
+                <a:cs typeface="Arial MT"/>
+              </a:rPr>
+              <a:t>once,</a:t>
+            </a:r>
+            <a:r>
+              <a:rPr sz="3200" spc="-114" dirty="0">
+                <a:solidFill>
+                  <a:srgbClr val="32BD15"/>
+                </a:solidFill>
+                <a:latin typeface="Arial MT"/>
+                <a:cs typeface="Arial MT"/>
+              </a:rPr>
+              <a:t> </a:t>
+            </a:r>
+            <a:r>
+              <a:rPr sz="3200" spc="-120" dirty="0">
+                <a:solidFill>
+                  <a:srgbClr val="32BD15"/>
+                </a:solidFill>
+                <a:latin typeface="Arial MT"/>
+                <a:cs typeface="Arial MT"/>
+              </a:rPr>
+              <a:t>so</a:t>
+            </a:r>
+            <a:r>
+              <a:rPr sz="3200" spc="-100" dirty="0">
+                <a:solidFill>
+                  <a:srgbClr val="32BD15"/>
+                </a:solidFill>
+                <a:latin typeface="Arial MT"/>
+                <a:cs typeface="Arial MT"/>
+              </a:rPr>
+              <a:t> </a:t>
+            </a:r>
+            <a:r>
+              <a:rPr sz="3200" spc="100" dirty="0">
+                <a:solidFill>
+                  <a:srgbClr val="32BD15"/>
+                </a:solidFill>
+                <a:latin typeface="Arial MT"/>
+                <a:cs typeface="Arial MT"/>
+              </a:rPr>
+              <a:t>it</a:t>
+            </a:r>
+            <a:r>
+              <a:rPr sz="3200" spc="-114" dirty="0">
+                <a:solidFill>
+                  <a:srgbClr val="32BD15"/>
+                </a:solidFill>
+                <a:latin typeface="Arial MT"/>
+                <a:cs typeface="Arial MT"/>
+              </a:rPr>
+              <a:t> </a:t>
+            </a:r>
+            <a:r>
+              <a:rPr sz="3200" spc="-60" dirty="0">
+                <a:solidFill>
+                  <a:srgbClr val="32BD15"/>
+                </a:solidFill>
+                <a:latin typeface="Arial MT"/>
+                <a:cs typeface="Arial MT"/>
+              </a:rPr>
+              <a:t>resolved</a:t>
+            </a:r>
+            <a:r>
+              <a:rPr sz="3200" spc="-110" dirty="0">
+                <a:solidFill>
+                  <a:srgbClr val="32BD15"/>
+                </a:solidFill>
+                <a:latin typeface="Arial MT"/>
+                <a:cs typeface="Arial MT"/>
+              </a:rPr>
+              <a:t> </a:t>
+            </a:r>
+            <a:r>
+              <a:rPr sz="3200" spc="55" dirty="0">
+                <a:solidFill>
+                  <a:srgbClr val="32BD15"/>
+                </a:solidFill>
+                <a:latin typeface="Arial MT"/>
+                <a:cs typeface="Arial MT"/>
+              </a:rPr>
+              <a:t>to</a:t>
+            </a:r>
+            <a:r>
+              <a:rPr sz="3200" spc="-114" dirty="0">
+                <a:solidFill>
+                  <a:srgbClr val="32BD15"/>
+                </a:solidFill>
+                <a:latin typeface="Arial MT"/>
+                <a:cs typeface="Arial MT"/>
+              </a:rPr>
+              <a:t> </a:t>
+            </a:r>
+            <a:r>
+              <a:rPr sz="3200" dirty="0">
+                <a:solidFill>
+                  <a:srgbClr val="32BD15"/>
+                </a:solidFill>
+                <a:latin typeface="Arial MT"/>
+                <a:cs typeface="Arial MT"/>
+              </a:rPr>
+              <a:t>{1,</a:t>
+            </a:r>
+            <a:r>
+              <a:rPr sz="3200" spc="-110" dirty="0">
+                <a:solidFill>
+                  <a:srgbClr val="32BD15"/>
+                </a:solidFill>
+                <a:latin typeface="Arial MT"/>
+                <a:cs typeface="Arial MT"/>
+              </a:rPr>
+              <a:t> </a:t>
+            </a:r>
+            <a:r>
+              <a:rPr sz="3200" spc="-25" dirty="0">
+                <a:solidFill>
+                  <a:srgbClr val="32BD15"/>
+                </a:solidFill>
+                <a:latin typeface="Arial MT"/>
+                <a:cs typeface="Arial MT"/>
+              </a:rPr>
+              <a:t>2}</a:t>
+            </a:r>
+            <a:endParaRPr sz="3200">
+              <a:latin typeface="Arial MT"/>
+              <a:cs typeface="Arial MT"/>
+            </a:endParaRPr>
+          </a:p>
+        </p:txBody>
+      </p:sp>
+    </p:spTree>
+  </p:cSld>
+  <p:clrMapOvr>
+    <a:masterClrMapping/>
+  </p:clrMapOvr>
+  <p:transition spd="med">
+    <p:pull/>
+  </p:transition>
+</p:sld>
+</file>
+
+<file path=ppt/slides/slide13.xml><?xml version="1.0" encoding="utf-8"?>
+<p:sld xmlns:a="http://schemas.openxmlformats.org/drawingml/2006/main" xmlns:r="http://schemas.openxmlformats.org/officeDocument/2006/relationships" xmlns:p="http://schemas.openxmlformats.org/presentationml/2006/main">
+  <p:cSld>
+    <p:spTree>
+      <p:nvGrpSpPr>
+        <p:cNvPr id="1" name=""/>
+        <p:cNvGrpSpPr/>
+        <p:nvPr/>
+      </p:nvGrpSpPr>
+      <p:grpSpPr>
+        <a:xfrm>
+          <a:off x="0" y="0"/>
+          <a:ext cx="0" cy="0"/>
+          <a:chOff x="0" y="0"/>
+          <a:chExt cx="0" cy="0"/>
+        </a:xfrm>
+      </p:grpSpPr>
+      <p:sp>
+        <p:nvSpPr>
+          <p:cNvPr id="2" name="object 2"/>
+          <p:cNvSpPr txBox="1">
+            <a:spLocks noGrp="1"/>
+          </p:cNvSpPr>
+          <p:nvPr>
+            <p:ph type="title"/>
+          </p:nvPr>
+        </p:nvSpPr>
+        <p:spPr>
+          <a:prstGeom prst="rect">
+            <a:avLst/>
+          </a:prstGeom>
+        </p:spPr>
+        <p:txBody>
+          <a:bodyPr vert="horz" wrap="square" lIns="0" tIns="12700" rIns="0" bIns="0" rtlCol="0">
+            <a:spAutoFit/>
+          </a:bodyPr>
+          <a:lstStyle/>
+          <a:p>
+            <a:pPr marL="12700">
+              <a:lnSpc>
+                <a:spcPct val="100000"/>
+              </a:lnSpc>
+              <a:spcBef>
+                <a:spcPts val="100"/>
+              </a:spcBef>
+            </a:pPr>
+            <a:r>
+              <a:rPr spc="-114" dirty="0">
+                <a:solidFill>
+                  <a:srgbClr val="FFFFFF"/>
+                </a:solidFill>
+              </a:rPr>
+              <a:t>Set</a:t>
+            </a:r>
+            <a:r>
+              <a:rPr spc="-345" dirty="0">
+                <a:solidFill>
+                  <a:srgbClr val="FFFFFF"/>
+                </a:solidFill>
+              </a:rPr>
+              <a:t> </a:t>
+            </a:r>
+            <a:r>
+              <a:rPr spc="-80" dirty="0"/>
+              <a:t>Methods</a:t>
+            </a:r>
+          </a:p>
+        </p:txBody>
+      </p:sp>
+      <p:sp>
+        <p:nvSpPr>
+          <p:cNvPr id="3" name="object 3"/>
+          <p:cNvSpPr/>
+          <p:nvPr/>
+        </p:nvSpPr>
+        <p:spPr>
+          <a:xfrm>
+            <a:off x="989578" y="1844194"/>
+            <a:ext cx="3597275" cy="24130"/>
+          </a:xfrm>
+          <a:custGeom>
+            <a:avLst/>
+            <a:gdLst/>
+            <a:ahLst/>
+            <a:cxnLst/>
+            <a:rect l="l" t="t" r="r" b="b"/>
+            <a:pathLst>
+              <a:path w="3597275" h="24130">
+                <a:moveTo>
+                  <a:pt x="0" y="23501"/>
+                </a:moveTo>
+                <a:lnTo>
+                  <a:pt x="3597213" y="0"/>
+                </a:lnTo>
+              </a:path>
+            </a:pathLst>
+          </a:custGeom>
+          <a:ln w="47624">
+            <a:solidFill>
+              <a:srgbClr val="FFFFFF"/>
+            </a:solidFill>
+          </a:ln>
+        </p:spPr>
+        <p:txBody>
+          <a:bodyPr wrap="square" lIns="0" tIns="0" rIns="0" bIns="0" rtlCol="0"/>
+          <a:lstStyle/>
+          <a:p>
+            <a:endParaRPr/>
+          </a:p>
+        </p:txBody>
+      </p:sp>
+      <p:sp>
+        <p:nvSpPr>
+          <p:cNvPr id="4" name="object 4"/>
+          <p:cNvSpPr txBox="1"/>
+          <p:nvPr/>
+        </p:nvSpPr>
+        <p:spPr>
+          <a:xfrm>
+            <a:off x="1016000" y="2505138"/>
+            <a:ext cx="6899275" cy="4376420"/>
+          </a:xfrm>
+          <a:prstGeom prst="rect">
+            <a:avLst/>
+          </a:prstGeom>
+        </p:spPr>
+        <p:txBody>
+          <a:bodyPr vert="horz" wrap="square" lIns="0" tIns="12700" rIns="0" bIns="0" rtlCol="0">
+            <a:spAutoFit/>
+          </a:bodyPr>
+          <a:lstStyle/>
+          <a:p>
+            <a:pPr marL="12700">
+              <a:lnSpc>
+                <a:spcPct val="100000"/>
+              </a:lnSpc>
+              <a:spcBef>
+                <a:spcPts val="100"/>
+              </a:spcBef>
+              <a:tabLst>
+                <a:tab pos="2291080" algn="l"/>
+              </a:tabLst>
+            </a:pPr>
+            <a:r>
+              <a:rPr sz="3200" spc="-85" dirty="0">
+                <a:solidFill>
+                  <a:srgbClr val="FFFFFF"/>
+                </a:solidFill>
+                <a:latin typeface="Arial MT"/>
+                <a:cs typeface="Arial MT"/>
+              </a:rPr>
+              <a:t>set.</a:t>
+            </a:r>
+            <a:r>
+              <a:rPr sz="3200" b="1" spc="-85" dirty="0">
+                <a:solidFill>
+                  <a:srgbClr val="3BE2EC"/>
+                </a:solidFill>
+                <a:latin typeface="Arial"/>
+                <a:cs typeface="Arial"/>
+              </a:rPr>
+              <a:t>add</a:t>
+            </a:r>
+            <a:r>
+              <a:rPr sz="3200" spc="-85" dirty="0">
+                <a:solidFill>
+                  <a:srgbClr val="FFFFFF"/>
+                </a:solidFill>
+                <a:latin typeface="Arial MT"/>
+                <a:cs typeface="Arial MT"/>
+              </a:rPr>
+              <a:t>(</a:t>
+            </a:r>
+            <a:r>
+              <a:rPr sz="3200" spc="-105" dirty="0">
+                <a:solidFill>
+                  <a:srgbClr val="FFFFFF"/>
+                </a:solidFill>
+                <a:latin typeface="Arial MT"/>
+                <a:cs typeface="Arial MT"/>
+              </a:rPr>
+              <a:t> </a:t>
+            </a:r>
+            <a:r>
+              <a:rPr sz="3200" dirty="0">
+                <a:solidFill>
+                  <a:srgbClr val="FFFFFF"/>
+                </a:solidFill>
+                <a:latin typeface="Arial MT"/>
+                <a:cs typeface="Arial MT"/>
+              </a:rPr>
+              <a:t>el</a:t>
+            </a:r>
+            <a:r>
+              <a:rPr sz="3200" spc="-105" dirty="0">
+                <a:solidFill>
+                  <a:srgbClr val="FFFFFF"/>
+                </a:solidFill>
+                <a:latin typeface="Arial MT"/>
+                <a:cs typeface="Arial MT"/>
+              </a:rPr>
+              <a:t> </a:t>
+            </a:r>
+            <a:r>
+              <a:rPr sz="3200" spc="-50" dirty="0">
+                <a:solidFill>
+                  <a:srgbClr val="FFFFFF"/>
+                </a:solidFill>
+                <a:latin typeface="Arial MT"/>
+                <a:cs typeface="Arial MT"/>
+              </a:rPr>
+              <a:t>)</a:t>
+            </a:r>
+            <a:r>
+              <a:rPr sz="3200" dirty="0">
+                <a:solidFill>
+                  <a:srgbClr val="FFFFFF"/>
+                </a:solidFill>
+                <a:latin typeface="Arial MT"/>
+                <a:cs typeface="Arial MT"/>
+              </a:rPr>
+              <a:t>	</a:t>
+            </a:r>
+            <a:r>
+              <a:rPr sz="3200" dirty="0">
+                <a:solidFill>
+                  <a:srgbClr val="32BD15"/>
+                </a:solidFill>
+                <a:latin typeface="Arial MT"/>
+                <a:cs typeface="Arial MT"/>
+              </a:rPr>
+              <a:t>#adds</a:t>
+            </a:r>
+            <a:r>
+              <a:rPr sz="3200" spc="-175" dirty="0">
+                <a:solidFill>
+                  <a:srgbClr val="32BD15"/>
+                </a:solidFill>
+                <a:latin typeface="Arial MT"/>
+                <a:cs typeface="Arial MT"/>
+              </a:rPr>
+              <a:t> </a:t>
+            </a:r>
+            <a:r>
+              <a:rPr sz="3200" spc="-50" dirty="0">
+                <a:solidFill>
+                  <a:srgbClr val="32BD15"/>
+                </a:solidFill>
+                <a:latin typeface="Arial MT"/>
+                <a:cs typeface="Arial MT"/>
+              </a:rPr>
+              <a:t>an</a:t>
+            </a:r>
+            <a:r>
+              <a:rPr sz="3200" spc="-170" dirty="0">
+                <a:solidFill>
+                  <a:srgbClr val="32BD15"/>
+                </a:solidFill>
+                <a:latin typeface="Arial MT"/>
+                <a:cs typeface="Arial MT"/>
+              </a:rPr>
+              <a:t> </a:t>
+            </a:r>
+            <a:r>
+              <a:rPr sz="3200" spc="-10" dirty="0">
+                <a:solidFill>
+                  <a:srgbClr val="32BD15"/>
+                </a:solidFill>
+                <a:latin typeface="Arial MT"/>
+                <a:cs typeface="Arial MT"/>
+              </a:rPr>
+              <a:t>element</a:t>
+            </a:r>
+            <a:endParaRPr sz="3200">
+              <a:latin typeface="Arial MT"/>
+              <a:cs typeface="Arial MT"/>
+            </a:endParaRPr>
+          </a:p>
+          <a:p>
+            <a:pPr marL="12700" marR="5080">
+              <a:lnSpc>
+                <a:spcPct val="264200"/>
+              </a:lnSpc>
+              <a:tabLst>
+                <a:tab pos="2092325" algn="l"/>
+                <a:tab pos="2964180" algn="l"/>
+              </a:tabLst>
+            </a:pPr>
+            <a:r>
+              <a:rPr sz="3200" spc="-105" dirty="0">
+                <a:solidFill>
+                  <a:srgbClr val="FFFFFF"/>
+                </a:solidFill>
+                <a:latin typeface="Arial MT"/>
+                <a:cs typeface="Arial MT"/>
+              </a:rPr>
+              <a:t>set.</a:t>
+            </a:r>
+            <a:r>
+              <a:rPr sz="3200" b="1" spc="-105" dirty="0">
+                <a:solidFill>
+                  <a:srgbClr val="3BE2EC"/>
+                </a:solidFill>
+                <a:latin typeface="Arial"/>
+                <a:cs typeface="Arial"/>
+              </a:rPr>
+              <a:t>remove</a:t>
+            </a:r>
+            <a:r>
+              <a:rPr sz="3200" b="1" spc="-105" dirty="0">
+                <a:solidFill>
+                  <a:srgbClr val="FFFFFF"/>
+                </a:solidFill>
+                <a:latin typeface="Arial"/>
+                <a:cs typeface="Arial"/>
+              </a:rPr>
+              <a:t>(</a:t>
+            </a:r>
+            <a:r>
+              <a:rPr sz="3200" b="1" spc="-70" dirty="0">
+                <a:solidFill>
+                  <a:srgbClr val="FFFFFF"/>
+                </a:solidFill>
+                <a:latin typeface="Arial"/>
+                <a:cs typeface="Arial"/>
+              </a:rPr>
+              <a:t> </a:t>
+            </a:r>
+            <a:r>
+              <a:rPr sz="3200" dirty="0">
+                <a:solidFill>
+                  <a:srgbClr val="FFFFFF"/>
+                </a:solidFill>
+                <a:latin typeface="Arial MT"/>
+                <a:cs typeface="Arial MT"/>
+              </a:rPr>
+              <a:t>el</a:t>
+            </a:r>
+            <a:r>
+              <a:rPr sz="3200" spc="-145" dirty="0">
+                <a:solidFill>
+                  <a:srgbClr val="FFFFFF"/>
+                </a:solidFill>
+                <a:latin typeface="Arial MT"/>
+                <a:cs typeface="Arial MT"/>
+              </a:rPr>
+              <a:t> </a:t>
+            </a:r>
+            <a:r>
+              <a:rPr sz="3200" b="1" spc="-50" dirty="0">
+                <a:solidFill>
+                  <a:srgbClr val="FFFFFF"/>
+                </a:solidFill>
+                <a:latin typeface="Arial"/>
+                <a:cs typeface="Arial"/>
+              </a:rPr>
+              <a:t>)</a:t>
+            </a:r>
+            <a:r>
+              <a:rPr sz="3200" b="1" dirty="0">
+                <a:solidFill>
+                  <a:srgbClr val="FFFFFF"/>
+                </a:solidFill>
+                <a:latin typeface="Arial"/>
+                <a:cs typeface="Arial"/>
+              </a:rPr>
+              <a:t>	</a:t>
+            </a:r>
+            <a:r>
+              <a:rPr sz="3200" spc="-20" dirty="0">
+                <a:solidFill>
+                  <a:srgbClr val="32BD15"/>
+                </a:solidFill>
+                <a:latin typeface="Arial MT"/>
+                <a:cs typeface="Arial MT"/>
+              </a:rPr>
+              <a:t>#removes</a:t>
+            </a:r>
+            <a:r>
+              <a:rPr sz="3200" spc="-135" dirty="0">
+                <a:solidFill>
+                  <a:srgbClr val="32BD15"/>
+                </a:solidFill>
+                <a:latin typeface="Arial MT"/>
+                <a:cs typeface="Arial MT"/>
+              </a:rPr>
+              <a:t> </a:t>
+            </a:r>
+            <a:r>
+              <a:rPr sz="3200" dirty="0">
+                <a:solidFill>
+                  <a:srgbClr val="32BD15"/>
+                </a:solidFill>
+                <a:latin typeface="Arial MT"/>
+                <a:cs typeface="Arial MT"/>
+              </a:rPr>
+              <a:t>the</a:t>
+            </a:r>
+            <a:r>
+              <a:rPr sz="3200" spc="-135" dirty="0">
+                <a:solidFill>
+                  <a:srgbClr val="32BD15"/>
+                </a:solidFill>
+                <a:latin typeface="Arial MT"/>
+                <a:cs typeface="Arial MT"/>
+              </a:rPr>
+              <a:t> </a:t>
+            </a:r>
+            <a:r>
+              <a:rPr sz="3200" spc="-40" dirty="0">
+                <a:solidFill>
+                  <a:srgbClr val="32BD15"/>
+                </a:solidFill>
+                <a:latin typeface="Arial MT"/>
+                <a:cs typeface="Arial MT"/>
+              </a:rPr>
+              <a:t>elem</a:t>
+            </a:r>
+            <a:r>
+              <a:rPr sz="3200" spc="-135" dirty="0">
+                <a:solidFill>
+                  <a:srgbClr val="32BD15"/>
+                </a:solidFill>
+                <a:latin typeface="Arial MT"/>
+                <a:cs typeface="Arial MT"/>
+              </a:rPr>
+              <a:t> </a:t>
+            </a:r>
+            <a:r>
+              <a:rPr sz="3200" spc="-25" dirty="0">
+                <a:solidFill>
+                  <a:srgbClr val="32BD15"/>
+                </a:solidFill>
+                <a:latin typeface="Arial MT"/>
+                <a:cs typeface="Arial MT"/>
+              </a:rPr>
+              <a:t>an </a:t>
+            </a:r>
+            <a:r>
+              <a:rPr sz="3200" spc="-75" dirty="0">
+                <a:solidFill>
+                  <a:srgbClr val="FFFFFF"/>
+                </a:solidFill>
+                <a:latin typeface="Arial MT"/>
+                <a:cs typeface="Arial MT"/>
+              </a:rPr>
+              <a:t>set.</a:t>
+            </a:r>
+            <a:r>
+              <a:rPr sz="3200" b="1" spc="-75" dirty="0">
+                <a:solidFill>
+                  <a:srgbClr val="3BE2EC"/>
+                </a:solidFill>
+                <a:latin typeface="Arial"/>
+                <a:cs typeface="Arial"/>
+              </a:rPr>
+              <a:t>clear</a:t>
+            </a:r>
+            <a:r>
+              <a:rPr sz="3200" b="1" spc="-75" dirty="0">
+                <a:solidFill>
+                  <a:srgbClr val="FFFFFF"/>
+                </a:solidFill>
+                <a:latin typeface="Arial"/>
+                <a:cs typeface="Arial"/>
+              </a:rPr>
+              <a:t>(</a:t>
+            </a:r>
+            <a:r>
+              <a:rPr sz="3200" b="1" spc="-145" dirty="0">
+                <a:solidFill>
+                  <a:srgbClr val="FFFFFF"/>
+                </a:solidFill>
+                <a:latin typeface="Arial"/>
+                <a:cs typeface="Arial"/>
+              </a:rPr>
+              <a:t> </a:t>
+            </a:r>
+            <a:r>
+              <a:rPr sz="3200" b="1" spc="-50" dirty="0">
+                <a:solidFill>
+                  <a:srgbClr val="FFFFFF"/>
+                </a:solidFill>
+                <a:latin typeface="Arial"/>
+                <a:cs typeface="Arial"/>
+              </a:rPr>
+              <a:t>)</a:t>
+            </a:r>
+            <a:r>
+              <a:rPr sz="3200" b="1" dirty="0">
+                <a:solidFill>
+                  <a:srgbClr val="FFFFFF"/>
+                </a:solidFill>
+                <a:latin typeface="Arial"/>
+                <a:cs typeface="Arial"/>
+              </a:rPr>
+              <a:t>	</a:t>
+            </a:r>
+            <a:r>
+              <a:rPr sz="3200" dirty="0">
+                <a:solidFill>
+                  <a:srgbClr val="32BD15"/>
+                </a:solidFill>
+                <a:latin typeface="Arial MT"/>
+                <a:cs typeface="Arial MT"/>
+              </a:rPr>
+              <a:t>#empties</a:t>
+            </a:r>
+            <a:r>
+              <a:rPr sz="3200" spc="-114" dirty="0">
+                <a:solidFill>
+                  <a:srgbClr val="32BD15"/>
+                </a:solidFill>
+                <a:latin typeface="Arial MT"/>
+                <a:cs typeface="Arial MT"/>
+              </a:rPr>
+              <a:t> </a:t>
+            </a:r>
+            <a:r>
+              <a:rPr sz="3200" dirty="0">
+                <a:solidFill>
+                  <a:srgbClr val="32BD15"/>
+                </a:solidFill>
+                <a:latin typeface="Arial MT"/>
+                <a:cs typeface="Arial MT"/>
+              </a:rPr>
+              <a:t>the</a:t>
+            </a:r>
+            <a:r>
+              <a:rPr sz="3200" spc="-114" dirty="0">
+                <a:solidFill>
+                  <a:srgbClr val="32BD15"/>
+                </a:solidFill>
+                <a:latin typeface="Arial MT"/>
+                <a:cs typeface="Arial MT"/>
+              </a:rPr>
+              <a:t> </a:t>
+            </a:r>
+            <a:r>
+              <a:rPr sz="3200" spc="-25" dirty="0">
+                <a:solidFill>
+                  <a:srgbClr val="32BD15"/>
+                </a:solidFill>
+                <a:latin typeface="Arial MT"/>
+                <a:cs typeface="Arial MT"/>
+              </a:rPr>
+              <a:t>set</a:t>
+            </a:r>
+            <a:endParaRPr sz="3200">
+              <a:latin typeface="Arial MT"/>
+              <a:cs typeface="Arial MT"/>
+            </a:endParaRPr>
+          </a:p>
+          <a:p>
+            <a:pPr>
+              <a:lnSpc>
+                <a:spcPct val="100000"/>
+              </a:lnSpc>
+              <a:spcBef>
+                <a:spcPts val="2605"/>
+              </a:spcBef>
+            </a:pPr>
+            <a:endParaRPr sz="3200">
+              <a:latin typeface="Arial MT"/>
+              <a:cs typeface="Arial MT"/>
+            </a:endParaRPr>
+          </a:p>
+          <a:p>
+            <a:pPr marL="12700">
+              <a:lnSpc>
+                <a:spcPct val="100000"/>
+              </a:lnSpc>
+              <a:spcBef>
+                <a:spcPts val="5"/>
+              </a:spcBef>
+              <a:tabLst>
+                <a:tab pos="1893570" algn="l"/>
+              </a:tabLst>
+            </a:pPr>
+            <a:r>
+              <a:rPr sz="3200" spc="-95" dirty="0">
+                <a:solidFill>
+                  <a:srgbClr val="FFFFFF"/>
+                </a:solidFill>
+                <a:latin typeface="Arial MT"/>
+                <a:cs typeface="Arial MT"/>
+              </a:rPr>
+              <a:t>set.</a:t>
+            </a:r>
+            <a:r>
+              <a:rPr sz="3200" b="1" spc="-95" dirty="0">
+                <a:solidFill>
+                  <a:srgbClr val="3BE2EC"/>
+                </a:solidFill>
+                <a:latin typeface="Arial"/>
+                <a:cs typeface="Arial"/>
+              </a:rPr>
+              <a:t>pop</a:t>
+            </a:r>
+            <a:r>
+              <a:rPr sz="3200" b="1" spc="-95" dirty="0">
+                <a:solidFill>
+                  <a:srgbClr val="FFFFFF"/>
+                </a:solidFill>
+                <a:latin typeface="Arial"/>
+                <a:cs typeface="Arial"/>
+              </a:rPr>
+              <a:t>(</a:t>
+            </a:r>
+            <a:r>
+              <a:rPr sz="3200" b="1" spc="-65" dirty="0">
+                <a:solidFill>
+                  <a:srgbClr val="FFFFFF"/>
+                </a:solidFill>
+                <a:latin typeface="Arial"/>
+                <a:cs typeface="Arial"/>
+              </a:rPr>
+              <a:t> </a:t>
+            </a:r>
+            <a:r>
+              <a:rPr sz="3200" b="1" spc="-50" dirty="0">
+                <a:solidFill>
+                  <a:srgbClr val="FFFFFF"/>
+                </a:solidFill>
+                <a:latin typeface="Arial"/>
+                <a:cs typeface="Arial"/>
+              </a:rPr>
+              <a:t>)</a:t>
+            </a:r>
+            <a:r>
+              <a:rPr sz="3200" b="1" dirty="0">
+                <a:solidFill>
+                  <a:srgbClr val="FFFFFF"/>
+                </a:solidFill>
+                <a:latin typeface="Arial"/>
+                <a:cs typeface="Arial"/>
+              </a:rPr>
+              <a:t>	</a:t>
+            </a:r>
+            <a:r>
+              <a:rPr sz="3200" spc="-20" dirty="0">
+                <a:solidFill>
+                  <a:srgbClr val="32BD15"/>
+                </a:solidFill>
+                <a:latin typeface="Arial MT"/>
+                <a:cs typeface="Arial MT"/>
+              </a:rPr>
+              <a:t>#removes</a:t>
+            </a:r>
+            <a:r>
+              <a:rPr sz="3200" spc="-204" dirty="0">
+                <a:solidFill>
+                  <a:srgbClr val="32BD15"/>
+                </a:solidFill>
+                <a:latin typeface="Arial MT"/>
+                <a:cs typeface="Arial MT"/>
+              </a:rPr>
+              <a:t> </a:t>
+            </a:r>
+            <a:r>
+              <a:rPr sz="3200" spc="-180" dirty="0">
+                <a:solidFill>
+                  <a:srgbClr val="32BD15"/>
+                </a:solidFill>
+                <a:latin typeface="Arial MT"/>
+                <a:cs typeface="Arial MT"/>
+              </a:rPr>
+              <a:t>a</a:t>
+            </a:r>
+            <a:r>
+              <a:rPr sz="3200" spc="-45" dirty="0">
+                <a:solidFill>
+                  <a:srgbClr val="32BD15"/>
+                </a:solidFill>
+                <a:latin typeface="Arial MT"/>
+                <a:cs typeface="Arial MT"/>
+              </a:rPr>
+              <a:t> </a:t>
+            </a:r>
+            <a:r>
+              <a:rPr sz="3200" dirty="0">
+                <a:solidFill>
+                  <a:srgbClr val="32BD15"/>
+                </a:solidFill>
+                <a:latin typeface="Arial MT"/>
+                <a:cs typeface="Arial MT"/>
+              </a:rPr>
+              <a:t>random</a:t>
+            </a:r>
+            <a:r>
+              <a:rPr sz="3200" spc="-150" dirty="0">
+                <a:solidFill>
+                  <a:srgbClr val="32BD15"/>
+                </a:solidFill>
+                <a:latin typeface="Arial MT"/>
+                <a:cs typeface="Arial MT"/>
+              </a:rPr>
+              <a:t> </a:t>
+            </a:r>
+            <a:r>
+              <a:rPr sz="3200" spc="-10" dirty="0">
+                <a:solidFill>
+                  <a:srgbClr val="32BD15"/>
+                </a:solidFill>
+                <a:latin typeface="Arial MT"/>
+                <a:cs typeface="Arial MT"/>
+              </a:rPr>
+              <a:t>value</a:t>
+            </a:r>
+            <a:endParaRPr sz="3200">
+              <a:latin typeface="Arial MT"/>
+              <a:cs typeface="Arial MT"/>
+            </a:endParaRPr>
+          </a:p>
+        </p:txBody>
+      </p:sp>
+    </p:spTree>
+  </p:cSld>
+  <p:clrMapOvr>
+    <a:masterClrMapping/>
+  </p:clrMapOvr>
+  <p:transition spd="med">
+    <p:pull/>
+  </p:transition>
+</p:sld>
+</file>
+
+<file path=ppt/slides/slide14.xml><?xml version="1.0" encoding="utf-8"?>
+<p:sld xmlns:a="http://schemas.openxmlformats.org/drawingml/2006/main" xmlns:r="http://schemas.openxmlformats.org/officeDocument/2006/relationships" xmlns:p="http://schemas.openxmlformats.org/presentationml/2006/main">
+  <p:cSld>
+    <p:spTree>
+      <p:nvGrpSpPr>
+        <p:cNvPr id="1" name=""/>
+        <p:cNvGrpSpPr/>
+        <p:nvPr/>
+      </p:nvGrpSpPr>
+      <p:grpSpPr>
+        <a:xfrm>
+          <a:off x="0" y="0"/>
+          <a:ext cx="0" cy="0"/>
+          <a:chOff x="0" y="0"/>
+          <a:chExt cx="0" cy="0"/>
+        </a:xfrm>
+      </p:grpSpPr>
+      <p:sp>
+        <p:nvSpPr>
+          <p:cNvPr id="2" name="object 2"/>
           <p:cNvSpPr txBox="1"/>
           <p:nvPr/>
         </p:nvSpPr>
@@ -2630,7 +5788,7 @@
 </p:sld>
 </file>
 
-<file path=ppt/slides/slide11.xml><?xml version="1.0" encoding="utf-8"?>
+<file path=ppt/slides/slide15.xml><?xml version="1.0" encoding="utf-8"?>
 <p:sld xmlns:a="http://schemas.openxmlformats.org/drawingml/2006/main" xmlns:r="http://schemas.openxmlformats.org/officeDocument/2006/relationships" xmlns:p="http://schemas.openxmlformats.org/presentationml/2006/main">
   <p:cSld>
     <p:spTree>
@@ -2750,7 +5908,7 @@
 </p:sld>
 </file>
 
-<file path=ppt/slides/slide12.xml><?xml version="1.0" encoding="utf-8"?>
+<file path=ppt/slides/slide16.xml><?xml version="1.0" encoding="utf-8"?>
 <p:sld xmlns:a="http://schemas.openxmlformats.org/drawingml/2006/main" xmlns:r="http://schemas.openxmlformats.org/officeDocument/2006/relationships" xmlns:p="http://schemas.openxmlformats.org/presentationml/2006/main">
   <p:cSld>
     <p:spTree>
@@ -3600,7 +6758,7 @@
 </p:sld>
 </file>
 
-<file path=ppt/slides/slide13.xml><?xml version="1.0" encoding="utf-8"?>
+<file path=ppt/slides/slide17.xml><?xml version="1.0" encoding="utf-8"?>
 <p:sld xmlns:a="http://schemas.openxmlformats.org/drawingml/2006/main" xmlns:r="http://schemas.openxmlformats.org/officeDocument/2006/relationships" xmlns:p="http://schemas.openxmlformats.org/presentationml/2006/main">
   <p:cSld>
     <p:spTree>
@@ -4608,7 +7766,7 @@
 </p:sld>
 </file>
 
-<file path=ppt/slides/slide14.xml><?xml version="1.0" encoding="utf-8"?>
+<file path=ppt/slides/slide18.xml><?xml version="1.0" encoding="utf-8"?>
 <p:sld xmlns:a="http://schemas.openxmlformats.org/drawingml/2006/main" xmlns:r="http://schemas.openxmlformats.org/officeDocument/2006/relationships" xmlns:p="http://schemas.openxmlformats.org/presentationml/2006/main">
   <p:cSld>
     <p:spTree>
@@ -5438,7 +8596,7 @@
 </p:sld>
 </file>
 
-<file path=ppt/slides/slide15.xml><?xml version="1.0" encoding="utf-8"?>
+<file path=ppt/slides/slide19.xml><?xml version="1.0" encoding="utf-8"?>
 <p:sld xmlns:a="http://schemas.openxmlformats.org/drawingml/2006/main" xmlns:r="http://schemas.openxmlformats.org/officeDocument/2006/relationships" xmlns:p="http://schemas.openxmlformats.org/presentationml/2006/main">
   <p:cSld>
     <p:spTree>
@@ -5508,7 +8666,656 @@
 </p:sld>
 </file>
 
-<file path=ppt/slides/slide16.xml><?xml version="1.0" encoding="utf-8"?>
+<file path=ppt/slides/slide2.xml><?xml version="1.0" encoding="utf-8"?>
+<p:sld xmlns:a="http://schemas.openxmlformats.org/drawingml/2006/main" xmlns:r="http://schemas.openxmlformats.org/officeDocument/2006/relationships" xmlns:p="http://schemas.openxmlformats.org/presentationml/2006/main">
+  <p:cSld>
+    <p:spTree>
+      <p:nvGrpSpPr>
+        <p:cNvPr id="1" name=""/>
+        <p:cNvGrpSpPr/>
+        <p:nvPr/>
+      </p:nvGrpSpPr>
+      <p:grpSpPr>
+        <a:xfrm>
+          <a:off x="0" y="0"/>
+          <a:ext cx="0" cy="0"/>
+          <a:chOff x="0" y="0"/>
+          <a:chExt cx="0" cy="0"/>
+        </a:xfrm>
+      </p:grpSpPr>
+      <p:sp>
+        <p:nvSpPr>
+          <p:cNvPr id="2" name="object 2"/>
+          <p:cNvSpPr txBox="1">
+            <a:spLocks noGrp="1"/>
+          </p:cNvSpPr>
+          <p:nvPr>
+            <p:ph type="title"/>
+          </p:nvPr>
+        </p:nvSpPr>
+        <p:spPr>
+          <a:prstGeom prst="rect">
+            <a:avLst/>
+          </a:prstGeom>
+        </p:spPr>
+        <p:txBody>
+          <a:bodyPr vert="horz" wrap="square" lIns="0" tIns="12700" rIns="0" bIns="0" rtlCol="0">
+            <a:spAutoFit/>
+          </a:bodyPr>
+          <a:lstStyle/>
+          <a:p>
+            <a:pPr marL="12700">
+              <a:lnSpc>
+                <a:spcPct val="100000"/>
+              </a:lnSpc>
+              <a:spcBef>
+                <a:spcPts val="100"/>
+              </a:spcBef>
+            </a:pPr>
+            <a:r>
+              <a:rPr spc="-114" dirty="0"/>
+              <a:t>Dictionary</a:t>
+            </a:r>
+            <a:r>
+              <a:rPr spc="-340" dirty="0"/>
+              <a:t> </a:t>
+            </a:r>
+            <a:r>
+              <a:rPr dirty="0">
+                <a:solidFill>
+                  <a:srgbClr val="FFFFFF"/>
+                </a:solidFill>
+              </a:rPr>
+              <a:t>in</a:t>
+            </a:r>
+            <a:r>
+              <a:rPr spc="-340" dirty="0">
+                <a:solidFill>
+                  <a:srgbClr val="FFFFFF"/>
+                </a:solidFill>
+              </a:rPr>
+              <a:t> </a:t>
+            </a:r>
+            <a:r>
+              <a:rPr spc="-100" dirty="0">
+                <a:solidFill>
+                  <a:srgbClr val="FFFFFF"/>
+                </a:solidFill>
+              </a:rPr>
+              <a:t>Python</a:t>
+            </a:r>
+          </a:p>
+        </p:txBody>
+      </p:sp>
+      <p:sp>
+        <p:nvSpPr>
+          <p:cNvPr id="3" name="object 3"/>
+          <p:cNvSpPr/>
+          <p:nvPr/>
+        </p:nvSpPr>
+        <p:spPr>
+          <a:xfrm>
+            <a:off x="989579" y="1844137"/>
+            <a:ext cx="5746115" cy="24130"/>
+          </a:xfrm>
+          <a:custGeom>
+            <a:avLst/>
+            <a:gdLst/>
+            <a:ahLst/>
+            <a:cxnLst/>
+            <a:rect l="l" t="t" r="r" b="b"/>
+            <a:pathLst>
+              <a:path w="5746115" h="24130">
+                <a:moveTo>
+                  <a:pt x="0" y="23616"/>
+                </a:moveTo>
+                <a:lnTo>
+                  <a:pt x="5745540" y="0"/>
+                </a:lnTo>
+              </a:path>
+            </a:pathLst>
+          </a:custGeom>
+          <a:ln w="47624">
+            <a:solidFill>
+              <a:srgbClr val="FFFFFF"/>
+            </a:solidFill>
+          </a:ln>
+        </p:spPr>
+        <p:txBody>
+          <a:bodyPr wrap="square" lIns="0" tIns="0" rIns="0" bIns="0" rtlCol="0"/>
+          <a:lstStyle/>
+          <a:p>
+            <a:endParaRPr/>
+          </a:p>
+        </p:txBody>
+      </p:sp>
+      <p:sp>
+        <p:nvSpPr>
+          <p:cNvPr id="5" name="object 5"/>
+          <p:cNvSpPr txBox="1"/>
+          <p:nvPr/>
+        </p:nvSpPr>
+        <p:spPr>
+          <a:xfrm>
+            <a:off x="953066" y="2240617"/>
+            <a:ext cx="11866245" cy="3136756"/>
+          </a:xfrm>
+          <a:prstGeom prst="rect">
+            <a:avLst/>
+          </a:prstGeom>
+        </p:spPr>
+        <p:txBody>
+          <a:bodyPr vert="horz" wrap="square" lIns="0" tIns="12700" rIns="0" bIns="0" rtlCol="0">
+            <a:spAutoFit/>
+          </a:bodyPr>
+          <a:lstStyle/>
+          <a:p>
+            <a:pPr marL="12700">
+              <a:lnSpc>
+                <a:spcPct val="100000"/>
+              </a:lnSpc>
+              <a:spcBef>
+                <a:spcPts val="100"/>
+              </a:spcBef>
+            </a:pPr>
+            <a:r>
+              <a:rPr sz="3200" spc="-55" dirty="0">
+                <a:solidFill>
+                  <a:srgbClr val="FFFFFF"/>
+                </a:solidFill>
+                <a:latin typeface="Tahoma"/>
+                <a:cs typeface="Tahoma"/>
+              </a:rPr>
+              <a:t>Dictionaries</a:t>
+            </a:r>
+            <a:r>
+              <a:rPr sz="3200" spc="-195" dirty="0">
+                <a:solidFill>
+                  <a:srgbClr val="FFFFFF"/>
+                </a:solidFill>
+                <a:latin typeface="Tahoma"/>
+                <a:cs typeface="Tahoma"/>
+              </a:rPr>
+              <a:t> </a:t>
+            </a:r>
+            <a:r>
+              <a:rPr sz="3200" spc="-90" dirty="0">
+                <a:solidFill>
+                  <a:srgbClr val="FFFFFF"/>
+                </a:solidFill>
+                <a:latin typeface="Tahoma"/>
+                <a:cs typeface="Tahoma"/>
+              </a:rPr>
+              <a:t>are</a:t>
+            </a:r>
+            <a:r>
+              <a:rPr sz="3200" spc="-190" dirty="0">
+                <a:solidFill>
+                  <a:srgbClr val="FFFFFF"/>
+                </a:solidFill>
+                <a:latin typeface="Tahoma"/>
+                <a:cs typeface="Tahoma"/>
+              </a:rPr>
+              <a:t> </a:t>
+            </a:r>
+            <a:r>
+              <a:rPr sz="3200" spc="-105" dirty="0">
+                <a:solidFill>
+                  <a:srgbClr val="FFFFFF"/>
+                </a:solidFill>
+                <a:latin typeface="Tahoma"/>
+                <a:cs typeface="Tahoma"/>
+              </a:rPr>
+              <a:t>used</a:t>
+            </a:r>
+            <a:r>
+              <a:rPr sz="3200" spc="-190" dirty="0">
+                <a:solidFill>
+                  <a:srgbClr val="FFFFFF"/>
+                </a:solidFill>
+                <a:latin typeface="Tahoma"/>
+                <a:cs typeface="Tahoma"/>
+              </a:rPr>
+              <a:t> </a:t>
+            </a:r>
+            <a:r>
+              <a:rPr sz="3200" spc="-60" dirty="0">
+                <a:solidFill>
+                  <a:srgbClr val="FFFFFF"/>
+                </a:solidFill>
+                <a:latin typeface="Tahoma"/>
+                <a:cs typeface="Tahoma"/>
+              </a:rPr>
+              <a:t>to</a:t>
+            </a:r>
+            <a:r>
+              <a:rPr sz="3200" spc="-195" dirty="0">
+                <a:solidFill>
+                  <a:srgbClr val="FFFFFF"/>
+                </a:solidFill>
+                <a:latin typeface="Tahoma"/>
+                <a:cs typeface="Tahoma"/>
+              </a:rPr>
+              <a:t> </a:t>
+            </a:r>
+            <a:r>
+              <a:rPr sz="3200" spc="-40" dirty="0">
+                <a:solidFill>
+                  <a:srgbClr val="FFFFFF"/>
+                </a:solidFill>
+                <a:latin typeface="Tahoma"/>
+                <a:cs typeface="Tahoma"/>
+              </a:rPr>
+              <a:t>store</a:t>
+            </a:r>
+            <a:r>
+              <a:rPr sz="3200" spc="-190" dirty="0">
+                <a:solidFill>
+                  <a:srgbClr val="FFFFFF"/>
+                </a:solidFill>
+                <a:latin typeface="Tahoma"/>
+                <a:cs typeface="Tahoma"/>
+              </a:rPr>
+              <a:t> </a:t>
+            </a:r>
+            <a:r>
+              <a:rPr sz="3200" spc="-110" dirty="0">
+                <a:solidFill>
+                  <a:srgbClr val="FFFFFF"/>
+                </a:solidFill>
+                <a:latin typeface="Tahoma"/>
+                <a:cs typeface="Tahoma"/>
+              </a:rPr>
+              <a:t>data</a:t>
+            </a:r>
+            <a:r>
+              <a:rPr sz="3200" spc="-190" dirty="0">
+                <a:solidFill>
+                  <a:srgbClr val="FFFFFF"/>
+                </a:solidFill>
+                <a:latin typeface="Tahoma"/>
+                <a:cs typeface="Tahoma"/>
+              </a:rPr>
+              <a:t> </a:t>
+            </a:r>
+            <a:r>
+              <a:rPr sz="3200" spc="-85" dirty="0">
+                <a:solidFill>
+                  <a:srgbClr val="FFFFFF"/>
+                </a:solidFill>
+                <a:latin typeface="Tahoma"/>
+                <a:cs typeface="Tahoma"/>
+              </a:rPr>
+              <a:t>values</a:t>
+            </a:r>
+            <a:r>
+              <a:rPr sz="3200" spc="-195" dirty="0">
+                <a:solidFill>
+                  <a:srgbClr val="FFFFFF"/>
+                </a:solidFill>
+                <a:latin typeface="Tahoma"/>
+                <a:cs typeface="Tahoma"/>
+              </a:rPr>
+              <a:t> </a:t>
+            </a:r>
+            <a:r>
+              <a:rPr sz="3200" dirty="0">
+                <a:solidFill>
+                  <a:srgbClr val="FFFFFF"/>
+                </a:solidFill>
+                <a:latin typeface="Tahoma"/>
+                <a:cs typeface="Tahoma"/>
+              </a:rPr>
+              <a:t>in</a:t>
+            </a:r>
+            <a:r>
+              <a:rPr sz="3200" spc="-190" dirty="0">
+                <a:solidFill>
+                  <a:srgbClr val="FFFFFF"/>
+                </a:solidFill>
+                <a:latin typeface="Tahoma"/>
+                <a:cs typeface="Tahoma"/>
+              </a:rPr>
+              <a:t> </a:t>
+            </a:r>
+            <a:r>
+              <a:rPr sz="3200" spc="-140" dirty="0">
+                <a:solidFill>
+                  <a:srgbClr val="3BE2EC"/>
+                </a:solidFill>
+                <a:latin typeface="Tahoma"/>
+                <a:cs typeface="Tahoma"/>
+              </a:rPr>
+              <a:t>key:value</a:t>
+            </a:r>
+            <a:r>
+              <a:rPr sz="3200" spc="-190" dirty="0">
+                <a:solidFill>
+                  <a:srgbClr val="3BE2EC"/>
+                </a:solidFill>
+                <a:latin typeface="Tahoma"/>
+                <a:cs typeface="Tahoma"/>
+              </a:rPr>
+              <a:t> </a:t>
+            </a:r>
+            <a:r>
+              <a:rPr sz="3200" spc="-10" dirty="0">
+                <a:solidFill>
+                  <a:srgbClr val="FFFFFF"/>
+                </a:solidFill>
+                <a:latin typeface="Tahoma"/>
+                <a:cs typeface="Tahoma"/>
+              </a:rPr>
+              <a:t>pairs</a:t>
+            </a:r>
+            <a:endParaRPr sz="3200" dirty="0">
+              <a:latin typeface="Tahoma"/>
+              <a:cs typeface="Tahoma"/>
+            </a:endParaRPr>
+          </a:p>
+          <a:p>
+            <a:pPr marL="12700">
+              <a:lnSpc>
+                <a:spcPct val="100000"/>
+              </a:lnSpc>
+              <a:spcBef>
+                <a:spcPts val="3020"/>
+              </a:spcBef>
+            </a:pPr>
+            <a:r>
+              <a:rPr sz="3200" spc="-215" dirty="0">
+                <a:solidFill>
+                  <a:srgbClr val="FFFFFF"/>
+                </a:solidFill>
+                <a:latin typeface="Tahoma"/>
+                <a:cs typeface="Tahoma"/>
+              </a:rPr>
+              <a:t>They</a:t>
+            </a:r>
+            <a:r>
+              <a:rPr sz="3200" spc="-180" dirty="0">
+                <a:solidFill>
+                  <a:srgbClr val="FFFFFF"/>
+                </a:solidFill>
+                <a:latin typeface="Tahoma"/>
+                <a:cs typeface="Tahoma"/>
+              </a:rPr>
+              <a:t> </a:t>
+            </a:r>
+            <a:r>
+              <a:rPr sz="3200" spc="-90" dirty="0">
+                <a:solidFill>
+                  <a:srgbClr val="FFFFFF"/>
+                </a:solidFill>
+                <a:latin typeface="Tahoma"/>
+                <a:cs typeface="Tahoma"/>
+              </a:rPr>
+              <a:t>are</a:t>
+            </a:r>
+            <a:r>
+              <a:rPr sz="3200" spc="-175" dirty="0">
+                <a:solidFill>
+                  <a:srgbClr val="FFFFFF"/>
+                </a:solidFill>
+                <a:latin typeface="Tahoma"/>
+                <a:cs typeface="Tahoma"/>
+              </a:rPr>
+              <a:t> </a:t>
+            </a:r>
+            <a:r>
+              <a:rPr sz="3200" spc="-95" dirty="0">
+                <a:solidFill>
+                  <a:srgbClr val="FFFFFF"/>
+                </a:solidFill>
+                <a:latin typeface="Tahoma"/>
+                <a:cs typeface="Tahoma"/>
+              </a:rPr>
+              <a:t>ordered,</a:t>
+            </a:r>
+            <a:r>
+              <a:rPr sz="3200" spc="-175" dirty="0">
+                <a:solidFill>
+                  <a:srgbClr val="FFFFFF"/>
+                </a:solidFill>
+                <a:latin typeface="Tahoma"/>
+                <a:cs typeface="Tahoma"/>
+              </a:rPr>
+              <a:t> </a:t>
+            </a:r>
+            <a:r>
+              <a:rPr sz="3200" spc="-125" dirty="0">
+                <a:solidFill>
+                  <a:srgbClr val="FFFFFF"/>
+                </a:solidFill>
+                <a:latin typeface="Tahoma"/>
+                <a:cs typeface="Tahoma"/>
+              </a:rPr>
+              <a:t>mutable(changeable)</a:t>
+            </a:r>
+            <a:r>
+              <a:rPr sz="3200" spc="-180" dirty="0">
+                <a:solidFill>
+                  <a:srgbClr val="FFFFFF"/>
+                </a:solidFill>
+                <a:latin typeface="Tahoma"/>
+                <a:cs typeface="Tahoma"/>
+              </a:rPr>
+              <a:t> &amp;</a:t>
+            </a:r>
+            <a:r>
+              <a:rPr sz="3200" spc="-175" dirty="0">
+                <a:solidFill>
+                  <a:srgbClr val="FFFFFF"/>
+                </a:solidFill>
+                <a:latin typeface="Tahoma"/>
+                <a:cs typeface="Tahoma"/>
+              </a:rPr>
+              <a:t> </a:t>
+            </a:r>
+            <a:r>
+              <a:rPr sz="3200" spc="-55" dirty="0">
+                <a:solidFill>
+                  <a:srgbClr val="FFFFFF"/>
+                </a:solidFill>
+                <a:latin typeface="Tahoma"/>
+                <a:cs typeface="Tahoma"/>
+              </a:rPr>
+              <a:t>don’t</a:t>
+            </a:r>
+            <a:r>
+              <a:rPr sz="3200" spc="-175" dirty="0">
+                <a:solidFill>
+                  <a:srgbClr val="FFFFFF"/>
+                </a:solidFill>
+                <a:latin typeface="Tahoma"/>
+                <a:cs typeface="Tahoma"/>
+              </a:rPr>
+              <a:t> </a:t>
+            </a:r>
+            <a:r>
+              <a:rPr sz="3200" spc="-110" dirty="0">
+                <a:solidFill>
+                  <a:srgbClr val="FFFFFF"/>
+                </a:solidFill>
+                <a:latin typeface="Tahoma"/>
+                <a:cs typeface="Tahoma"/>
+              </a:rPr>
+              <a:t>allow</a:t>
+            </a:r>
+            <a:r>
+              <a:rPr sz="3200" spc="-180" dirty="0">
+                <a:solidFill>
+                  <a:srgbClr val="FFFFFF"/>
+                </a:solidFill>
+                <a:latin typeface="Tahoma"/>
+                <a:cs typeface="Tahoma"/>
+              </a:rPr>
+              <a:t> </a:t>
+            </a:r>
+            <a:r>
+              <a:rPr sz="3200" spc="-65" dirty="0">
+                <a:solidFill>
+                  <a:srgbClr val="FFFFFF"/>
+                </a:solidFill>
+                <a:latin typeface="Tahoma"/>
+                <a:cs typeface="Tahoma"/>
+              </a:rPr>
+              <a:t>duplicate</a:t>
+            </a:r>
+            <a:r>
+              <a:rPr sz="3200" spc="-175" dirty="0">
+                <a:solidFill>
+                  <a:srgbClr val="FFFFFF"/>
+                </a:solidFill>
+                <a:latin typeface="Tahoma"/>
+                <a:cs typeface="Tahoma"/>
+              </a:rPr>
+              <a:t> </a:t>
+            </a:r>
+            <a:r>
+              <a:rPr sz="3200" spc="-20" dirty="0">
+                <a:solidFill>
+                  <a:srgbClr val="FFFFFF"/>
+                </a:solidFill>
+                <a:latin typeface="Tahoma"/>
+                <a:cs typeface="Tahoma"/>
+              </a:rPr>
+              <a:t>keys</a:t>
+            </a:r>
+            <a:endParaRPr lang="en-US" sz="3200" spc="-20" dirty="0">
+              <a:solidFill>
+                <a:srgbClr val="FFFFFF"/>
+              </a:solidFill>
+              <a:latin typeface="Tahoma"/>
+              <a:cs typeface="Tahoma"/>
+            </a:endParaRPr>
+          </a:p>
+          <a:p>
+            <a:pPr marL="12700" algn="l">
+              <a:spcBef>
+                <a:spcPts val="3020"/>
+              </a:spcBef>
+            </a:pPr>
+            <a:r>
+              <a:rPr lang="en-US" sz="3200" spc="65" dirty="0">
+                <a:solidFill>
+                  <a:srgbClr val="FFFFFF"/>
+                </a:solidFill>
+                <a:latin typeface="Arial MT"/>
+                <a:cs typeface="Arial MT"/>
+              </a:rPr>
+              <a:t>“key”</a:t>
+            </a:r>
+            <a:r>
+              <a:rPr lang="en-US" sz="3200" spc="-35" dirty="0">
+                <a:solidFill>
+                  <a:srgbClr val="FFFFFF"/>
+                </a:solidFill>
+                <a:latin typeface="Arial MT"/>
+                <a:cs typeface="Arial MT"/>
+              </a:rPr>
+              <a:t> </a:t>
+            </a:r>
+            <a:r>
+              <a:rPr lang="en-US" sz="3200" spc="155" dirty="0">
+                <a:solidFill>
+                  <a:srgbClr val="FFFFFF"/>
+                </a:solidFill>
+                <a:latin typeface="Arial MT"/>
+                <a:cs typeface="Arial MT"/>
+              </a:rPr>
+              <a:t>:</a:t>
+            </a:r>
+            <a:r>
+              <a:rPr lang="en-US" sz="3200" spc="-30" dirty="0">
+                <a:solidFill>
+                  <a:srgbClr val="FFFFFF"/>
+                </a:solidFill>
+                <a:latin typeface="Arial MT"/>
+                <a:cs typeface="Arial MT"/>
+              </a:rPr>
+              <a:t> </a:t>
+            </a:r>
+            <a:r>
+              <a:rPr lang="en-US" sz="3200" spc="-20" dirty="0">
+                <a:solidFill>
+                  <a:srgbClr val="FFFFFF"/>
+                </a:solidFill>
+                <a:latin typeface="Arial MT"/>
+                <a:cs typeface="Arial MT"/>
+              </a:rPr>
+              <a:t>value</a:t>
+            </a:r>
+            <a:endParaRPr lang="en-US" sz="3200" dirty="0">
+              <a:latin typeface="Arial MT"/>
+              <a:cs typeface="Arial MT"/>
+            </a:endParaRPr>
+          </a:p>
+          <a:p>
+            <a:pPr marL="12700">
+              <a:lnSpc>
+                <a:spcPct val="100000"/>
+              </a:lnSpc>
+              <a:spcBef>
+                <a:spcPts val="3020"/>
+              </a:spcBef>
+            </a:pPr>
+            <a:endParaRPr sz="3200" dirty="0">
+              <a:latin typeface="Tahoma"/>
+              <a:cs typeface="Tahoma"/>
+            </a:endParaRPr>
+          </a:p>
+        </p:txBody>
+      </p:sp>
+      <p:pic>
+        <p:nvPicPr>
+          <p:cNvPr id="8" name="Picture 7">
+            <a:extLst>
+              <a:ext uri="{FF2B5EF4-FFF2-40B4-BE49-F238E27FC236}">
+                <a16:creationId xmlns:a16="http://schemas.microsoft.com/office/drawing/2014/main" id="{0C12036A-869B-949C-D020-BCF2473D609F}"/>
+              </a:ext>
+            </a:extLst>
+          </p:cNvPr>
+          <p:cNvPicPr>
+            <a:picLocks noChangeAspect="1"/>
+          </p:cNvPicPr>
+          <p:nvPr/>
+        </p:nvPicPr>
+        <p:blipFill>
+          <a:blip r:embed="rId3">
+            <a:extLst>
+              <a:ext uri="{28A0092B-C50C-407E-A947-70E740481C1C}">
+                <a14:useLocalDpi xmlns:a14="http://schemas.microsoft.com/office/drawing/2010/main" val="0"/>
+              </a:ext>
+            </a:extLst>
+          </a:blip>
+          <a:srcRect l="11112" t="11686" r="35868" b="71197"/>
+          <a:stretch>
+            <a:fillRect/>
+          </a:stretch>
+        </p:blipFill>
+        <p:spPr>
+          <a:xfrm>
+            <a:off x="1018334" y="4686300"/>
+            <a:ext cx="16619646" cy="5279366"/>
+          </a:xfrm>
+          <a:prstGeom prst="rect">
+            <a:avLst/>
+          </a:prstGeom>
+        </p:spPr>
+      </p:pic>
+    </p:spTree>
+  </p:cSld>
+  <p:clrMapOvr>
+    <a:masterClrMapping/>
+  </p:clrMapOvr>
+  <p:transition spd="med">
+    <p:pull/>
+  </p:transition>
+</p:sld>
+</file>
+
+<file path=ppt/slides/slide20.xml><?xml version="1.0" encoding="utf-8"?>
 <p:sld xmlns:a="http://schemas.openxmlformats.org/drawingml/2006/main" xmlns:r="http://schemas.openxmlformats.org/officeDocument/2006/relationships" xmlns:p="http://schemas.openxmlformats.org/presentationml/2006/main">
   <p:cSld>
     <p:spTree>
@@ -6294,7 +10101,7 @@
 </p:sld>
 </file>
 
-<file path=ppt/slides/slide17.xml><?xml version="1.0" encoding="utf-8"?>
+<file path=ppt/slides/slide21.xml><?xml version="1.0" encoding="utf-8"?>
 <p:sld xmlns:a="http://schemas.openxmlformats.org/drawingml/2006/main" xmlns:r="http://schemas.openxmlformats.org/officeDocument/2006/relationships" xmlns:p="http://schemas.openxmlformats.org/presentationml/2006/main">
   <p:cSld>
     <p:spTree>
@@ -6351,655 +10158,6 @@
         <p14:creationId xmlns:p14="http://schemas.microsoft.com/office/powerpoint/2010/main" val="1300073713"/>
       </p:ext>
     </p:extLst>
-  </p:cSld>
-  <p:clrMapOvr>
-    <a:masterClrMapping/>
-  </p:clrMapOvr>
-  <p:transition spd="med">
-    <p:pull/>
-  </p:transition>
-</p:sld>
-</file>
-
-<file path=ppt/slides/slide2.xml><?xml version="1.0" encoding="utf-8"?>
-<p:sld xmlns:a="http://schemas.openxmlformats.org/drawingml/2006/main" xmlns:r="http://schemas.openxmlformats.org/officeDocument/2006/relationships" xmlns:p="http://schemas.openxmlformats.org/presentationml/2006/main">
-  <p:cSld>
-    <p:spTree>
-      <p:nvGrpSpPr>
-        <p:cNvPr id="1" name=""/>
-        <p:cNvGrpSpPr/>
-        <p:nvPr/>
-      </p:nvGrpSpPr>
-      <p:grpSpPr>
-        <a:xfrm>
-          <a:off x="0" y="0"/>
-          <a:ext cx="0" cy="0"/>
-          <a:chOff x="0" y="0"/>
-          <a:chExt cx="0" cy="0"/>
-        </a:xfrm>
-      </p:grpSpPr>
-      <p:sp>
-        <p:nvSpPr>
-          <p:cNvPr id="2" name="object 2"/>
-          <p:cNvSpPr txBox="1">
-            <a:spLocks noGrp="1"/>
-          </p:cNvSpPr>
-          <p:nvPr>
-            <p:ph type="title"/>
-          </p:nvPr>
-        </p:nvSpPr>
-        <p:spPr>
-          <a:prstGeom prst="rect">
-            <a:avLst/>
-          </a:prstGeom>
-        </p:spPr>
-        <p:txBody>
-          <a:bodyPr vert="horz" wrap="square" lIns="0" tIns="12700" rIns="0" bIns="0" rtlCol="0">
-            <a:spAutoFit/>
-          </a:bodyPr>
-          <a:lstStyle/>
-          <a:p>
-            <a:pPr marL="12700">
-              <a:lnSpc>
-                <a:spcPct val="100000"/>
-              </a:lnSpc>
-              <a:spcBef>
-                <a:spcPts val="100"/>
-              </a:spcBef>
-            </a:pPr>
-            <a:r>
-              <a:rPr spc="-114" dirty="0"/>
-              <a:t>Dictionary</a:t>
-            </a:r>
-            <a:r>
-              <a:rPr spc="-340" dirty="0"/>
-              <a:t> </a:t>
-            </a:r>
-            <a:r>
-              <a:rPr dirty="0">
-                <a:solidFill>
-                  <a:srgbClr val="FFFFFF"/>
-                </a:solidFill>
-              </a:rPr>
-              <a:t>in</a:t>
-            </a:r>
-            <a:r>
-              <a:rPr spc="-340" dirty="0">
-                <a:solidFill>
-                  <a:srgbClr val="FFFFFF"/>
-                </a:solidFill>
-              </a:rPr>
-              <a:t> </a:t>
-            </a:r>
-            <a:r>
-              <a:rPr spc="-100" dirty="0">
-                <a:solidFill>
-                  <a:srgbClr val="FFFFFF"/>
-                </a:solidFill>
-              </a:rPr>
-              <a:t>Python</a:t>
-            </a:r>
-          </a:p>
-        </p:txBody>
-      </p:sp>
-      <p:sp>
-        <p:nvSpPr>
-          <p:cNvPr id="3" name="object 3"/>
-          <p:cNvSpPr/>
-          <p:nvPr/>
-        </p:nvSpPr>
-        <p:spPr>
-          <a:xfrm>
-            <a:off x="989579" y="1844137"/>
-            <a:ext cx="5746115" cy="24130"/>
-          </a:xfrm>
-          <a:custGeom>
-            <a:avLst/>
-            <a:gdLst/>
-            <a:ahLst/>
-            <a:cxnLst/>
-            <a:rect l="l" t="t" r="r" b="b"/>
-            <a:pathLst>
-              <a:path w="5746115" h="24130">
-                <a:moveTo>
-                  <a:pt x="0" y="23616"/>
-                </a:moveTo>
-                <a:lnTo>
-                  <a:pt x="5745540" y="0"/>
-                </a:lnTo>
-              </a:path>
-            </a:pathLst>
-          </a:custGeom>
-          <a:ln w="47624">
-            <a:solidFill>
-              <a:srgbClr val="FFFFFF"/>
-            </a:solidFill>
-          </a:ln>
-        </p:spPr>
-        <p:txBody>
-          <a:bodyPr wrap="square" lIns="0" tIns="0" rIns="0" bIns="0" rtlCol="0"/>
-          <a:lstStyle/>
-          <a:p>
-            <a:endParaRPr/>
-          </a:p>
-        </p:txBody>
-      </p:sp>
-      <p:sp>
-        <p:nvSpPr>
-          <p:cNvPr id="5" name="object 5"/>
-          <p:cNvSpPr txBox="1"/>
-          <p:nvPr/>
-        </p:nvSpPr>
-        <p:spPr>
-          <a:xfrm>
-            <a:off x="953066" y="2240617"/>
-            <a:ext cx="11866245" cy="3136756"/>
-          </a:xfrm>
-          <a:prstGeom prst="rect">
-            <a:avLst/>
-          </a:prstGeom>
-        </p:spPr>
-        <p:txBody>
-          <a:bodyPr vert="horz" wrap="square" lIns="0" tIns="12700" rIns="0" bIns="0" rtlCol="0">
-            <a:spAutoFit/>
-          </a:bodyPr>
-          <a:lstStyle/>
-          <a:p>
-            <a:pPr marL="12700">
-              <a:lnSpc>
-                <a:spcPct val="100000"/>
-              </a:lnSpc>
-              <a:spcBef>
-                <a:spcPts val="100"/>
-              </a:spcBef>
-            </a:pPr>
-            <a:r>
-              <a:rPr sz="3200" spc="-55" dirty="0">
-                <a:solidFill>
-                  <a:srgbClr val="FFFFFF"/>
-                </a:solidFill>
-                <a:latin typeface="Tahoma"/>
-                <a:cs typeface="Tahoma"/>
-              </a:rPr>
-              <a:t>Dictionaries</a:t>
-            </a:r>
-            <a:r>
-              <a:rPr sz="3200" spc="-195" dirty="0">
-                <a:solidFill>
-                  <a:srgbClr val="FFFFFF"/>
-                </a:solidFill>
-                <a:latin typeface="Tahoma"/>
-                <a:cs typeface="Tahoma"/>
-              </a:rPr>
-              <a:t> </a:t>
-            </a:r>
-            <a:r>
-              <a:rPr sz="3200" spc="-90" dirty="0">
-                <a:solidFill>
-                  <a:srgbClr val="FFFFFF"/>
-                </a:solidFill>
-                <a:latin typeface="Tahoma"/>
-                <a:cs typeface="Tahoma"/>
-              </a:rPr>
-              <a:t>are</a:t>
-            </a:r>
-            <a:r>
-              <a:rPr sz="3200" spc="-190" dirty="0">
-                <a:solidFill>
-                  <a:srgbClr val="FFFFFF"/>
-                </a:solidFill>
-                <a:latin typeface="Tahoma"/>
-                <a:cs typeface="Tahoma"/>
-              </a:rPr>
-              <a:t> </a:t>
-            </a:r>
-            <a:r>
-              <a:rPr sz="3200" spc="-105" dirty="0">
-                <a:solidFill>
-                  <a:srgbClr val="FFFFFF"/>
-                </a:solidFill>
-                <a:latin typeface="Tahoma"/>
-                <a:cs typeface="Tahoma"/>
-              </a:rPr>
-              <a:t>used</a:t>
-            </a:r>
-            <a:r>
-              <a:rPr sz="3200" spc="-190" dirty="0">
-                <a:solidFill>
-                  <a:srgbClr val="FFFFFF"/>
-                </a:solidFill>
-                <a:latin typeface="Tahoma"/>
-                <a:cs typeface="Tahoma"/>
-              </a:rPr>
-              <a:t> </a:t>
-            </a:r>
-            <a:r>
-              <a:rPr sz="3200" spc="-60" dirty="0">
-                <a:solidFill>
-                  <a:srgbClr val="FFFFFF"/>
-                </a:solidFill>
-                <a:latin typeface="Tahoma"/>
-                <a:cs typeface="Tahoma"/>
-              </a:rPr>
-              <a:t>to</a:t>
-            </a:r>
-            <a:r>
-              <a:rPr sz="3200" spc="-195" dirty="0">
-                <a:solidFill>
-                  <a:srgbClr val="FFFFFF"/>
-                </a:solidFill>
-                <a:latin typeface="Tahoma"/>
-                <a:cs typeface="Tahoma"/>
-              </a:rPr>
-              <a:t> </a:t>
-            </a:r>
-            <a:r>
-              <a:rPr sz="3200" spc="-40" dirty="0">
-                <a:solidFill>
-                  <a:srgbClr val="FFFFFF"/>
-                </a:solidFill>
-                <a:latin typeface="Tahoma"/>
-                <a:cs typeface="Tahoma"/>
-              </a:rPr>
-              <a:t>store</a:t>
-            </a:r>
-            <a:r>
-              <a:rPr sz="3200" spc="-190" dirty="0">
-                <a:solidFill>
-                  <a:srgbClr val="FFFFFF"/>
-                </a:solidFill>
-                <a:latin typeface="Tahoma"/>
-                <a:cs typeface="Tahoma"/>
-              </a:rPr>
-              <a:t> </a:t>
-            </a:r>
-            <a:r>
-              <a:rPr sz="3200" spc="-110" dirty="0">
-                <a:solidFill>
-                  <a:srgbClr val="FFFFFF"/>
-                </a:solidFill>
-                <a:latin typeface="Tahoma"/>
-                <a:cs typeface="Tahoma"/>
-              </a:rPr>
-              <a:t>data</a:t>
-            </a:r>
-            <a:r>
-              <a:rPr sz="3200" spc="-190" dirty="0">
-                <a:solidFill>
-                  <a:srgbClr val="FFFFFF"/>
-                </a:solidFill>
-                <a:latin typeface="Tahoma"/>
-                <a:cs typeface="Tahoma"/>
-              </a:rPr>
-              <a:t> </a:t>
-            </a:r>
-            <a:r>
-              <a:rPr sz="3200" spc="-85" dirty="0">
-                <a:solidFill>
-                  <a:srgbClr val="FFFFFF"/>
-                </a:solidFill>
-                <a:latin typeface="Tahoma"/>
-                <a:cs typeface="Tahoma"/>
-              </a:rPr>
-              <a:t>values</a:t>
-            </a:r>
-            <a:r>
-              <a:rPr sz="3200" spc="-195" dirty="0">
-                <a:solidFill>
-                  <a:srgbClr val="FFFFFF"/>
-                </a:solidFill>
-                <a:latin typeface="Tahoma"/>
-                <a:cs typeface="Tahoma"/>
-              </a:rPr>
-              <a:t> </a:t>
-            </a:r>
-            <a:r>
-              <a:rPr sz="3200" dirty="0">
-                <a:solidFill>
-                  <a:srgbClr val="FFFFFF"/>
-                </a:solidFill>
-                <a:latin typeface="Tahoma"/>
-                <a:cs typeface="Tahoma"/>
-              </a:rPr>
-              <a:t>in</a:t>
-            </a:r>
-            <a:r>
-              <a:rPr sz="3200" spc="-190" dirty="0">
-                <a:solidFill>
-                  <a:srgbClr val="FFFFFF"/>
-                </a:solidFill>
-                <a:latin typeface="Tahoma"/>
-                <a:cs typeface="Tahoma"/>
-              </a:rPr>
-              <a:t> </a:t>
-            </a:r>
-            <a:r>
-              <a:rPr sz="3200" spc="-140" dirty="0">
-                <a:solidFill>
-                  <a:srgbClr val="3BE2EC"/>
-                </a:solidFill>
-                <a:latin typeface="Tahoma"/>
-                <a:cs typeface="Tahoma"/>
-              </a:rPr>
-              <a:t>key:value</a:t>
-            </a:r>
-            <a:r>
-              <a:rPr sz="3200" spc="-190" dirty="0">
-                <a:solidFill>
-                  <a:srgbClr val="3BE2EC"/>
-                </a:solidFill>
-                <a:latin typeface="Tahoma"/>
-                <a:cs typeface="Tahoma"/>
-              </a:rPr>
-              <a:t> </a:t>
-            </a:r>
-            <a:r>
-              <a:rPr sz="3200" spc="-10" dirty="0">
-                <a:solidFill>
-                  <a:srgbClr val="FFFFFF"/>
-                </a:solidFill>
-                <a:latin typeface="Tahoma"/>
-                <a:cs typeface="Tahoma"/>
-              </a:rPr>
-              <a:t>pairs</a:t>
-            </a:r>
-            <a:endParaRPr sz="3200" dirty="0">
-              <a:latin typeface="Tahoma"/>
-              <a:cs typeface="Tahoma"/>
-            </a:endParaRPr>
-          </a:p>
-          <a:p>
-            <a:pPr marL="12700">
-              <a:lnSpc>
-                <a:spcPct val="100000"/>
-              </a:lnSpc>
-              <a:spcBef>
-                <a:spcPts val="3020"/>
-              </a:spcBef>
-            </a:pPr>
-            <a:r>
-              <a:rPr sz="3200" spc="-215" dirty="0">
-                <a:solidFill>
-                  <a:srgbClr val="FFFFFF"/>
-                </a:solidFill>
-                <a:latin typeface="Tahoma"/>
-                <a:cs typeface="Tahoma"/>
-              </a:rPr>
-              <a:t>They</a:t>
-            </a:r>
-            <a:r>
-              <a:rPr sz="3200" spc="-180" dirty="0">
-                <a:solidFill>
-                  <a:srgbClr val="FFFFFF"/>
-                </a:solidFill>
-                <a:latin typeface="Tahoma"/>
-                <a:cs typeface="Tahoma"/>
-              </a:rPr>
-              <a:t> </a:t>
-            </a:r>
-            <a:r>
-              <a:rPr sz="3200" spc="-90" dirty="0">
-                <a:solidFill>
-                  <a:srgbClr val="FFFFFF"/>
-                </a:solidFill>
-                <a:latin typeface="Tahoma"/>
-                <a:cs typeface="Tahoma"/>
-              </a:rPr>
-              <a:t>are</a:t>
-            </a:r>
-            <a:r>
-              <a:rPr sz="3200" spc="-175" dirty="0">
-                <a:solidFill>
-                  <a:srgbClr val="FFFFFF"/>
-                </a:solidFill>
-                <a:latin typeface="Tahoma"/>
-                <a:cs typeface="Tahoma"/>
-              </a:rPr>
-              <a:t> </a:t>
-            </a:r>
-            <a:r>
-              <a:rPr sz="3200" spc="-95" dirty="0">
-                <a:solidFill>
-                  <a:srgbClr val="FFFFFF"/>
-                </a:solidFill>
-                <a:latin typeface="Tahoma"/>
-                <a:cs typeface="Tahoma"/>
-              </a:rPr>
-              <a:t>ordered,</a:t>
-            </a:r>
-            <a:r>
-              <a:rPr sz="3200" spc="-175" dirty="0">
-                <a:solidFill>
-                  <a:srgbClr val="FFFFFF"/>
-                </a:solidFill>
-                <a:latin typeface="Tahoma"/>
-                <a:cs typeface="Tahoma"/>
-              </a:rPr>
-              <a:t> </a:t>
-            </a:r>
-            <a:r>
-              <a:rPr sz="3200" spc="-125" dirty="0">
-                <a:solidFill>
-                  <a:srgbClr val="FFFFFF"/>
-                </a:solidFill>
-                <a:latin typeface="Tahoma"/>
-                <a:cs typeface="Tahoma"/>
-              </a:rPr>
-              <a:t>mutable(changeable)</a:t>
-            </a:r>
-            <a:r>
-              <a:rPr sz="3200" spc="-180" dirty="0">
-                <a:solidFill>
-                  <a:srgbClr val="FFFFFF"/>
-                </a:solidFill>
-                <a:latin typeface="Tahoma"/>
-                <a:cs typeface="Tahoma"/>
-              </a:rPr>
-              <a:t> &amp;</a:t>
-            </a:r>
-            <a:r>
-              <a:rPr sz="3200" spc="-175" dirty="0">
-                <a:solidFill>
-                  <a:srgbClr val="FFFFFF"/>
-                </a:solidFill>
-                <a:latin typeface="Tahoma"/>
-                <a:cs typeface="Tahoma"/>
-              </a:rPr>
-              <a:t> </a:t>
-            </a:r>
-            <a:r>
-              <a:rPr sz="3200" spc="-55" dirty="0">
-                <a:solidFill>
-                  <a:srgbClr val="FFFFFF"/>
-                </a:solidFill>
-                <a:latin typeface="Tahoma"/>
-                <a:cs typeface="Tahoma"/>
-              </a:rPr>
-              <a:t>don’t</a:t>
-            </a:r>
-            <a:r>
-              <a:rPr sz="3200" spc="-175" dirty="0">
-                <a:solidFill>
-                  <a:srgbClr val="FFFFFF"/>
-                </a:solidFill>
-                <a:latin typeface="Tahoma"/>
-                <a:cs typeface="Tahoma"/>
-              </a:rPr>
-              <a:t> </a:t>
-            </a:r>
-            <a:r>
-              <a:rPr sz="3200" spc="-110" dirty="0">
-                <a:solidFill>
-                  <a:srgbClr val="FFFFFF"/>
-                </a:solidFill>
-                <a:latin typeface="Tahoma"/>
-                <a:cs typeface="Tahoma"/>
-              </a:rPr>
-              <a:t>allow</a:t>
-            </a:r>
-            <a:r>
-              <a:rPr sz="3200" spc="-180" dirty="0">
-                <a:solidFill>
-                  <a:srgbClr val="FFFFFF"/>
-                </a:solidFill>
-                <a:latin typeface="Tahoma"/>
-                <a:cs typeface="Tahoma"/>
-              </a:rPr>
-              <a:t> </a:t>
-            </a:r>
-            <a:r>
-              <a:rPr sz="3200" spc="-65" dirty="0">
-                <a:solidFill>
-                  <a:srgbClr val="FFFFFF"/>
-                </a:solidFill>
-                <a:latin typeface="Tahoma"/>
-                <a:cs typeface="Tahoma"/>
-              </a:rPr>
-              <a:t>duplicate</a:t>
-            </a:r>
-            <a:r>
-              <a:rPr sz="3200" spc="-175" dirty="0">
-                <a:solidFill>
-                  <a:srgbClr val="FFFFFF"/>
-                </a:solidFill>
-                <a:latin typeface="Tahoma"/>
-                <a:cs typeface="Tahoma"/>
-              </a:rPr>
-              <a:t> </a:t>
-            </a:r>
-            <a:r>
-              <a:rPr sz="3200" spc="-20" dirty="0">
-                <a:solidFill>
-                  <a:srgbClr val="FFFFFF"/>
-                </a:solidFill>
-                <a:latin typeface="Tahoma"/>
-                <a:cs typeface="Tahoma"/>
-              </a:rPr>
-              <a:t>keys</a:t>
-            </a:r>
-            <a:endParaRPr lang="en-US" sz="3200" spc="-20" dirty="0">
-              <a:solidFill>
-                <a:srgbClr val="FFFFFF"/>
-              </a:solidFill>
-              <a:latin typeface="Tahoma"/>
-              <a:cs typeface="Tahoma"/>
-            </a:endParaRPr>
-          </a:p>
-          <a:p>
-            <a:pPr marL="12700" algn="l">
-              <a:spcBef>
-                <a:spcPts val="3020"/>
-              </a:spcBef>
-            </a:pPr>
-            <a:r>
-              <a:rPr lang="en-US" sz="3200" spc="65" dirty="0">
-                <a:solidFill>
-                  <a:srgbClr val="FFFFFF"/>
-                </a:solidFill>
-                <a:latin typeface="Arial MT"/>
-                <a:cs typeface="Arial MT"/>
-              </a:rPr>
-              <a:t>“key”</a:t>
-            </a:r>
-            <a:r>
-              <a:rPr lang="en-US" sz="3200" spc="-35" dirty="0">
-                <a:solidFill>
-                  <a:srgbClr val="FFFFFF"/>
-                </a:solidFill>
-                <a:latin typeface="Arial MT"/>
-                <a:cs typeface="Arial MT"/>
-              </a:rPr>
-              <a:t> </a:t>
-            </a:r>
-            <a:r>
-              <a:rPr lang="en-US" sz="3200" spc="155" dirty="0">
-                <a:solidFill>
-                  <a:srgbClr val="FFFFFF"/>
-                </a:solidFill>
-                <a:latin typeface="Arial MT"/>
-                <a:cs typeface="Arial MT"/>
-              </a:rPr>
-              <a:t>:</a:t>
-            </a:r>
-            <a:r>
-              <a:rPr lang="en-US" sz="3200" spc="-30" dirty="0">
-                <a:solidFill>
-                  <a:srgbClr val="FFFFFF"/>
-                </a:solidFill>
-                <a:latin typeface="Arial MT"/>
-                <a:cs typeface="Arial MT"/>
-              </a:rPr>
-              <a:t> </a:t>
-            </a:r>
-            <a:r>
-              <a:rPr lang="en-US" sz="3200" spc="-20" dirty="0">
-                <a:solidFill>
-                  <a:srgbClr val="FFFFFF"/>
-                </a:solidFill>
-                <a:latin typeface="Arial MT"/>
-                <a:cs typeface="Arial MT"/>
-              </a:rPr>
-              <a:t>value</a:t>
-            </a:r>
-            <a:endParaRPr lang="en-US" sz="3200" dirty="0">
-              <a:latin typeface="Arial MT"/>
-              <a:cs typeface="Arial MT"/>
-            </a:endParaRPr>
-          </a:p>
-          <a:p>
-            <a:pPr marL="12700">
-              <a:lnSpc>
-                <a:spcPct val="100000"/>
-              </a:lnSpc>
-              <a:spcBef>
-                <a:spcPts val="3020"/>
-              </a:spcBef>
-            </a:pPr>
-            <a:endParaRPr sz="3200" dirty="0">
-              <a:latin typeface="Tahoma"/>
-              <a:cs typeface="Tahoma"/>
-            </a:endParaRPr>
-          </a:p>
-        </p:txBody>
-      </p:sp>
-      <p:pic>
-        <p:nvPicPr>
-          <p:cNvPr id="8" name="Picture 7">
-            <a:extLst>
-              <a:ext uri="{FF2B5EF4-FFF2-40B4-BE49-F238E27FC236}">
-                <a16:creationId xmlns:a16="http://schemas.microsoft.com/office/drawing/2014/main" id="{0C12036A-869B-949C-D020-BCF2473D609F}"/>
-              </a:ext>
-            </a:extLst>
-          </p:cNvPr>
-          <p:cNvPicPr>
-            <a:picLocks noChangeAspect="1"/>
-          </p:cNvPicPr>
-          <p:nvPr/>
-        </p:nvPicPr>
-        <p:blipFill>
-          <a:blip r:embed="rId3">
-            <a:extLst>
-              <a:ext uri="{28A0092B-C50C-407E-A947-70E740481C1C}">
-                <a14:useLocalDpi xmlns:a14="http://schemas.microsoft.com/office/drawing/2010/main" val="0"/>
-              </a:ext>
-            </a:extLst>
-          </a:blip>
-          <a:srcRect l="11112" t="11686" r="35868" b="71197"/>
-          <a:stretch>
-            <a:fillRect/>
-          </a:stretch>
-        </p:blipFill>
-        <p:spPr>
-          <a:xfrm>
-            <a:off x="1018334" y="4686300"/>
-            <a:ext cx="16619646" cy="5279366"/>
-          </a:xfrm>
-          <a:prstGeom prst="rect">
-            <a:avLst/>
-          </a:prstGeom>
-        </p:spPr>
-      </p:pic>
-    </p:spTree>
   </p:cSld>
   <p:clrMapOvr>
     <a:masterClrMapping/>
@@ -7392,7 +10550,13 @@
   <p:cSld>
     <p:spTree>
       <p:nvGrpSpPr>
-        <p:cNvPr id="1" name=""/>
+        <p:cNvPr id="1" name="">
+          <a:extLst>
+            <a:ext uri="{FF2B5EF4-FFF2-40B4-BE49-F238E27FC236}">
+              <a16:creationId xmlns:a16="http://schemas.microsoft.com/office/drawing/2014/main" id="{26270E33-3AE7-C797-A3B9-ECA0002AB82D}"/>
+            </a:ext>
+          </a:extLst>
+        </p:cNvPr>
         <p:cNvGrpSpPr/>
         <p:nvPr/>
       </p:nvGrpSpPr>
@@ -7404,1079 +10568,12 @@
           <a:chExt cx="0" cy="0"/>
         </a:xfrm>
       </p:grpSpPr>
-      <p:sp>
-        <p:nvSpPr>
-          <p:cNvPr id="2" name="object 2"/>
-          <p:cNvSpPr txBox="1">
-            <a:spLocks noGrp="1"/>
-          </p:cNvSpPr>
-          <p:nvPr>
-            <p:ph type="title"/>
-          </p:nvPr>
-        </p:nvSpPr>
-        <p:spPr>
-          <a:xfrm>
-            <a:off x="953066" y="995044"/>
-            <a:ext cx="5577840" cy="848360"/>
-          </a:xfrm>
-          <a:prstGeom prst="rect">
-            <a:avLst/>
-          </a:prstGeom>
-        </p:spPr>
-        <p:txBody>
-          <a:bodyPr vert="horz" wrap="square" lIns="0" tIns="12700" rIns="0" bIns="0" rtlCol="0">
-            <a:spAutoFit/>
-          </a:bodyPr>
-          <a:lstStyle/>
-          <a:p>
-            <a:pPr marL="12700">
-              <a:lnSpc>
-                <a:spcPct val="100000"/>
-              </a:lnSpc>
-              <a:spcBef>
-                <a:spcPts val="100"/>
-              </a:spcBef>
-            </a:pPr>
-            <a:r>
-              <a:rPr spc="-114" dirty="0">
-                <a:solidFill>
-                  <a:srgbClr val="FFFFFF"/>
-                </a:solidFill>
-              </a:rPr>
-              <a:t>Dictionary</a:t>
-            </a:r>
-            <a:r>
-              <a:rPr spc="-360" dirty="0">
-                <a:solidFill>
-                  <a:srgbClr val="FFFFFF"/>
-                </a:solidFill>
-              </a:rPr>
-              <a:t> </a:t>
-            </a:r>
-            <a:r>
-              <a:rPr spc="-65" dirty="0"/>
-              <a:t>Methods</a:t>
-            </a:r>
-          </a:p>
-        </p:txBody>
-      </p:sp>
-      <p:sp>
-        <p:nvSpPr>
-          <p:cNvPr id="3" name="object 3"/>
-          <p:cNvSpPr/>
-          <p:nvPr/>
-        </p:nvSpPr>
-        <p:spPr>
-          <a:xfrm>
-            <a:off x="989579" y="1844140"/>
-            <a:ext cx="5652135" cy="24130"/>
-          </a:xfrm>
-          <a:custGeom>
-            <a:avLst/>
-            <a:gdLst/>
-            <a:ahLst/>
-            <a:cxnLst/>
-            <a:rect l="l" t="t" r="r" b="b"/>
-            <a:pathLst>
-              <a:path w="5652134" h="24130">
-                <a:moveTo>
-                  <a:pt x="0" y="23613"/>
-                </a:moveTo>
-                <a:lnTo>
-                  <a:pt x="5651551" y="0"/>
-                </a:lnTo>
-              </a:path>
-            </a:pathLst>
-          </a:custGeom>
-          <a:ln w="47624">
-            <a:solidFill>
-              <a:srgbClr val="FFFFFF"/>
-            </a:solidFill>
-          </a:ln>
-        </p:spPr>
-        <p:txBody>
-          <a:bodyPr wrap="square" lIns="0" tIns="0" rIns="0" bIns="0" rtlCol="0"/>
-          <a:lstStyle/>
-          <a:p>
-            <a:endParaRPr/>
-          </a:p>
-        </p:txBody>
-      </p:sp>
-      <p:sp>
-        <p:nvSpPr>
-          <p:cNvPr id="4" name="object 4"/>
-          <p:cNvSpPr txBox="1"/>
-          <p:nvPr/>
-        </p:nvSpPr>
-        <p:spPr>
-          <a:xfrm>
-            <a:off x="953066" y="2504502"/>
-            <a:ext cx="12568555" cy="5354320"/>
-          </a:xfrm>
-          <a:prstGeom prst="rect">
-            <a:avLst/>
-          </a:prstGeom>
-        </p:spPr>
-        <p:txBody>
-          <a:bodyPr vert="horz" wrap="square" lIns="0" tIns="12700" rIns="0" bIns="0" rtlCol="0">
-            <a:spAutoFit/>
-          </a:bodyPr>
-          <a:lstStyle/>
-          <a:p>
-            <a:pPr marL="75565">
-              <a:lnSpc>
-                <a:spcPct val="100000"/>
-              </a:lnSpc>
-              <a:spcBef>
-                <a:spcPts val="100"/>
-              </a:spcBef>
-              <a:tabLst>
-                <a:tab pos="2802890" algn="l"/>
-              </a:tabLst>
-            </a:pPr>
-            <a:r>
-              <a:rPr sz="3200" spc="-65" dirty="0">
-                <a:solidFill>
-                  <a:srgbClr val="FFFFFF"/>
-                </a:solidFill>
-                <a:latin typeface="Arial MT"/>
-                <a:cs typeface="Arial MT"/>
-              </a:rPr>
-              <a:t>myDict.</a:t>
-            </a:r>
-            <a:r>
-              <a:rPr sz="3200" b="1" spc="-65" dirty="0">
-                <a:solidFill>
-                  <a:srgbClr val="3BE2EC"/>
-                </a:solidFill>
-                <a:latin typeface="Arial"/>
-                <a:cs typeface="Arial"/>
-              </a:rPr>
-              <a:t>keys</a:t>
-            </a:r>
-            <a:r>
-              <a:rPr sz="3200" spc="-65" dirty="0">
-                <a:solidFill>
-                  <a:srgbClr val="FFFFFF"/>
-                </a:solidFill>
-                <a:latin typeface="Arial MT"/>
-                <a:cs typeface="Arial MT"/>
-              </a:rPr>
-              <a:t>(</a:t>
-            </a:r>
-            <a:r>
-              <a:rPr sz="3200" spc="-150" dirty="0">
-                <a:solidFill>
-                  <a:srgbClr val="FFFFFF"/>
-                </a:solidFill>
-                <a:latin typeface="Arial MT"/>
-                <a:cs typeface="Arial MT"/>
-              </a:rPr>
-              <a:t> </a:t>
-            </a:r>
-            <a:r>
-              <a:rPr sz="3200" spc="-50" dirty="0">
-                <a:solidFill>
-                  <a:srgbClr val="FFFFFF"/>
-                </a:solidFill>
-                <a:latin typeface="Arial MT"/>
-                <a:cs typeface="Arial MT"/>
-              </a:rPr>
-              <a:t>)</a:t>
-            </a:r>
-            <a:r>
-              <a:rPr sz="3200" dirty="0">
-                <a:solidFill>
-                  <a:srgbClr val="FFFFFF"/>
-                </a:solidFill>
-                <a:latin typeface="Arial MT"/>
-                <a:cs typeface="Arial MT"/>
-              </a:rPr>
-              <a:t>	</a:t>
-            </a:r>
-            <a:r>
-              <a:rPr sz="3200" dirty="0">
-                <a:solidFill>
-                  <a:srgbClr val="32BD15"/>
-                </a:solidFill>
-                <a:latin typeface="Arial MT"/>
-                <a:cs typeface="Arial MT"/>
-              </a:rPr>
-              <a:t>#returns</a:t>
-            </a:r>
-            <a:r>
-              <a:rPr sz="3200" spc="120" dirty="0">
-                <a:solidFill>
-                  <a:srgbClr val="32BD15"/>
-                </a:solidFill>
-                <a:latin typeface="Arial MT"/>
-                <a:cs typeface="Arial MT"/>
-              </a:rPr>
-              <a:t> </a:t>
-            </a:r>
-            <a:r>
-              <a:rPr sz="3200" dirty="0">
-                <a:solidFill>
-                  <a:srgbClr val="32BD15"/>
-                </a:solidFill>
-                <a:latin typeface="Arial MT"/>
-                <a:cs typeface="Arial MT"/>
-              </a:rPr>
-              <a:t>all</a:t>
-            </a:r>
-            <a:r>
-              <a:rPr sz="3200" spc="120" dirty="0">
-                <a:solidFill>
-                  <a:srgbClr val="32BD15"/>
-                </a:solidFill>
-                <a:latin typeface="Arial MT"/>
-                <a:cs typeface="Arial MT"/>
-              </a:rPr>
-              <a:t> </a:t>
-            </a:r>
-            <a:r>
-              <a:rPr sz="3200" spc="-20" dirty="0">
-                <a:solidFill>
-                  <a:srgbClr val="32BD15"/>
-                </a:solidFill>
-                <a:latin typeface="Arial MT"/>
-                <a:cs typeface="Arial MT"/>
-              </a:rPr>
-              <a:t>keys</a:t>
-            </a:r>
-            <a:endParaRPr sz="3200" dirty="0">
-              <a:latin typeface="Arial MT"/>
-              <a:cs typeface="Arial MT"/>
-            </a:endParaRPr>
-          </a:p>
-          <a:p>
-            <a:pPr>
-              <a:lnSpc>
-                <a:spcPct val="100000"/>
-              </a:lnSpc>
-              <a:spcBef>
-                <a:spcPts val="2005"/>
-              </a:spcBef>
-            </a:pPr>
-            <a:endParaRPr sz="3200" dirty="0">
-              <a:latin typeface="Arial MT"/>
-              <a:cs typeface="Arial MT"/>
-            </a:endParaRPr>
-          </a:p>
-          <a:p>
-            <a:pPr marL="75565">
-              <a:lnSpc>
-                <a:spcPct val="100000"/>
-              </a:lnSpc>
-              <a:spcBef>
-                <a:spcPts val="5"/>
-              </a:spcBef>
-              <a:tabLst>
-                <a:tab pos="3125470" algn="l"/>
-              </a:tabLst>
-            </a:pPr>
-            <a:r>
-              <a:rPr sz="3200" spc="-85" dirty="0">
-                <a:solidFill>
-                  <a:srgbClr val="FFFFFF"/>
-                </a:solidFill>
-                <a:latin typeface="Arial MT"/>
-                <a:cs typeface="Arial MT"/>
-              </a:rPr>
-              <a:t>myDict.</a:t>
-            </a:r>
-            <a:r>
-              <a:rPr sz="3200" b="1" spc="-85" dirty="0">
-                <a:solidFill>
-                  <a:srgbClr val="3BE2EC"/>
-                </a:solidFill>
-                <a:latin typeface="Arial"/>
-                <a:cs typeface="Arial"/>
-              </a:rPr>
-              <a:t>values</a:t>
-            </a:r>
-            <a:r>
-              <a:rPr sz="3200" b="1" spc="-85" dirty="0">
-                <a:solidFill>
-                  <a:srgbClr val="FFFFFF"/>
-                </a:solidFill>
-                <a:latin typeface="Arial"/>
-                <a:cs typeface="Arial"/>
-              </a:rPr>
-              <a:t>( </a:t>
-            </a:r>
-            <a:r>
-              <a:rPr sz="3200" b="1" spc="-50" dirty="0">
-                <a:solidFill>
-                  <a:srgbClr val="FFFFFF"/>
-                </a:solidFill>
-                <a:latin typeface="Arial"/>
-                <a:cs typeface="Arial"/>
-              </a:rPr>
-              <a:t>)</a:t>
-            </a:r>
-            <a:r>
-              <a:rPr sz="3200" b="1" dirty="0">
-                <a:solidFill>
-                  <a:srgbClr val="FFFFFF"/>
-                </a:solidFill>
-                <a:latin typeface="Arial"/>
-                <a:cs typeface="Arial"/>
-              </a:rPr>
-              <a:t>	</a:t>
-            </a:r>
-            <a:r>
-              <a:rPr sz="3200" dirty="0">
-                <a:solidFill>
-                  <a:srgbClr val="32BD15"/>
-                </a:solidFill>
-                <a:latin typeface="Arial MT"/>
-                <a:cs typeface="Arial MT"/>
-              </a:rPr>
-              <a:t>#returns</a:t>
-            </a:r>
-            <a:r>
-              <a:rPr sz="3200" spc="120" dirty="0">
-                <a:solidFill>
-                  <a:srgbClr val="32BD15"/>
-                </a:solidFill>
-                <a:latin typeface="Arial MT"/>
-                <a:cs typeface="Arial MT"/>
-              </a:rPr>
-              <a:t> </a:t>
-            </a:r>
-            <a:r>
-              <a:rPr sz="3200" dirty="0">
-                <a:solidFill>
-                  <a:srgbClr val="32BD15"/>
-                </a:solidFill>
-                <a:latin typeface="Arial MT"/>
-                <a:cs typeface="Arial MT"/>
-              </a:rPr>
-              <a:t>all</a:t>
-            </a:r>
-            <a:r>
-              <a:rPr sz="3200" spc="120" dirty="0">
-                <a:solidFill>
-                  <a:srgbClr val="32BD15"/>
-                </a:solidFill>
-                <a:latin typeface="Arial MT"/>
-                <a:cs typeface="Arial MT"/>
-              </a:rPr>
-              <a:t> </a:t>
-            </a:r>
-            <a:r>
-              <a:rPr sz="3200" spc="-10" dirty="0">
-                <a:solidFill>
-                  <a:srgbClr val="32BD15"/>
-                </a:solidFill>
-                <a:latin typeface="Arial MT"/>
-                <a:cs typeface="Arial MT"/>
-              </a:rPr>
-              <a:t>values</a:t>
-            </a:r>
-            <a:endParaRPr sz="3200" dirty="0">
-              <a:latin typeface="Arial MT"/>
-              <a:cs typeface="Arial MT"/>
-            </a:endParaRPr>
-          </a:p>
-          <a:p>
-            <a:pPr marL="12700" marR="2601595" indent="62865">
-              <a:lnSpc>
-                <a:spcPct val="248200"/>
-              </a:lnSpc>
-              <a:tabLst>
-                <a:tab pos="2972435" algn="l"/>
-                <a:tab pos="3717290" algn="l"/>
-              </a:tabLst>
-            </a:pPr>
-            <a:r>
-              <a:rPr sz="3200" spc="-60" dirty="0">
-                <a:solidFill>
-                  <a:srgbClr val="FFFFFF"/>
-                </a:solidFill>
-                <a:latin typeface="Arial MT"/>
-                <a:cs typeface="Arial MT"/>
-              </a:rPr>
-              <a:t>myDict.</a:t>
-            </a:r>
-            <a:r>
-              <a:rPr sz="3200" b="1" spc="-60" dirty="0">
-                <a:solidFill>
-                  <a:srgbClr val="3BE2EC"/>
-                </a:solidFill>
-                <a:latin typeface="Arial"/>
-                <a:cs typeface="Arial"/>
-              </a:rPr>
-              <a:t>items</a:t>
-            </a:r>
-            <a:r>
-              <a:rPr sz="3200" b="1" spc="-60" dirty="0">
-                <a:solidFill>
-                  <a:srgbClr val="FFFFFF"/>
-                </a:solidFill>
-                <a:latin typeface="Arial"/>
-                <a:cs typeface="Arial"/>
-              </a:rPr>
-              <a:t>(</a:t>
-            </a:r>
-            <a:r>
-              <a:rPr sz="3200" b="1" spc="-95" dirty="0">
-                <a:solidFill>
-                  <a:srgbClr val="FFFFFF"/>
-                </a:solidFill>
-                <a:latin typeface="Arial"/>
-                <a:cs typeface="Arial"/>
-              </a:rPr>
-              <a:t> </a:t>
-            </a:r>
-            <a:r>
-              <a:rPr sz="3200" b="1" spc="-50" dirty="0">
-                <a:solidFill>
-                  <a:srgbClr val="FFFFFF"/>
-                </a:solidFill>
-                <a:latin typeface="Arial"/>
-                <a:cs typeface="Arial"/>
-              </a:rPr>
-              <a:t>)</a:t>
-            </a:r>
-            <a:r>
-              <a:rPr sz="3200" b="1" dirty="0">
-                <a:solidFill>
-                  <a:srgbClr val="FFFFFF"/>
-                </a:solidFill>
-                <a:latin typeface="Arial"/>
-                <a:cs typeface="Arial"/>
-              </a:rPr>
-              <a:t>	</a:t>
-            </a:r>
-            <a:r>
-              <a:rPr sz="3200" dirty="0">
-                <a:solidFill>
-                  <a:srgbClr val="32BD15"/>
-                </a:solidFill>
-                <a:latin typeface="Arial MT"/>
-                <a:cs typeface="Arial MT"/>
-              </a:rPr>
-              <a:t>#returns</a:t>
-            </a:r>
-            <a:r>
-              <a:rPr sz="3200" spc="-85" dirty="0">
-                <a:solidFill>
-                  <a:srgbClr val="32BD15"/>
-                </a:solidFill>
-                <a:latin typeface="Arial MT"/>
-                <a:cs typeface="Arial MT"/>
-              </a:rPr>
-              <a:t> </a:t>
-            </a:r>
-            <a:r>
-              <a:rPr sz="3200" dirty="0">
-                <a:solidFill>
-                  <a:srgbClr val="32BD15"/>
-                </a:solidFill>
-                <a:latin typeface="Arial MT"/>
-                <a:cs typeface="Arial MT"/>
-              </a:rPr>
-              <a:t>all</a:t>
-            </a:r>
-            <a:r>
-              <a:rPr sz="3200" spc="-60" dirty="0">
-                <a:solidFill>
-                  <a:srgbClr val="32BD15"/>
-                </a:solidFill>
-                <a:latin typeface="Arial MT"/>
-                <a:cs typeface="Arial MT"/>
-              </a:rPr>
-              <a:t> </a:t>
-            </a:r>
-            <a:r>
-              <a:rPr sz="3200" i="1" spc="-30" dirty="0">
-                <a:solidFill>
-                  <a:srgbClr val="FFFFFF"/>
-                </a:solidFill>
-                <a:latin typeface="Arial"/>
-                <a:cs typeface="Arial"/>
-              </a:rPr>
-              <a:t>(key,</a:t>
-            </a:r>
-            <a:r>
-              <a:rPr sz="3200" i="1" spc="-50" dirty="0">
-                <a:solidFill>
-                  <a:srgbClr val="FFFFFF"/>
-                </a:solidFill>
-                <a:latin typeface="Arial"/>
-                <a:cs typeface="Arial"/>
-              </a:rPr>
-              <a:t> </a:t>
-            </a:r>
-            <a:r>
-              <a:rPr sz="3200" i="1" spc="-20" dirty="0">
-                <a:solidFill>
-                  <a:srgbClr val="FFFFFF"/>
-                </a:solidFill>
-                <a:latin typeface="Arial"/>
-                <a:cs typeface="Arial"/>
-              </a:rPr>
-              <a:t>val)</a:t>
-            </a:r>
-            <a:r>
-              <a:rPr sz="3200" i="1" spc="-65" dirty="0">
-                <a:solidFill>
-                  <a:srgbClr val="FFFFFF"/>
-                </a:solidFill>
-                <a:latin typeface="Arial"/>
-                <a:cs typeface="Arial"/>
-              </a:rPr>
-              <a:t> </a:t>
-            </a:r>
-            <a:r>
-              <a:rPr sz="3200" spc="-20" dirty="0">
-                <a:solidFill>
-                  <a:srgbClr val="32BD15"/>
-                </a:solidFill>
-                <a:latin typeface="Arial MT"/>
-                <a:cs typeface="Arial MT"/>
-              </a:rPr>
-              <a:t>pairs</a:t>
-            </a:r>
-            <a:r>
-              <a:rPr sz="3200" spc="-60" dirty="0">
-                <a:solidFill>
-                  <a:srgbClr val="32BD15"/>
-                </a:solidFill>
-                <a:latin typeface="Arial MT"/>
-                <a:cs typeface="Arial MT"/>
-              </a:rPr>
-              <a:t> </a:t>
-            </a:r>
-            <a:r>
-              <a:rPr sz="3200" spc="-225" dirty="0">
-                <a:solidFill>
-                  <a:srgbClr val="32BD15"/>
-                </a:solidFill>
-                <a:latin typeface="Arial MT"/>
-                <a:cs typeface="Arial MT"/>
-              </a:rPr>
-              <a:t>as</a:t>
-            </a:r>
-            <a:r>
-              <a:rPr sz="3200" spc="-45" dirty="0">
-                <a:solidFill>
-                  <a:srgbClr val="32BD15"/>
-                </a:solidFill>
-                <a:latin typeface="Arial MT"/>
-                <a:cs typeface="Arial MT"/>
-              </a:rPr>
-              <a:t> </a:t>
-            </a:r>
-            <a:r>
-              <a:rPr sz="3200" spc="-10" dirty="0">
-                <a:solidFill>
-                  <a:srgbClr val="32BD15"/>
-                </a:solidFill>
-                <a:latin typeface="Arial MT"/>
-                <a:cs typeface="Arial MT"/>
-              </a:rPr>
-              <a:t>tuples </a:t>
-            </a:r>
-            <a:r>
-              <a:rPr sz="3200" spc="-35" dirty="0">
-                <a:solidFill>
-                  <a:srgbClr val="FFFFFF"/>
-                </a:solidFill>
-                <a:latin typeface="Arial MT"/>
-                <a:cs typeface="Arial MT"/>
-              </a:rPr>
-              <a:t>myDict.</a:t>
-            </a:r>
-            <a:r>
-              <a:rPr sz="3200" b="1" spc="-35" dirty="0">
-                <a:solidFill>
-                  <a:srgbClr val="3BE2EC"/>
-                </a:solidFill>
-                <a:latin typeface="Arial"/>
-                <a:cs typeface="Arial"/>
-              </a:rPr>
-              <a:t>get</a:t>
-            </a:r>
-            <a:r>
-              <a:rPr sz="3200" b="1" spc="-35" dirty="0">
-                <a:solidFill>
-                  <a:srgbClr val="FFFFFF"/>
-                </a:solidFill>
-                <a:latin typeface="Arial"/>
-                <a:cs typeface="Arial"/>
-              </a:rPr>
-              <a:t>(</a:t>
-            </a:r>
-            <a:r>
-              <a:rPr sz="3200" b="1" spc="-90" dirty="0">
-                <a:solidFill>
-                  <a:srgbClr val="FFFFFF"/>
-                </a:solidFill>
-                <a:latin typeface="Arial"/>
-                <a:cs typeface="Arial"/>
-              </a:rPr>
-              <a:t> </a:t>
-            </a:r>
-            <a:r>
-              <a:rPr sz="3200" spc="100" dirty="0">
-                <a:solidFill>
-                  <a:srgbClr val="FFFFFF"/>
-                </a:solidFill>
-                <a:latin typeface="Arial MT"/>
-                <a:cs typeface="Arial MT"/>
-              </a:rPr>
-              <a:t>“key““</a:t>
-            </a:r>
-            <a:r>
-              <a:rPr sz="3200" spc="-160" dirty="0">
-                <a:solidFill>
-                  <a:srgbClr val="FFFFFF"/>
-                </a:solidFill>
-                <a:latin typeface="Arial MT"/>
-                <a:cs typeface="Arial MT"/>
-              </a:rPr>
-              <a:t> </a:t>
-            </a:r>
-            <a:r>
-              <a:rPr sz="3200" b="1" spc="-50" dirty="0">
-                <a:solidFill>
-                  <a:srgbClr val="FFFFFF"/>
-                </a:solidFill>
-                <a:latin typeface="Arial"/>
-                <a:cs typeface="Arial"/>
-              </a:rPr>
-              <a:t>)</a:t>
-            </a:r>
-            <a:r>
-              <a:rPr sz="3200" b="1" dirty="0">
-                <a:solidFill>
-                  <a:srgbClr val="FFFFFF"/>
-                </a:solidFill>
-                <a:latin typeface="Arial"/>
-                <a:cs typeface="Arial"/>
-              </a:rPr>
-              <a:t>	</a:t>
-            </a:r>
-            <a:r>
-              <a:rPr sz="3200" dirty="0">
-                <a:solidFill>
-                  <a:srgbClr val="32BD15"/>
-                </a:solidFill>
-                <a:latin typeface="Arial MT"/>
-                <a:cs typeface="Arial MT"/>
-              </a:rPr>
-              <a:t>#returns</a:t>
-            </a:r>
-            <a:r>
-              <a:rPr sz="3200" spc="-35" dirty="0">
-                <a:solidFill>
-                  <a:srgbClr val="32BD15"/>
-                </a:solidFill>
-                <a:latin typeface="Arial MT"/>
-                <a:cs typeface="Arial MT"/>
-              </a:rPr>
-              <a:t> </a:t>
-            </a:r>
-            <a:r>
-              <a:rPr sz="3200" dirty="0">
-                <a:solidFill>
-                  <a:srgbClr val="32BD15"/>
-                </a:solidFill>
-                <a:latin typeface="Arial MT"/>
-                <a:cs typeface="Arial MT"/>
-              </a:rPr>
-              <a:t>the</a:t>
-            </a:r>
-            <a:r>
-              <a:rPr sz="3200" spc="-35" dirty="0">
-                <a:solidFill>
-                  <a:srgbClr val="32BD15"/>
-                </a:solidFill>
-                <a:latin typeface="Arial MT"/>
-                <a:cs typeface="Arial MT"/>
-              </a:rPr>
-              <a:t> </a:t>
-            </a:r>
-            <a:r>
-              <a:rPr sz="3200" spc="-30" dirty="0">
-                <a:solidFill>
-                  <a:srgbClr val="32BD15"/>
-                </a:solidFill>
-                <a:latin typeface="Arial MT"/>
-                <a:cs typeface="Arial MT"/>
-              </a:rPr>
-              <a:t>key </a:t>
-            </a:r>
-            <a:r>
-              <a:rPr sz="3200" spc="-35" dirty="0">
-                <a:solidFill>
-                  <a:srgbClr val="32BD15"/>
-                </a:solidFill>
-                <a:latin typeface="Arial MT"/>
-                <a:cs typeface="Arial MT"/>
-              </a:rPr>
-              <a:t>according </a:t>
-            </a:r>
-            <a:r>
-              <a:rPr sz="3200" spc="55" dirty="0">
-                <a:solidFill>
-                  <a:srgbClr val="32BD15"/>
-                </a:solidFill>
-                <a:latin typeface="Arial MT"/>
-                <a:cs typeface="Arial MT"/>
-              </a:rPr>
-              <a:t>to</a:t>
-            </a:r>
-            <a:r>
-              <a:rPr sz="3200" spc="-30" dirty="0">
-                <a:solidFill>
-                  <a:srgbClr val="32BD15"/>
-                </a:solidFill>
-                <a:latin typeface="Arial MT"/>
-                <a:cs typeface="Arial MT"/>
-              </a:rPr>
-              <a:t> </a:t>
-            </a:r>
-            <a:r>
-              <a:rPr sz="3200" spc="-35" dirty="0">
-                <a:solidFill>
-                  <a:srgbClr val="32BD15"/>
-                </a:solidFill>
-                <a:latin typeface="Arial MT"/>
-                <a:cs typeface="Arial MT"/>
-              </a:rPr>
-              <a:t>value</a:t>
-            </a:r>
-            <a:endParaRPr sz="3200" dirty="0">
-              <a:latin typeface="Arial MT"/>
-              <a:cs typeface="Arial MT"/>
-            </a:endParaRPr>
-          </a:p>
-          <a:p>
-            <a:pPr>
-              <a:lnSpc>
-                <a:spcPct val="100000"/>
-              </a:lnSpc>
-              <a:spcBef>
-                <a:spcPts val="2005"/>
-              </a:spcBef>
-            </a:pPr>
-            <a:endParaRPr sz="3200" dirty="0">
-              <a:latin typeface="Arial MT"/>
-              <a:cs typeface="Arial MT"/>
-            </a:endParaRPr>
-          </a:p>
-          <a:p>
-            <a:pPr marL="75565">
-              <a:lnSpc>
-                <a:spcPct val="100000"/>
-              </a:lnSpc>
-              <a:spcBef>
-                <a:spcPts val="5"/>
-              </a:spcBef>
-              <a:tabLst>
-                <a:tab pos="4757420" algn="l"/>
-              </a:tabLst>
-            </a:pPr>
-            <a:r>
-              <a:rPr sz="3200" spc="-55" dirty="0">
-                <a:solidFill>
-                  <a:srgbClr val="FFFFFF"/>
-                </a:solidFill>
-                <a:latin typeface="Arial MT"/>
-                <a:cs typeface="Arial MT"/>
-              </a:rPr>
-              <a:t>myDict.</a:t>
-            </a:r>
-            <a:r>
-              <a:rPr sz="3200" b="1" spc="-55" dirty="0">
-                <a:solidFill>
-                  <a:srgbClr val="3BE2EC"/>
-                </a:solidFill>
-                <a:latin typeface="Arial"/>
-                <a:cs typeface="Arial"/>
-              </a:rPr>
-              <a:t>update</a:t>
-            </a:r>
-            <a:r>
-              <a:rPr sz="3200" b="1" spc="-55" dirty="0">
-                <a:solidFill>
-                  <a:srgbClr val="FFFFFF"/>
-                </a:solidFill>
-                <a:latin typeface="Arial"/>
-                <a:cs typeface="Arial"/>
-              </a:rPr>
-              <a:t>(</a:t>
-            </a:r>
-            <a:r>
-              <a:rPr sz="3200" b="1" spc="-130" dirty="0">
-                <a:solidFill>
-                  <a:srgbClr val="FFFFFF"/>
-                </a:solidFill>
-                <a:latin typeface="Arial"/>
-                <a:cs typeface="Arial"/>
-              </a:rPr>
-              <a:t> </a:t>
-            </a:r>
-            <a:r>
-              <a:rPr sz="3200" spc="-40" dirty="0">
-                <a:solidFill>
-                  <a:srgbClr val="FFFFFF"/>
-                </a:solidFill>
-                <a:latin typeface="Arial MT"/>
-                <a:cs typeface="Arial MT"/>
-              </a:rPr>
-              <a:t>newDict</a:t>
-            </a:r>
-            <a:r>
-              <a:rPr sz="3200" spc="-120" dirty="0">
-                <a:solidFill>
-                  <a:srgbClr val="FFFFFF"/>
-                </a:solidFill>
-                <a:latin typeface="Arial MT"/>
-                <a:cs typeface="Arial MT"/>
-              </a:rPr>
-              <a:t> </a:t>
-            </a:r>
-            <a:r>
-              <a:rPr sz="3200" b="1" spc="-50" dirty="0">
-                <a:solidFill>
-                  <a:srgbClr val="FFFFFF"/>
-                </a:solidFill>
-                <a:latin typeface="Arial"/>
-                <a:cs typeface="Arial"/>
-              </a:rPr>
-              <a:t>)</a:t>
-            </a:r>
-            <a:r>
-              <a:rPr sz="3200" b="1" dirty="0">
-                <a:solidFill>
-                  <a:srgbClr val="FFFFFF"/>
-                </a:solidFill>
-                <a:latin typeface="Arial"/>
-                <a:cs typeface="Arial"/>
-              </a:rPr>
-              <a:t>	</a:t>
-            </a:r>
-            <a:r>
-              <a:rPr sz="3200" dirty="0">
-                <a:solidFill>
-                  <a:srgbClr val="32BD15"/>
-                </a:solidFill>
-                <a:latin typeface="Arial MT"/>
-                <a:cs typeface="Arial MT"/>
-              </a:rPr>
-              <a:t>#inserts</a:t>
-            </a:r>
-            <a:r>
-              <a:rPr sz="3200" spc="-100" dirty="0">
-                <a:solidFill>
-                  <a:srgbClr val="32BD15"/>
-                </a:solidFill>
-                <a:latin typeface="Arial MT"/>
-                <a:cs typeface="Arial MT"/>
-              </a:rPr>
-              <a:t> </a:t>
-            </a:r>
-            <a:r>
-              <a:rPr sz="3200" dirty="0">
-                <a:solidFill>
-                  <a:srgbClr val="32BD15"/>
-                </a:solidFill>
-                <a:latin typeface="Arial MT"/>
-                <a:cs typeface="Arial MT"/>
-              </a:rPr>
-              <a:t>the</a:t>
-            </a:r>
-            <a:r>
-              <a:rPr sz="3200" spc="-100" dirty="0">
-                <a:solidFill>
-                  <a:srgbClr val="32BD15"/>
-                </a:solidFill>
-                <a:latin typeface="Arial MT"/>
-                <a:cs typeface="Arial MT"/>
-              </a:rPr>
-              <a:t> </a:t>
-            </a:r>
-            <a:r>
-              <a:rPr sz="3200" spc="-40" dirty="0">
-                <a:solidFill>
-                  <a:srgbClr val="32BD15"/>
-                </a:solidFill>
-                <a:latin typeface="Arial MT"/>
-                <a:cs typeface="Arial MT"/>
-              </a:rPr>
-              <a:t>specified</a:t>
-            </a:r>
-            <a:r>
-              <a:rPr sz="3200" spc="-95" dirty="0">
-                <a:solidFill>
-                  <a:srgbClr val="32BD15"/>
-                </a:solidFill>
-                <a:latin typeface="Arial MT"/>
-                <a:cs typeface="Arial MT"/>
-              </a:rPr>
-              <a:t> </a:t>
-            </a:r>
-            <a:r>
-              <a:rPr sz="3200" spc="-25" dirty="0">
-                <a:solidFill>
-                  <a:srgbClr val="32BD15"/>
-                </a:solidFill>
-                <a:latin typeface="Arial MT"/>
-                <a:cs typeface="Arial MT"/>
-              </a:rPr>
-              <a:t>items</a:t>
-            </a:r>
-            <a:r>
-              <a:rPr sz="3200" spc="-100" dirty="0">
-                <a:solidFill>
-                  <a:srgbClr val="32BD15"/>
-                </a:solidFill>
-                <a:latin typeface="Arial MT"/>
-                <a:cs typeface="Arial MT"/>
-              </a:rPr>
-              <a:t> </a:t>
-            </a:r>
-            <a:r>
-              <a:rPr sz="3200" spc="55" dirty="0">
-                <a:solidFill>
-                  <a:srgbClr val="32BD15"/>
-                </a:solidFill>
-                <a:latin typeface="Arial MT"/>
-                <a:cs typeface="Arial MT"/>
-              </a:rPr>
-              <a:t>to</a:t>
-            </a:r>
-            <a:r>
-              <a:rPr sz="3200" spc="-100" dirty="0">
-                <a:solidFill>
-                  <a:srgbClr val="32BD15"/>
-                </a:solidFill>
-                <a:latin typeface="Arial MT"/>
-                <a:cs typeface="Arial MT"/>
-              </a:rPr>
-              <a:t> </a:t>
-            </a:r>
-            <a:r>
-              <a:rPr sz="3200" dirty="0">
-                <a:solidFill>
-                  <a:srgbClr val="32BD15"/>
-                </a:solidFill>
-                <a:latin typeface="Arial MT"/>
-                <a:cs typeface="Arial MT"/>
-              </a:rPr>
-              <a:t>the</a:t>
-            </a:r>
-            <a:r>
-              <a:rPr sz="3200" spc="-95" dirty="0">
-                <a:solidFill>
-                  <a:srgbClr val="32BD15"/>
-                </a:solidFill>
-                <a:latin typeface="Arial MT"/>
-                <a:cs typeface="Arial MT"/>
-              </a:rPr>
-              <a:t> </a:t>
-            </a:r>
-            <a:r>
-              <a:rPr sz="3200" spc="-10" dirty="0">
-                <a:solidFill>
-                  <a:srgbClr val="32BD15"/>
-                </a:solidFill>
-                <a:latin typeface="Arial MT"/>
-                <a:cs typeface="Arial MT"/>
-              </a:rPr>
-              <a:t>dictionary</a:t>
-            </a:r>
-            <a:endParaRPr sz="3200" dirty="0">
-              <a:latin typeface="Arial MT"/>
-              <a:cs typeface="Arial MT"/>
-            </a:endParaRPr>
-          </a:p>
-        </p:txBody>
-      </p:sp>
-    </p:spTree>
-  </p:cSld>
-  <p:clrMapOvr>
-    <a:masterClrMapping/>
-  </p:clrMapOvr>
-  <p:transition spd="med">
-    <p:pull/>
-  </p:transition>
-</p:sld>
-</file>
-
-<file path=ppt/slides/slide7.xml><?xml version="1.0" encoding="utf-8"?>
-<p:sld xmlns:a="http://schemas.openxmlformats.org/drawingml/2006/main" xmlns:r="http://schemas.openxmlformats.org/officeDocument/2006/relationships" xmlns:p="http://schemas.openxmlformats.org/presentationml/2006/main">
-  <p:cSld>
-    <p:spTree>
-      <p:nvGrpSpPr>
-        <p:cNvPr id="1" name=""/>
-        <p:cNvGrpSpPr/>
-        <p:nvPr/>
-      </p:nvGrpSpPr>
-      <p:grpSpPr>
-        <a:xfrm>
-          <a:off x="0" y="0"/>
-          <a:ext cx="0" cy="0"/>
-          <a:chOff x="0" y="0"/>
-          <a:chExt cx="0" cy="0"/>
-        </a:xfrm>
-      </p:grpSpPr>
-      <p:sp>
-        <p:nvSpPr>
-          <p:cNvPr id="2" name="Title 1">
+      <p:pic>
+        <p:nvPicPr>
+          <p:cNvPr id="3" name="Picture 2">
             <a:extLst>
               <a:ext uri="{FF2B5EF4-FFF2-40B4-BE49-F238E27FC236}">
-                <a16:creationId xmlns:a16="http://schemas.microsoft.com/office/drawing/2014/main" id="{D6B6F1A2-1212-CAC1-7792-BE0997E74BCC}"/>
-              </a:ext>
-            </a:extLst>
-          </p:cNvPr>
-          <p:cNvSpPr>
-            <a:spLocks noGrp="1"/>
-          </p:cNvSpPr>
-          <p:nvPr>
-            <p:ph type="title"/>
-          </p:nvPr>
-        </p:nvSpPr>
-        <p:spPr/>
-        <p:txBody>
-          <a:bodyPr/>
-          <a:lstStyle/>
-          <a:p>
-            <a:r>
-              <a:rPr lang="en-US" spc="-114" dirty="0">
-                <a:solidFill>
-                  <a:srgbClr val="FFFFFF"/>
-                </a:solidFill>
-              </a:rPr>
-              <a:t>Dictionary</a:t>
-            </a:r>
-            <a:r>
-              <a:rPr lang="en-US" spc="-360" dirty="0">
-                <a:solidFill>
-                  <a:srgbClr val="FFFFFF"/>
-                </a:solidFill>
-              </a:rPr>
-              <a:t> </a:t>
-            </a:r>
-            <a:r>
-              <a:rPr lang="en-US" spc="-65" dirty="0"/>
-              <a:t>Methods</a:t>
-            </a:r>
-            <a:endParaRPr lang="en-US" dirty="0"/>
-          </a:p>
-        </p:txBody>
-      </p:sp>
-      <p:pic>
-        <p:nvPicPr>
-          <p:cNvPr id="5" name="Picture 4" descr="A screenshot of a computer program&#10;&#10;AI-generated content may be incorrect.">
-            <a:extLst>
-              <a:ext uri="{FF2B5EF4-FFF2-40B4-BE49-F238E27FC236}">
-                <a16:creationId xmlns:a16="http://schemas.microsoft.com/office/drawing/2014/main" id="{72FBB29C-EDDC-589A-C13A-AEFF782B072D}"/>
+                <a16:creationId xmlns:a16="http://schemas.microsoft.com/office/drawing/2014/main" id="{CE3DC5D9-20F3-831F-90A6-1D389F750A75}"/>
               </a:ext>
             </a:extLst>
           </p:cNvPr>
@@ -8493,15 +10590,14 @@
               </a:ext>
             </a:extLst>
           </a:blip>
-          <a:srcRect l="6560" t="11008" r="5251" b="6499"/>
           <a:stretch>
             <a:fillRect/>
           </a:stretch>
         </p:blipFill>
         <p:spPr>
           <a:xfrm>
-            <a:off x="6786224" y="494581"/>
-            <a:ext cx="10638694" cy="9791700"/>
+            <a:off x="3810000" y="265069"/>
+            <a:ext cx="12039600" cy="9756862"/>
           </a:xfrm>
           <a:prstGeom prst="rect">
             <a:avLst/>
@@ -8511,7 +10607,82 @@
     </p:spTree>
     <p:extLst>
       <p:ext uri="{BB962C8B-B14F-4D97-AF65-F5344CB8AC3E}">
-        <p14:creationId xmlns:p14="http://schemas.microsoft.com/office/powerpoint/2010/main" val="816274206"/>
+        <p14:creationId xmlns:p14="http://schemas.microsoft.com/office/powerpoint/2010/main" val="4171316245"/>
+      </p:ext>
+    </p:extLst>
+  </p:cSld>
+  <p:clrMapOvr>
+    <a:masterClrMapping/>
+  </p:clrMapOvr>
+  <p:transition spd="med">
+    <p:pull/>
+  </p:transition>
+</p:sld>
+</file>
+
+<file path=ppt/slides/slide7.xml><?xml version="1.0" encoding="utf-8"?>
+<p:sld xmlns:a="http://schemas.openxmlformats.org/drawingml/2006/main" xmlns:r="http://schemas.openxmlformats.org/officeDocument/2006/relationships" xmlns:p="http://schemas.openxmlformats.org/presentationml/2006/main">
+  <p:cSld>
+    <p:spTree>
+      <p:nvGrpSpPr>
+        <p:cNvPr id="1" name="">
+          <a:extLst>
+            <a:ext uri="{FF2B5EF4-FFF2-40B4-BE49-F238E27FC236}">
+              <a16:creationId xmlns:a16="http://schemas.microsoft.com/office/drawing/2014/main" id="{B2141C9A-0A41-B894-5770-06403F1FFE05}"/>
+            </a:ext>
+          </a:extLst>
+        </p:cNvPr>
+        <p:cNvGrpSpPr/>
+        <p:nvPr/>
+      </p:nvGrpSpPr>
+      <p:grpSpPr>
+        <a:xfrm>
+          <a:off x="0" y="0"/>
+          <a:ext cx="0" cy="0"/>
+          <a:chOff x="0" y="0"/>
+          <a:chExt cx="0" cy="0"/>
+        </a:xfrm>
+      </p:grpSpPr>
+      <p:pic>
+        <p:nvPicPr>
+          <p:cNvPr id="4" name="Picture 3">
+            <a:extLst>
+              <a:ext uri="{FF2B5EF4-FFF2-40B4-BE49-F238E27FC236}">
+                <a16:creationId xmlns:a16="http://schemas.microsoft.com/office/drawing/2014/main" id="{FD36F229-46D6-656D-3182-07378B6EBFA2}"/>
+              </a:ext>
+            </a:extLst>
+          </p:cNvPr>
+          <p:cNvPicPr>
+            <a:picLocks noChangeAspect="1"/>
+          </p:cNvPicPr>
+          <p:nvPr/>
+        </p:nvPicPr>
+        <p:blipFill>
+          <a:blip r:embed="rId2">
+            <a:extLst>
+              <a:ext uri="{28A0092B-C50C-407E-A947-70E740481C1C}">
+                <a14:useLocalDpi xmlns:a14="http://schemas.microsoft.com/office/drawing/2010/main" val="0"/>
+              </a:ext>
+            </a:extLst>
+          </a:blip>
+          <a:stretch>
+            <a:fillRect/>
+          </a:stretch>
+        </p:blipFill>
+        <p:spPr>
+          <a:xfrm>
+            <a:off x="1848479" y="985837"/>
+            <a:ext cx="14591042" cy="8315325"/>
+          </a:xfrm>
+          <a:prstGeom prst="rect">
+            <a:avLst/>
+          </a:prstGeom>
+        </p:spPr>
+      </p:pic>
+    </p:spTree>
+    <p:extLst>
+      <p:ext uri="{BB962C8B-B14F-4D97-AF65-F5344CB8AC3E}">
+        <p14:creationId xmlns:p14="http://schemas.microsoft.com/office/powerpoint/2010/main" val="2421346653"/>
       </p:ext>
     </p:extLst>
   </p:cSld>
@@ -8529,7 +10700,13 @@
   <p:cSld>
     <p:spTree>
       <p:nvGrpSpPr>
-        <p:cNvPr id="1" name=""/>
+        <p:cNvPr id="1" name="">
+          <a:extLst>
+            <a:ext uri="{FF2B5EF4-FFF2-40B4-BE49-F238E27FC236}">
+              <a16:creationId xmlns:a16="http://schemas.microsoft.com/office/drawing/2014/main" id="{1CD2D55A-1B72-AE4C-B187-48D782EB21DE}"/>
+            </a:ext>
+          </a:extLst>
+        </p:cNvPr>
         <p:cNvGrpSpPr/>
         <p:nvPr/>
       </p:nvGrpSpPr>
@@ -8541,1269 +10718,48 @@
           <a:chExt cx="0" cy="0"/>
         </a:xfrm>
       </p:grpSpPr>
-      <p:sp>
-        <p:nvSpPr>
-          <p:cNvPr id="2" name="object 2"/>
-          <p:cNvSpPr txBox="1">
-            <a:spLocks noGrp="1"/>
-          </p:cNvSpPr>
-          <p:nvPr>
-            <p:ph type="title"/>
-          </p:nvPr>
-        </p:nvSpPr>
-        <p:spPr>
-          <a:prstGeom prst="rect">
-            <a:avLst/>
-          </a:prstGeom>
-        </p:spPr>
-        <p:txBody>
-          <a:bodyPr vert="horz" wrap="square" lIns="0" tIns="12700" rIns="0" bIns="0" rtlCol="0">
-            <a:spAutoFit/>
-          </a:bodyPr>
-          <a:lstStyle/>
-          <a:p>
-            <a:pPr marL="12700">
-              <a:lnSpc>
-                <a:spcPct val="100000"/>
-              </a:lnSpc>
-              <a:spcBef>
-                <a:spcPts val="100"/>
-              </a:spcBef>
-            </a:pPr>
-            <a:r>
-              <a:rPr spc="-114" dirty="0"/>
-              <a:t>Set</a:t>
-            </a:r>
-            <a:r>
-              <a:rPr spc="-335" dirty="0"/>
-              <a:t> </a:t>
-            </a:r>
-            <a:r>
-              <a:rPr dirty="0">
-                <a:solidFill>
-                  <a:srgbClr val="FFFFFF"/>
-                </a:solidFill>
-              </a:rPr>
-              <a:t>in</a:t>
-            </a:r>
-            <a:r>
-              <a:rPr spc="-330" dirty="0">
-                <a:solidFill>
-                  <a:srgbClr val="FFFFFF"/>
-                </a:solidFill>
-              </a:rPr>
-              <a:t> </a:t>
-            </a:r>
-            <a:r>
-              <a:rPr spc="-114" dirty="0">
-                <a:solidFill>
-                  <a:srgbClr val="FFFFFF"/>
-                </a:solidFill>
-              </a:rPr>
-              <a:t>Python</a:t>
-            </a:r>
-          </a:p>
-        </p:txBody>
-      </p:sp>
-      <p:sp>
-        <p:nvSpPr>
-          <p:cNvPr id="3" name="object 3"/>
-          <p:cNvSpPr txBox="1"/>
+      <p:pic>
+        <p:nvPicPr>
+          <p:cNvPr id="3" name="Picture 2">
+            <a:extLst>
+              <a:ext uri="{FF2B5EF4-FFF2-40B4-BE49-F238E27FC236}">
+                <a16:creationId xmlns:a16="http://schemas.microsoft.com/office/drawing/2014/main" id="{2DCFBF4B-66F1-E4A2-32BC-0AFBF5FC5A5C}"/>
+              </a:ext>
+            </a:extLst>
+          </p:cNvPr>
+          <p:cNvPicPr>
+            <a:picLocks noChangeAspect="1"/>
+          </p:cNvPicPr>
           <p:nvPr/>
-        </p:nvSpPr>
+        </p:nvPicPr>
+        <p:blipFill>
+          <a:blip r:embed="rId2">
+            <a:extLst>
+              <a:ext uri="{28A0092B-C50C-407E-A947-70E740481C1C}">
+                <a14:useLocalDpi xmlns:a14="http://schemas.microsoft.com/office/drawing/2010/main" val="0"/>
+              </a:ext>
+            </a:extLst>
+          </a:blip>
+          <a:stretch>
+            <a:fillRect/>
+          </a:stretch>
+        </p:blipFill>
         <p:spPr>
           <a:xfrm>
-            <a:off x="1016000" y="7572712"/>
-            <a:ext cx="2738120" cy="513080"/>
+            <a:off x="1980933" y="758505"/>
+            <a:ext cx="14326133" cy="8769990"/>
           </a:xfrm>
           <a:prstGeom prst="rect">
             <a:avLst/>
           </a:prstGeom>
         </p:spPr>
-        <p:txBody>
-          <a:bodyPr vert="horz" wrap="square" lIns="0" tIns="12700" rIns="0" bIns="0" rtlCol="0">
-            <a:spAutoFit/>
-          </a:bodyPr>
-          <a:lstStyle/>
-          <a:p>
-            <a:pPr marL="12700">
-              <a:lnSpc>
-                <a:spcPct val="100000"/>
-              </a:lnSpc>
-              <a:spcBef>
-                <a:spcPts val="100"/>
-              </a:spcBef>
-            </a:pPr>
-            <a:r>
-              <a:rPr sz="3200" dirty="0">
-                <a:solidFill>
-                  <a:srgbClr val="FFFFFF"/>
-                </a:solidFill>
-                <a:latin typeface="Arial MT"/>
-                <a:cs typeface="Arial MT"/>
-              </a:rPr>
-              <a:t>null_set</a:t>
-            </a:r>
-            <a:r>
-              <a:rPr sz="3200" spc="-70" dirty="0">
-                <a:solidFill>
-                  <a:srgbClr val="FFFFFF"/>
-                </a:solidFill>
-                <a:latin typeface="Arial MT"/>
-                <a:cs typeface="Arial MT"/>
-              </a:rPr>
-              <a:t> </a:t>
-            </a:r>
-            <a:r>
-              <a:rPr sz="3200" spc="90" dirty="0">
-                <a:solidFill>
-                  <a:srgbClr val="FFFFFF"/>
-                </a:solidFill>
-                <a:latin typeface="Arial MT"/>
-                <a:cs typeface="Arial MT"/>
-              </a:rPr>
-              <a:t>=</a:t>
-            </a:r>
-            <a:r>
-              <a:rPr sz="3200" spc="-70" dirty="0">
-                <a:solidFill>
-                  <a:srgbClr val="FFFFFF"/>
-                </a:solidFill>
-                <a:latin typeface="Arial MT"/>
-                <a:cs typeface="Arial MT"/>
-              </a:rPr>
-              <a:t> </a:t>
-            </a:r>
-            <a:r>
-              <a:rPr sz="3200" spc="-105" dirty="0">
-                <a:solidFill>
-                  <a:srgbClr val="FFFFFF"/>
-                </a:solidFill>
-                <a:latin typeface="Arial MT"/>
-                <a:cs typeface="Arial MT"/>
-              </a:rPr>
-              <a:t>set(</a:t>
-            </a:r>
-            <a:r>
-              <a:rPr sz="3200" spc="-70" dirty="0">
-                <a:solidFill>
-                  <a:srgbClr val="FFFFFF"/>
-                </a:solidFill>
-                <a:latin typeface="Arial MT"/>
-                <a:cs typeface="Arial MT"/>
-              </a:rPr>
-              <a:t> </a:t>
-            </a:r>
-            <a:r>
-              <a:rPr sz="3200" spc="-50" dirty="0">
-                <a:solidFill>
-                  <a:srgbClr val="FFFFFF"/>
-                </a:solidFill>
-                <a:latin typeface="Arial MT"/>
-                <a:cs typeface="Arial MT"/>
-              </a:rPr>
-              <a:t>)</a:t>
-            </a:r>
-            <a:endParaRPr sz="3200">
-              <a:latin typeface="Arial MT"/>
-              <a:cs typeface="Arial MT"/>
-            </a:endParaRPr>
-          </a:p>
-        </p:txBody>
-      </p:sp>
-      <p:sp>
-        <p:nvSpPr>
-          <p:cNvPr id="4" name="object 4"/>
-          <p:cNvSpPr txBox="1"/>
-          <p:nvPr/>
-        </p:nvSpPr>
-        <p:spPr>
-          <a:xfrm>
-            <a:off x="4621817" y="7572712"/>
-            <a:ext cx="3224530" cy="513080"/>
-          </a:xfrm>
-          <a:prstGeom prst="rect">
-            <a:avLst/>
-          </a:prstGeom>
-        </p:spPr>
-        <p:txBody>
-          <a:bodyPr vert="horz" wrap="square" lIns="0" tIns="12700" rIns="0" bIns="0" rtlCol="0">
-            <a:spAutoFit/>
-          </a:bodyPr>
-          <a:lstStyle/>
-          <a:p>
-            <a:pPr marL="12700">
-              <a:lnSpc>
-                <a:spcPct val="100000"/>
-              </a:lnSpc>
-              <a:spcBef>
-                <a:spcPts val="100"/>
-              </a:spcBef>
-            </a:pPr>
-            <a:r>
-              <a:rPr sz="3200" dirty="0">
-                <a:solidFill>
-                  <a:srgbClr val="32BD15"/>
-                </a:solidFill>
-                <a:latin typeface="Arial MT"/>
-                <a:cs typeface="Arial MT"/>
-              </a:rPr>
-              <a:t>#empty</a:t>
-            </a:r>
-            <a:r>
-              <a:rPr sz="3200" spc="-10" dirty="0">
-                <a:solidFill>
-                  <a:srgbClr val="32BD15"/>
-                </a:solidFill>
-                <a:latin typeface="Arial MT"/>
-                <a:cs typeface="Arial MT"/>
-              </a:rPr>
-              <a:t> </a:t>
-            </a:r>
-            <a:r>
-              <a:rPr sz="3200" spc="-45" dirty="0">
-                <a:solidFill>
-                  <a:srgbClr val="32BD15"/>
-                </a:solidFill>
-                <a:latin typeface="Arial MT"/>
-                <a:cs typeface="Arial MT"/>
-              </a:rPr>
-              <a:t>set</a:t>
-            </a:r>
-            <a:r>
-              <a:rPr sz="3200" spc="-10" dirty="0">
-                <a:solidFill>
-                  <a:srgbClr val="32BD15"/>
-                </a:solidFill>
-                <a:latin typeface="Arial MT"/>
-                <a:cs typeface="Arial MT"/>
-              </a:rPr>
-              <a:t> </a:t>
-            </a:r>
-            <a:r>
-              <a:rPr sz="3200" spc="-65" dirty="0">
-                <a:solidFill>
-                  <a:srgbClr val="32BD15"/>
-                </a:solidFill>
-                <a:latin typeface="Arial MT"/>
-                <a:cs typeface="Arial MT"/>
-              </a:rPr>
-              <a:t>syntax</a:t>
-            </a:r>
-            <a:endParaRPr sz="3200">
-              <a:latin typeface="Arial MT"/>
-              <a:cs typeface="Arial MT"/>
-            </a:endParaRPr>
-          </a:p>
-        </p:txBody>
-      </p:sp>
-      <p:sp>
-        <p:nvSpPr>
-          <p:cNvPr id="5" name="object 5"/>
-          <p:cNvSpPr/>
-          <p:nvPr/>
-        </p:nvSpPr>
-        <p:spPr>
-          <a:xfrm>
-            <a:off x="989578" y="1844188"/>
-            <a:ext cx="3766185" cy="24130"/>
-          </a:xfrm>
-          <a:custGeom>
-            <a:avLst/>
-            <a:gdLst/>
-            <a:ahLst/>
-            <a:cxnLst/>
-            <a:rect l="l" t="t" r="r" b="b"/>
-            <a:pathLst>
-              <a:path w="3766185" h="24130">
-                <a:moveTo>
-                  <a:pt x="0" y="23515"/>
-                </a:moveTo>
-                <a:lnTo>
-                  <a:pt x="3765702" y="0"/>
-                </a:lnTo>
-              </a:path>
-            </a:pathLst>
-          </a:custGeom>
-          <a:ln w="47625">
-            <a:solidFill>
-              <a:srgbClr val="FFFFFF"/>
-            </a:solidFill>
-          </a:ln>
-        </p:spPr>
-        <p:txBody>
-          <a:bodyPr wrap="square" lIns="0" tIns="0" rIns="0" bIns="0" rtlCol="0"/>
-          <a:lstStyle/>
-          <a:p>
-            <a:endParaRPr/>
-          </a:p>
-        </p:txBody>
-      </p:sp>
-      <p:sp>
-        <p:nvSpPr>
-          <p:cNvPr id="6" name="object 6"/>
-          <p:cNvSpPr txBox="1"/>
-          <p:nvPr/>
-        </p:nvSpPr>
-        <p:spPr>
-          <a:xfrm>
-            <a:off x="953066" y="2048136"/>
-            <a:ext cx="10615930" cy="4633595"/>
-          </a:xfrm>
-          <a:prstGeom prst="rect">
-            <a:avLst/>
-          </a:prstGeom>
-        </p:spPr>
-        <p:txBody>
-          <a:bodyPr vert="horz" wrap="square" lIns="0" tIns="210820" rIns="0" bIns="0" rtlCol="0">
-            <a:spAutoFit/>
-          </a:bodyPr>
-          <a:lstStyle/>
-          <a:p>
-            <a:pPr marL="12700">
-              <a:lnSpc>
-                <a:spcPct val="100000"/>
-              </a:lnSpc>
-              <a:spcBef>
-                <a:spcPts val="1660"/>
-              </a:spcBef>
-            </a:pPr>
-            <a:r>
-              <a:rPr sz="3200" spc="-75" dirty="0">
-                <a:solidFill>
-                  <a:srgbClr val="FFFFFF"/>
-                </a:solidFill>
-                <a:latin typeface="Tahoma"/>
-                <a:cs typeface="Tahoma"/>
-              </a:rPr>
-              <a:t>Set</a:t>
-            </a:r>
-            <a:r>
-              <a:rPr sz="3200" spc="-200" dirty="0">
-                <a:solidFill>
-                  <a:srgbClr val="FFFFFF"/>
-                </a:solidFill>
-                <a:latin typeface="Tahoma"/>
-                <a:cs typeface="Tahoma"/>
-              </a:rPr>
-              <a:t> </a:t>
-            </a:r>
-            <a:r>
-              <a:rPr sz="3200" spc="55" dirty="0">
-                <a:solidFill>
-                  <a:srgbClr val="FFFFFF"/>
-                </a:solidFill>
-                <a:latin typeface="Tahoma"/>
-                <a:cs typeface="Tahoma"/>
-              </a:rPr>
-              <a:t>is</a:t>
-            </a:r>
-            <a:r>
-              <a:rPr sz="3200" spc="-200" dirty="0">
-                <a:solidFill>
-                  <a:srgbClr val="FFFFFF"/>
-                </a:solidFill>
-                <a:latin typeface="Tahoma"/>
-                <a:cs typeface="Tahoma"/>
-              </a:rPr>
-              <a:t> </a:t>
-            </a:r>
-            <a:r>
-              <a:rPr sz="3200" spc="-70" dirty="0">
-                <a:solidFill>
-                  <a:srgbClr val="FFFFFF"/>
-                </a:solidFill>
-                <a:latin typeface="Tahoma"/>
-                <a:cs typeface="Tahoma"/>
-              </a:rPr>
-              <a:t>the</a:t>
-            </a:r>
-            <a:r>
-              <a:rPr sz="3200" spc="-195" dirty="0">
-                <a:solidFill>
-                  <a:srgbClr val="FFFFFF"/>
-                </a:solidFill>
-                <a:latin typeface="Tahoma"/>
-                <a:cs typeface="Tahoma"/>
-              </a:rPr>
-              <a:t> </a:t>
-            </a:r>
-            <a:r>
-              <a:rPr sz="3200" spc="-45" dirty="0">
-                <a:solidFill>
-                  <a:srgbClr val="FFFFFF"/>
-                </a:solidFill>
-                <a:latin typeface="Tahoma"/>
-                <a:cs typeface="Tahoma"/>
-              </a:rPr>
-              <a:t>collection</a:t>
-            </a:r>
-            <a:r>
-              <a:rPr sz="3200" spc="-200" dirty="0">
-                <a:solidFill>
-                  <a:srgbClr val="FFFFFF"/>
-                </a:solidFill>
-                <a:latin typeface="Tahoma"/>
-                <a:cs typeface="Tahoma"/>
-              </a:rPr>
-              <a:t> </a:t>
-            </a:r>
-            <a:r>
-              <a:rPr sz="3200" spc="-70" dirty="0">
-                <a:solidFill>
-                  <a:srgbClr val="FFFFFF"/>
-                </a:solidFill>
-                <a:latin typeface="Tahoma"/>
-                <a:cs typeface="Tahoma"/>
-              </a:rPr>
-              <a:t>of</a:t>
-            </a:r>
-            <a:r>
-              <a:rPr sz="3200" spc="-200" dirty="0">
-                <a:solidFill>
-                  <a:srgbClr val="FFFFFF"/>
-                </a:solidFill>
-                <a:latin typeface="Tahoma"/>
-                <a:cs typeface="Tahoma"/>
-              </a:rPr>
-              <a:t> </a:t>
-            </a:r>
-            <a:r>
-              <a:rPr sz="3200" spc="-70" dirty="0">
-                <a:solidFill>
-                  <a:srgbClr val="FFFFFF"/>
-                </a:solidFill>
-                <a:latin typeface="Tahoma"/>
-                <a:cs typeface="Tahoma"/>
-              </a:rPr>
-              <a:t>the</a:t>
-            </a:r>
-            <a:r>
-              <a:rPr sz="3200" spc="-195" dirty="0">
-                <a:solidFill>
-                  <a:srgbClr val="FFFFFF"/>
-                </a:solidFill>
-                <a:latin typeface="Tahoma"/>
-                <a:cs typeface="Tahoma"/>
-              </a:rPr>
-              <a:t> </a:t>
-            </a:r>
-            <a:r>
-              <a:rPr sz="3200" spc="-80" dirty="0">
-                <a:solidFill>
-                  <a:srgbClr val="FFFFFF"/>
-                </a:solidFill>
-                <a:latin typeface="Tahoma"/>
-                <a:cs typeface="Tahoma"/>
-              </a:rPr>
-              <a:t>unordered</a:t>
-            </a:r>
-            <a:r>
-              <a:rPr sz="3200" spc="-200" dirty="0">
-                <a:solidFill>
-                  <a:srgbClr val="FFFFFF"/>
-                </a:solidFill>
-                <a:latin typeface="Tahoma"/>
-                <a:cs typeface="Tahoma"/>
-              </a:rPr>
-              <a:t> </a:t>
-            </a:r>
-            <a:r>
-              <a:rPr sz="3200" spc="-10" dirty="0">
-                <a:solidFill>
-                  <a:srgbClr val="FFFFFF"/>
-                </a:solidFill>
-                <a:latin typeface="Tahoma"/>
-                <a:cs typeface="Tahoma"/>
-              </a:rPr>
-              <a:t>items.</a:t>
-            </a:r>
-            <a:endParaRPr sz="3200">
-              <a:latin typeface="Tahoma"/>
-              <a:cs typeface="Tahoma"/>
-            </a:endParaRPr>
-          </a:p>
-          <a:p>
-            <a:pPr marL="12700">
-              <a:lnSpc>
-                <a:spcPct val="100000"/>
-              </a:lnSpc>
-              <a:spcBef>
-                <a:spcPts val="1560"/>
-              </a:spcBef>
-            </a:pPr>
-            <a:r>
-              <a:rPr sz="3200" spc="-150" dirty="0">
-                <a:solidFill>
-                  <a:srgbClr val="FFFFFF"/>
-                </a:solidFill>
-                <a:latin typeface="Tahoma"/>
-                <a:cs typeface="Tahoma"/>
-              </a:rPr>
-              <a:t>Each</a:t>
-            </a:r>
-            <a:r>
-              <a:rPr sz="3200" spc="-204" dirty="0">
-                <a:solidFill>
-                  <a:srgbClr val="FFFFFF"/>
-                </a:solidFill>
-                <a:latin typeface="Tahoma"/>
-                <a:cs typeface="Tahoma"/>
-              </a:rPr>
-              <a:t> </a:t>
-            </a:r>
-            <a:r>
-              <a:rPr sz="3200" spc="-120" dirty="0">
-                <a:solidFill>
-                  <a:srgbClr val="FFFFFF"/>
-                </a:solidFill>
-                <a:latin typeface="Tahoma"/>
-                <a:cs typeface="Tahoma"/>
-              </a:rPr>
-              <a:t>element</a:t>
-            </a:r>
-            <a:r>
-              <a:rPr sz="3200" spc="-200" dirty="0">
-                <a:solidFill>
-                  <a:srgbClr val="FFFFFF"/>
-                </a:solidFill>
-                <a:latin typeface="Tahoma"/>
-                <a:cs typeface="Tahoma"/>
-              </a:rPr>
-              <a:t> </a:t>
-            </a:r>
-            <a:r>
-              <a:rPr sz="3200" dirty="0">
-                <a:solidFill>
-                  <a:srgbClr val="FFFFFF"/>
-                </a:solidFill>
-                <a:latin typeface="Tahoma"/>
-                <a:cs typeface="Tahoma"/>
-              </a:rPr>
-              <a:t>in</a:t>
-            </a:r>
-            <a:r>
-              <a:rPr sz="3200" spc="-204" dirty="0">
-                <a:solidFill>
-                  <a:srgbClr val="FFFFFF"/>
-                </a:solidFill>
-                <a:latin typeface="Tahoma"/>
-                <a:cs typeface="Tahoma"/>
-              </a:rPr>
-              <a:t> </a:t>
-            </a:r>
-            <a:r>
-              <a:rPr sz="3200" spc="-70" dirty="0">
-                <a:solidFill>
-                  <a:srgbClr val="FFFFFF"/>
-                </a:solidFill>
-                <a:latin typeface="Tahoma"/>
-                <a:cs typeface="Tahoma"/>
-              </a:rPr>
-              <a:t>the</a:t>
-            </a:r>
-            <a:r>
-              <a:rPr sz="3200" spc="-200" dirty="0">
-                <a:solidFill>
-                  <a:srgbClr val="FFFFFF"/>
-                </a:solidFill>
-                <a:latin typeface="Tahoma"/>
-                <a:cs typeface="Tahoma"/>
-              </a:rPr>
-              <a:t> </a:t>
-            </a:r>
-            <a:r>
-              <a:rPr sz="3200" spc="-45" dirty="0">
-                <a:solidFill>
-                  <a:srgbClr val="FFFFFF"/>
-                </a:solidFill>
-                <a:latin typeface="Tahoma"/>
-                <a:cs typeface="Tahoma"/>
-              </a:rPr>
-              <a:t>set</a:t>
-            </a:r>
-            <a:r>
-              <a:rPr sz="3200" spc="-200" dirty="0">
-                <a:solidFill>
-                  <a:srgbClr val="FFFFFF"/>
-                </a:solidFill>
-                <a:latin typeface="Tahoma"/>
-                <a:cs typeface="Tahoma"/>
-              </a:rPr>
-              <a:t> </a:t>
-            </a:r>
-            <a:r>
-              <a:rPr sz="3200" spc="-95" dirty="0">
-                <a:solidFill>
-                  <a:srgbClr val="FFFFFF"/>
-                </a:solidFill>
-                <a:latin typeface="Tahoma"/>
-                <a:cs typeface="Tahoma"/>
-              </a:rPr>
-              <a:t>must</a:t>
-            </a:r>
-            <a:r>
-              <a:rPr sz="3200" spc="-204" dirty="0">
-                <a:solidFill>
-                  <a:srgbClr val="FFFFFF"/>
-                </a:solidFill>
-                <a:latin typeface="Tahoma"/>
-                <a:cs typeface="Tahoma"/>
-              </a:rPr>
-              <a:t> </a:t>
-            </a:r>
-            <a:r>
-              <a:rPr sz="3200" spc="-165" dirty="0">
-                <a:solidFill>
-                  <a:srgbClr val="FFFFFF"/>
-                </a:solidFill>
-                <a:latin typeface="Tahoma"/>
-                <a:cs typeface="Tahoma"/>
-              </a:rPr>
-              <a:t>be</a:t>
-            </a:r>
-            <a:r>
-              <a:rPr sz="3200" spc="-200" dirty="0">
-                <a:solidFill>
-                  <a:srgbClr val="FFFFFF"/>
-                </a:solidFill>
-                <a:latin typeface="Tahoma"/>
-                <a:cs typeface="Tahoma"/>
-              </a:rPr>
-              <a:t> </a:t>
-            </a:r>
-            <a:r>
-              <a:rPr sz="3200" spc="-90" dirty="0">
-                <a:solidFill>
-                  <a:srgbClr val="FFFFFF"/>
-                </a:solidFill>
-                <a:latin typeface="Tahoma"/>
-                <a:cs typeface="Tahoma"/>
-              </a:rPr>
-              <a:t>unique</a:t>
-            </a:r>
-            <a:r>
-              <a:rPr sz="3200" spc="-200" dirty="0">
-                <a:solidFill>
-                  <a:srgbClr val="FFFFFF"/>
-                </a:solidFill>
-                <a:latin typeface="Tahoma"/>
-                <a:cs typeface="Tahoma"/>
-              </a:rPr>
-              <a:t> </a:t>
-            </a:r>
-            <a:r>
-              <a:rPr sz="3200" spc="-180" dirty="0">
-                <a:solidFill>
-                  <a:srgbClr val="FFFFFF"/>
-                </a:solidFill>
-                <a:latin typeface="Tahoma"/>
-                <a:cs typeface="Tahoma"/>
-              </a:rPr>
-              <a:t>&amp;</a:t>
-            </a:r>
-            <a:r>
-              <a:rPr sz="3200" spc="-204" dirty="0">
-                <a:solidFill>
-                  <a:srgbClr val="FFFFFF"/>
-                </a:solidFill>
-                <a:latin typeface="Tahoma"/>
-                <a:cs typeface="Tahoma"/>
-              </a:rPr>
-              <a:t> </a:t>
-            </a:r>
-            <a:r>
-              <a:rPr sz="3200" spc="-10" dirty="0">
-                <a:solidFill>
-                  <a:srgbClr val="FFFFFF"/>
-                </a:solidFill>
-                <a:latin typeface="Tahoma"/>
-                <a:cs typeface="Tahoma"/>
-              </a:rPr>
-              <a:t>immutable.</a:t>
-            </a:r>
-            <a:endParaRPr sz="3200">
-              <a:latin typeface="Tahoma"/>
-              <a:cs typeface="Tahoma"/>
-            </a:endParaRPr>
-          </a:p>
-          <a:p>
-            <a:pPr>
-              <a:lnSpc>
-                <a:spcPct val="100000"/>
-              </a:lnSpc>
-            </a:pPr>
-            <a:endParaRPr sz="3200">
-              <a:latin typeface="Tahoma"/>
-              <a:cs typeface="Tahoma"/>
-            </a:endParaRPr>
-          </a:p>
-          <a:p>
-            <a:pPr>
-              <a:lnSpc>
-                <a:spcPct val="100000"/>
-              </a:lnSpc>
-              <a:spcBef>
-                <a:spcPts val="1255"/>
-              </a:spcBef>
-            </a:pPr>
-            <a:endParaRPr sz="3200">
-              <a:latin typeface="Tahoma"/>
-              <a:cs typeface="Tahoma"/>
-            </a:endParaRPr>
-          </a:p>
-          <a:p>
-            <a:pPr marL="12700">
-              <a:lnSpc>
-                <a:spcPct val="100000"/>
-              </a:lnSpc>
-            </a:pPr>
-            <a:r>
-              <a:rPr sz="3200" spc="-65" dirty="0">
-                <a:solidFill>
-                  <a:srgbClr val="FFFFFF"/>
-                </a:solidFill>
-                <a:latin typeface="Arial MT"/>
-                <a:cs typeface="Arial MT"/>
-              </a:rPr>
-              <a:t>nums</a:t>
-            </a:r>
-            <a:r>
-              <a:rPr sz="3200" spc="-40" dirty="0">
-                <a:solidFill>
-                  <a:srgbClr val="FFFFFF"/>
-                </a:solidFill>
-                <a:latin typeface="Arial MT"/>
-                <a:cs typeface="Arial MT"/>
-              </a:rPr>
-              <a:t> </a:t>
-            </a:r>
-            <a:r>
-              <a:rPr sz="3200" spc="90" dirty="0">
-                <a:solidFill>
-                  <a:srgbClr val="FFFFFF"/>
-                </a:solidFill>
-                <a:latin typeface="Arial MT"/>
-                <a:cs typeface="Arial MT"/>
-              </a:rPr>
-              <a:t>=</a:t>
-            </a:r>
-            <a:r>
-              <a:rPr sz="3200" spc="-40" dirty="0">
-                <a:solidFill>
-                  <a:srgbClr val="FFFFFF"/>
-                </a:solidFill>
-                <a:latin typeface="Arial MT"/>
-                <a:cs typeface="Arial MT"/>
-              </a:rPr>
-              <a:t> </a:t>
-            </a:r>
-            <a:r>
-              <a:rPr sz="3200" dirty="0">
-                <a:solidFill>
-                  <a:srgbClr val="FFFFFF"/>
-                </a:solidFill>
-                <a:latin typeface="Arial MT"/>
-                <a:cs typeface="Arial MT"/>
-              </a:rPr>
-              <a:t>{</a:t>
-            </a:r>
-            <a:r>
-              <a:rPr sz="3200" spc="-35" dirty="0">
-                <a:solidFill>
-                  <a:srgbClr val="FFFFFF"/>
-                </a:solidFill>
-                <a:latin typeface="Arial MT"/>
-                <a:cs typeface="Arial MT"/>
-              </a:rPr>
-              <a:t> </a:t>
-            </a:r>
-            <a:r>
-              <a:rPr sz="3200" dirty="0">
-                <a:solidFill>
-                  <a:srgbClr val="FFFFFF"/>
-                </a:solidFill>
-                <a:latin typeface="Arial MT"/>
-                <a:cs typeface="Arial MT"/>
-              </a:rPr>
-              <a:t>1,</a:t>
-            </a:r>
-            <a:r>
-              <a:rPr sz="3200" spc="-40" dirty="0">
-                <a:solidFill>
-                  <a:srgbClr val="FFFFFF"/>
-                </a:solidFill>
-                <a:latin typeface="Arial MT"/>
-                <a:cs typeface="Arial MT"/>
-              </a:rPr>
-              <a:t> </a:t>
-            </a:r>
-            <a:r>
-              <a:rPr sz="3200" dirty="0">
-                <a:solidFill>
-                  <a:srgbClr val="FFFFFF"/>
-                </a:solidFill>
-                <a:latin typeface="Arial MT"/>
-                <a:cs typeface="Arial MT"/>
-              </a:rPr>
-              <a:t>2,</a:t>
-            </a:r>
-            <a:r>
-              <a:rPr sz="3200" spc="-35" dirty="0">
-                <a:solidFill>
-                  <a:srgbClr val="FFFFFF"/>
-                </a:solidFill>
-                <a:latin typeface="Arial MT"/>
-                <a:cs typeface="Arial MT"/>
-              </a:rPr>
-              <a:t> </a:t>
-            </a:r>
-            <a:r>
-              <a:rPr sz="3200" dirty="0">
-                <a:solidFill>
-                  <a:srgbClr val="FFFFFF"/>
-                </a:solidFill>
-                <a:latin typeface="Arial MT"/>
-                <a:cs typeface="Arial MT"/>
-              </a:rPr>
-              <a:t>3,</a:t>
-            </a:r>
-            <a:r>
-              <a:rPr sz="3200" spc="-40" dirty="0">
-                <a:solidFill>
-                  <a:srgbClr val="FFFFFF"/>
-                </a:solidFill>
-                <a:latin typeface="Arial MT"/>
-                <a:cs typeface="Arial MT"/>
-              </a:rPr>
-              <a:t> </a:t>
-            </a:r>
-            <a:r>
-              <a:rPr sz="3200" dirty="0">
-                <a:solidFill>
-                  <a:srgbClr val="FFFFFF"/>
-                </a:solidFill>
-                <a:latin typeface="Arial MT"/>
-                <a:cs typeface="Arial MT"/>
-              </a:rPr>
-              <a:t>4</a:t>
-            </a:r>
-            <a:r>
-              <a:rPr sz="3200" spc="-35" dirty="0">
-                <a:solidFill>
-                  <a:srgbClr val="FFFFFF"/>
-                </a:solidFill>
-                <a:latin typeface="Arial MT"/>
-                <a:cs typeface="Arial MT"/>
-              </a:rPr>
-              <a:t> </a:t>
-            </a:r>
-            <a:r>
-              <a:rPr sz="3200" spc="-50" dirty="0">
-                <a:solidFill>
-                  <a:srgbClr val="FFFFFF"/>
-                </a:solidFill>
-                <a:latin typeface="Arial MT"/>
-                <a:cs typeface="Arial MT"/>
-              </a:rPr>
-              <a:t>}</a:t>
-            </a:r>
-            <a:endParaRPr sz="3200">
-              <a:latin typeface="Arial MT"/>
-              <a:cs typeface="Arial MT"/>
-            </a:endParaRPr>
-          </a:p>
-          <a:p>
-            <a:pPr marL="12700">
-              <a:lnSpc>
-                <a:spcPct val="100000"/>
-              </a:lnSpc>
-              <a:spcBef>
-                <a:spcPts val="3440"/>
-              </a:spcBef>
-            </a:pPr>
-            <a:r>
-              <a:rPr sz="3200" spc="-35" dirty="0">
-                <a:solidFill>
-                  <a:srgbClr val="FFFFFF"/>
-                </a:solidFill>
-                <a:latin typeface="Arial MT"/>
-                <a:cs typeface="Arial MT"/>
-              </a:rPr>
-              <a:t>set2</a:t>
-            </a:r>
-            <a:r>
-              <a:rPr sz="3200" spc="-40" dirty="0">
-                <a:solidFill>
-                  <a:srgbClr val="FFFFFF"/>
-                </a:solidFill>
-                <a:latin typeface="Arial MT"/>
-                <a:cs typeface="Arial MT"/>
-              </a:rPr>
-              <a:t> </a:t>
-            </a:r>
-            <a:r>
-              <a:rPr sz="3200" spc="90" dirty="0">
-                <a:solidFill>
-                  <a:srgbClr val="FFFFFF"/>
-                </a:solidFill>
-                <a:latin typeface="Arial MT"/>
-                <a:cs typeface="Arial MT"/>
-              </a:rPr>
-              <a:t>=</a:t>
-            </a:r>
-            <a:r>
-              <a:rPr sz="3200" spc="-40" dirty="0">
-                <a:solidFill>
-                  <a:srgbClr val="FFFFFF"/>
-                </a:solidFill>
-                <a:latin typeface="Arial MT"/>
-                <a:cs typeface="Arial MT"/>
-              </a:rPr>
-              <a:t> </a:t>
-            </a:r>
-            <a:r>
-              <a:rPr sz="3200" dirty="0">
-                <a:solidFill>
-                  <a:srgbClr val="FFFFFF"/>
-                </a:solidFill>
-                <a:latin typeface="Arial MT"/>
-                <a:cs typeface="Arial MT"/>
-              </a:rPr>
-              <a:t>{</a:t>
-            </a:r>
-            <a:r>
-              <a:rPr sz="3200" spc="-40" dirty="0">
-                <a:solidFill>
-                  <a:srgbClr val="FFFFFF"/>
-                </a:solidFill>
-                <a:latin typeface="Arial MT"/>
-                <a:cs typeface="Arial MT"/>
-              </a:rPr>
-              <a:t> </a:t>
-            </a:r>
-            <a:r>
-              <a:rPr sz="3200" dirty="0">
-                <a:solidFill>
-                  <a:srgbClr val="FFFFFF"/>
-                </a:solidFill>
-                <a:latin typeface="Arial MT"/>
-                <a:cs typeface="Arial MT"/>
-              </a:rPr>
-              <a:t>1,</a:t>
-            </a:r>
-            <a:r>
-              <a:rPr sz="3200" spc="-35" dirty="0">
-                <a:solidFill>
-                  <a:srgbClr val="FFFFFF"/>
-                </a:solidFill>
-                <a:latin typeface="Arial MT"/>
-                <a:cs typeface="Arial MT"/>
-              </a:rPr>
-              <a:t> </a:t>
-            </a:r>
-            <a:r>
-              <a:rPr sz="3200" dirty="0">
-                <a:solidFill>
-                  <a:srgbClr val="FFFFFF"/>
-                </a:solidFill>
-                <a:latin typeface="Arial MT"/>
-                <a:cs typeface="Arial MT"/>
-              </a:rPr>
-              <a:t>2,</a:t>
-            </a:r>
-            <a:r>
-              <a:rPr sz="3200" spc="-40" dirty="0">
-                <a:solidFill>
-                  <a:srgbClr val="FFFFFF"/>
-                </a:solidFill>
-                <a:latin typeface="Arial MT"/>
-                <a:cs typeface="Arial MT"/>
-              </a:rPr>
-              <a:t> </a:t>
-            </a:r>
-            <a:r>
-              <a:rPr sz="3200" dirty="0">
-                <a:solidFill>
-                  <a:srgbClr val="FFFFFF"/>
-                </a:solidFill>
-                <a:latin typeface="Arial MT"/>
-                <a:cs typeface="Arial MT"/>
-              </a:rPr>
-              <a:t>2,</a:t>
-            </a:r>
-            <a:r>
-              <a:rPr sz="3200" spc="-40" dirty="0">
-                <a:solidFill>
-                  <a:srgbClr val="FFFFFF"/>
-                </a:solidFill>
-                <a:latin typeface="Arial MT"/>
-                <a:cs typeface="Arial MT"/>
-              </a:rPr>
-              <a:t> </a:t>
-            </a:r>
-            <a:r>
-              <a:rPr sz="3200" dirty="0">
-                <a:solidFill>
-                  <a:srgbClr val="FFFFFF"/>
-                </a:solidFill>
-                <a:latin typeface="Arial MT"/>
-                <a:cs typeface="Arial MT"/>
-              </a:rPr>
-              <a:t>2</a:t>
-            </a:r>
-            <a:r>
-              <a:rPr sz="3200" spc="-35" dirty="0">
-                <a:solidFill>
-                  <a:srgbClr val="FFFFFF"/>
-                </a:solidFill>
-                <a:latin typeface="Arial MT"/>
-                <a:cs typeface="Arial MT"/>
-              </a:rPr>
-              <a:t> </a:t>
-            </a:r>
-            <a:r>
-              <a:rPr sz="3200" spc="-50" dirty="0">
-                <a:solidFill>
-                  <a:srgbClr val="FFFFFF"/>
-                </a:solidFill>
-                <a:latin typeface="Arial MT"/>
-                <a:cs typeface="Arial MT"/>
-              </a:rPr>
-              <a:t>}</a:t>
-            </a:r>
-            <a:endParaRPr sz="3200">
-              <a:latin typeface="Arial MT"/>
-              <a:cs typeface="Arial MT"/>
-            </a:endParaRPr>
-          </a:p>
-          <a:p>
-            <a:pPr marL="12700">
-              <a:lnSpc>
-                <a:spcPct val="100000"/>
-              </a:lnSpc>
-              <a:spcBef>
-                <a:spcPts val="1540"/>
-              </a:spcBef>
-            </a:pPr>
-            <a:r>
-              <a:rPr sz="3200" dirty="0">
-                <a:solidFill>
-                  <a:srgbClr val="32BD15"/>
-                </a:solidFill>
-                <a:latin typeface="Arial MT"/>
-                <a:cs typeface="Arial MT"/>
-              </a:rPr>
-              <a:t>#repeated</a:t>
-            </a:r>
-            <a:r>
-              <a:rPr sz="3200" spc="-125" dirty="0">
-                <a:solidFill>
-                  <a:srgbClr val="32BD15"/>
-                </a:solidFill>
-                <a:latin typeface="Arial MT"/>
-                <a:cs typeface="Arial MT"/>
-              </a:rPr>
-              <a:t> </a:t>
-            </a:r>
-            <a:r>
-              <a:rPr sz="3200" spc="-60" dirty="0">
-                <a:solidFill>
-                  <a:srgbClr val="32BD15"/>
-                </a:solidFill>
-                <a:latin typeface="Arial MT"/>
-                <a:cs typeface="Arial MT"/>
-              </a:rPr>
-              <a:t>elements</a:t>
-            </a:r>
-            <a:r>
-              <a:rPr sz="3200" spc="-114" dirty="0">
-                <a:solidFill>
-                  <a:srgbClr val="32BD15"/>
-                </a:solidFill>
-                <a:latin typeface="Arial MT"/>
-                <a:cs typeface="Arial MT"/>
-              </a:rPr>
-              <a:t> </a:t>
-            </a:r>
-            <a:r>
-              <a:rPr sz="3200" dirty="0">
-                <a:solidFill>
-                  <a:srgbClr val="32BD15"/>
-                </a:solidFill>
-                <a:latin typeface="Arial MT"/>
-                <a:cs typeface="Arial MT"/>
-              </a:rPr>
-              <a:t>stored</a:t>
-            </a:r>
-            <a:r>
-              <a:rPr sz="3200" spc="-114" dirty="0">
-                <a:solidFill>
-                  <a:srgbClr val="32BD15"/>
-                </a:solidFill>
-                <a:latin typeface="Arial MT"/>
-                <a:cs typeface="Arial MT"/>
-              </a:rPr>
-              <a:t> </a:t>
-            </a:r>
-            <a:r>
-              <a:rPr sz="3200" dirty="0">
-                <a:solidFill>
-                  <a:srgbClr val="32BD15"/>
-                </a:solidFill>
-                <a:latin typeface="Arial MT"/>
-                <a:cs typeface="Arial MT"/>
-              </a:rPr>
-              <a:t>only</a:t>
-            </a:r>
-            <a:r>
-              <a:rPr sz="3200" spc="-110" dirty="0">
-                <a:solidFill>
-                  <a:srgbClr val="32BD15"/>
-                </a:solidFill>
-                <a:latin typeface="Arial MT"/>
-                <a:cs typeface="Arial MT"/>
-              </a:rPr>
-              <a:t> </a:t>
-            </a:r>
-            <a:r>
-              <a:rPr sz="3200" spc="-20" dirty="0">
-                <a:solidFill>
-                  <a:srgbClr val="32BD15"/>
-                </a:solidFill>
-                <a:latin typeface="Arial MT"/>
-                <a:cs typeface="Arial MT"/>
-              </a:rPr>
-              <a:t>once,</a:t>
-            </a:r>
-            <a:r>
-              <a:rPr sz="3200" spc="-114" dirty="0">
-                <a:solidFill>
-                  <a:srgbClr val="32BD15"/>
-                </a:solidFill>
-                <a:latin typeface="Arial MT"/>
-                <a:cs typeface="Arial MT"/>
-              </a:rPr>
-              <a:t> </a:t>
-            </a:r>
-            <a:r>
-              <a:rPr sz="3200" spc="-120" dirty="0">
-                <a:solidFill>
-                  <a:srgbClr val="32BD15"/>
-                </a:solidFill>
-                <a:latin typeface="Arial MT"/>
-                <a:cs typeface="Arial MT"/>
-              </a:rPr>
-              <a:t>so</a:t>
-            </a:r>
-            <a:r>
-              <a:rPr sz="3200" spc="-100" dirty="0">
-                <a:solidFill>
-                  <a:srgbClr val="32BD15"/>
-                </a:solidFill>
-                <a:latin typeface="Arial MT"/>
-                <a:cs typeface="Arial MT"/>
-              </a:rPr>
-              <a:t> </a:t>
-            </a:r>
-            <a:r>
-              <a:rPr sz="3200" spc="100" dirty="0">
-                <a:solidFill>
-                  <a:srgbClr val="32BD15"/>
-                </a:solidFill>
-                <a:latin typeface="Arial MT"/>
-                <a:cs typeface="Arial MT"/>
-              </a:rPr>
-              <a:t>it</a:t>
-            </a:r>
-            <a:r>
-              <a:rPr sz="3200" spc="-114" dirty="0">
-                <a:solidFill>
-                  <a:srgbClr val="32BD15"/>
-                </a:solidFill>
-                <a:latin typeface="Arial MT"/>
-                <a:cs typeface="Arial MT"/>
-              </a:rPr>
-              <a:t> </a:t>
-            </a:r>
-            <a:r>
-              <a:rPr sz="3200" spc="-60" dirty="0">
-                <a:solidFill>
-                  <a:srgbClr val="32BD15"/>
-                </a:solidFill>
-                <a:latin typeface="Arial MT"/>
-                <a:cs typeface="Arial MT"/>
-              </a:rPr>
-              <a:t>resolved</a:t>
-            </a:r>
-            <a:r>
-              <a:rPr sz="3200" spc="-110" dirty="0">
-                <a:solidFill>
-                  <a:srgbClr val="32BD15"/>
-                </a:solidFill>
-                <a:latin typeface="Arial MT"/>
-                <a:cs typeface="Arial MT"/>
-              </a:rPr>
-              <a:t> </a:t>
-            </a:r>
-            <a:r>
-              <a:rPr sz="3200" spc="55" dirty="0">
-                <a:solidFill>
-                  <a:srgbClr val="32BD15"/>
-                </a:solidFill>
-                <a:latin typeface="Arial MT"/>
-                <a:cs typeface="Arial MT"/>
-              </a:rPr>
-              <a:t>to</a:t>
-            </a:r>
-            <a:r>
-              <a:rPr sz="3200" spc="-114" dirty="0">
-                <a:solidFill>
-                  <a:srgbClr val="32BD15"/>
-                </a:solidFill>
-                <a:latin typeface="Arial MT"/>
-                <a:cs typeface="Arial MT"/>
-              </a:rPr>
-              <a:t> </a:t>
-            </a:r>
-            <a:r>
-              <a:rPr sz="3200" dirty="0">
-                <a:solidFill>
-                  <a:srgbClr val="32BD15"/>
-                </a:solidFill>
-                <a:latin typeface="Arial MT"/>
-                <a:cs typeface="Arial MT"/>
-              </a:rPr>
-              <a:t>{1,</a:t>
-            </a:r>
-            <a:r>
-              <a:rPr sz="3200" spc="-110" dirty="0">
-                <a:solidFill>
-                  <a:srgbClr val="32BD15"/>
-                </a:solidFill>
-                <a:latin typeface="Arial MT"/>
-                <a:cs typeface="Arial MT"/>
-              </a:rPr>
-              <a:t> </a:t>
-            </a:r>
-            <a:r>
-              <a:rPr sz="3200" spc="-25" dirty="0">
-                <a:solidFill>
-                  <a:srgbClr val="32BD15"/>
-                </a:solidFill>
-                <a:latin typeface="Arial MT"/>
-                <a:cs typeface="Arial MT"/>
-              </a:rPr>
-              <a:t>2}</a:t>
-            </a:r>
-            <a:endParaRPr sz="3200">
-              <a:latin typeface="Arial MT"/>
-              <a:cs typeface="Arial MT"/>
-            </a:endParaRPr>
-          </a:p>
-        </p:txBody>
-      </p:sp>
+      </p:pic>
     </p:spTree>
+    <p:extLst>
+      <p:ext uri="{BB962C8B-B14F-4D97-AF65-F5344CB8AC3E}">
+        <p14:creationId xmlns:p14="http://schemas.microsoft.com/office/powerpoint/2010/main" val="3859554702"/>
+      </p:ext>
+    </p:extLst>
   </p:cSld>
   <p:clrMapOvr>
     <a:masterClrMapping/>
@@ -9819,7 +10775,13 @@
   <p:cSld>
     <p:spTree>
       <p:nvGrpSpPr>
-        <p:cNvPr id="1" name=""/>
+        <p:cNvPr id="1" name="">
+          <a:extLst>
+            <a:ext uri="{FF2B5EF4-FFF2-40B4-BE49-F238E27FC236}">
+              <a16:creationId xmlns:a16="http://schemas.microsoft.com/office/drawing/2014/main" id="{ED20069B-CB21-5C3C-630F-4DD7F8B741A3}"/>
+            </a:ext>
+          </a:extLst>
+        </p:cNvPr>
         <p:cNvGrpSpPr/>
         <p:nvPr/>
       </p:nvGrpSpPr>
@@ -9831,706 +10793,48 @@
           <a:chExt cx="0" cy="0"/>
         </a:xfrm>
       </p:grpSpPr>
-      <p:sp>
-        <p:nvSpPr>
-          <p:cNvPr id="2" name="object 2"/>
-          <p:cNvSpPr txBox="1">
-            <a:spLocks noGrp="1"/>
-          </p:cNvSpPr>
-          <p:nvPr>
-            <p:ph type="title"/>
-          </p:nvPr>
-        </p:nvSpPr>
-        <p:spPr>
-          <a:prstGeom prst="rect">
-            <a:avLst/>
-          </a:prstGeom>
-        </p:spPr>
-        <p:txBody>
-          <a:bodyPr vert="horz" wrap="square" lIns="0" tIns="12700" rIns="0" bIns="0" rtlCol="0">
-            <a:spAutoFit/>
-          </a:bodyPr>
-          <a:lstStyle/>
-          <a:p>
-            <a:pPr marL="12700">
-              <a:lnSpc>
-                <a:spcPct val="100000"/>
-              </a:lnSpc>
-              <a:spcBef>
-                <a:spcPts val="100"/>
-              </a:spcBef>
-            </a:pPr>
-            <a:r>
-              <a:rPr spc="-114" dirty="0">
-                <a:solidFill>
-                  <a:srgbClr val="FFFFFF"/>
-                </a:solidFill>
-              </a:rPr>
-              <a:t>Set</a:t>
-            </a:r>
-            <a:r>
-              <a:rPr spc="-345" dirty="0">
-                <a:solidFill>
-                  <a:srgbClr val="FFFFFF"/>
-                </a:solidFill>
-              </a:rPr>
-              <a:t> </a:t>
-            </a:r>
-            <a:r>
-              <a:rPr spc="-80" dirty="0"/>
-              <a:t>Methods</a:t>
-            </a:r>
-          </a:p>
-        </p:txBody>
-      </p:sp>
-      <p:sp>
-        <p:nvSpPr>
-          <p:cNvPr id="3" name="object 3"/>
-          <p:cNvSpPr/>
+      <p:pic>
+        <p:nvPicPr>
+          <p:cNvPr id="3" name="Picture 2">
+            <a:extLst>
+              <a:ext uri="{FF2B5EF4-FFF2-40B4-BE49-F238E27FC236}">
+                <a16:creationId xmlns:a16="http://schemas.microsoft.com/office/drawing/2014/main" id="{2630887D-1AEE-CA9C-CDE9-5D01AA638757}"/>
+              </a:ext>
+            </a:extLst>
+          </p:cNvPr>
+          <p:cNvPicPr>
+            <a:picLocks noChangeAspect="1"/>
+          </p:cNvPicPr>
           <p:nvPr/>
-        </p:nvSpPr>
+        </p:nvPicPr>
+        <p:blipFill>
+          <a:blip r:embed="rId2">
+            <a:extLst>
+              <a:ext uri="{28A0092B-C50C-407E-A947-70E740481C1C}">
+                <a14:useLocalDpi xmlns:a14="http://schemas.microsoft.com/office/drawing/2010/main" val="0"/>
+              </a:ext>
+            </a:extLst>
+          </a:blip>
+          <a:stretch>
+            <a:fillRect/>
+          </a:stretch>
+        </p:blipFill>
         <p:spPr>
           <a:xfrm>
-            <a:off x="989578" y="1844194"/>
-            <a:ext cx="3597275" cy="24130"/>
-          </a:xfrm>
-          <a:custGeom>
-            <a:avLst/>
-            <a:gdLst/>
-            <a:ahLst/>
-            <a:cxnLst/>
-            <a:rect l="l" t="t" r="r" b="b"/>
-            <a:pathLst>
-              <a:path w="3597275" h="24130">
-                <a:moveTo>
-                  <a:pt x="0" y="23501"/>
-                </a:moveTo>
-                <a:lnTo>
-                  <a:pt x="3597213" y="0"/>
-                </a:lnTo>
-              </a:path>
-            </a:pathLst>
-          </a:custGeom>
-          <a:ln w="47624">
-            <a:solidFill>
-              <a:srgbClr val="FFFFFF"/>
-            </a:solidFill>
-          </a:ln>
-        </p:spPr>
-        <p:txBody>
-          <a:bodyPr wrap="square" lIns="0" tIns="0" rIns="0" bIns="0" rtlCol="0"/>
-          <a:lstStyle/>
-          <a:p>
-            <a:endParaRPr/>
-          </a:p>
-        </p:txBody>
-      </p:sp>
-      <p:sp>
-        <p:nvSpPr>
-          <p:cNvPr id="4" name="object 4"/>
-          <p:cNvSpPr txBox="1"/>
-          <p:nvPr/>
-        </p:nvSpPr>
-        <p:spPr>
-          <a:xfrm>
-            <a:off x="1016000" y="2505138"/>
-            <a:ext cx="6899275" cy="4376420"/>
+            <a:off x="3886200" y="454414"/>
+            <a:ext cx="11506200" cy="9378172"/>
           </a:xfrm>
           <a:prstGeom prst="rect">
             <a:avLst/>
           </a:prstGeom>
         </p:spPr>
-        <p:txBody>
-          <a:bodyPr vert="horz" wrap="square" lIns="0" tIns="12700" rIns="0" bIns="0" rtlCol="0">
-            <a:spAutoFit/>
-          </a:bodyPr>
-          <a:lstStyle/>
-          <a:p>
-            <a:pPr marL="12700">
-              <a:lnSpc>
-                <a:spcPct val="100000"/>
-              </a:lnSpc>
-              <a:spcBef>
-                <a:spcPts val="100"/>
-              </a:spcBef>
-              <a:tabLst>
-                <a:tab pos="2291080" algn="l"/>
-              </a:tabLst>
-            </a:pPr>
-            <a:r>
-              <a:rPr sz="3200" spc="-85" dirty="0">
-                <a:solidFill>
-                  <a:srgbClr val="FFFFFF"/>
-                </a:solidFill>
-                <a:latin typeface="Arial MT"/>
-                <a:cs typeface="Arial MT"/>
-              </a:rPr>
-              <a:t>set.</a:t>
-            </a:r>
-            <a:r>
-              <a:rPr sz="3200" b="1" spc="-85" dirty="0">
-                <a:solidFill>
-                  <a:srgbClr val="3BE2EC"/>
-                </a:solidFill>
-                <a:latin typeface="Arial"/>
-                <a:cs typeface="Arial"/>
-              </a:rPr>
-              <a:t>add</a:t>
-            </a:r>
-            <a:r>
-              <a:rPr sz="3200" spc="-85" dirty="0">
-                <a:solidFill>
-                  <a:srgbClr val="FFFFFF"/>
-                </a:solidFill>
-                <a:latin typeface="Arial MT"/>
-                <a:cs typeface="Arial MT"/>
-              </a:rPr>
-              <a:t>(</a:t>
-            </a:r>
-            <a:r>
-              <a:rPr sz="3200" spc="-105" dirty="0">
-                <a:solidFill>
-                  <a:srgbClr val="FFFFFF"/>
-                </a:solidFill>
-                <a:latin typeface="Arial MT"/>
-                <a:cs typeface="Arial MT"/>
-              </a:rPr>
-              <a:t> </a:t>
-            </a:r>
-            <a:r>
-              <a:rPr sz="3200" dirty="0">
-                <a:solidFill>
-                  <a:srgbClr val="FFFFFF"/>
-                </a:solidFill>
-                <a:latin typeface="Arial MT"/>
-                <a:cs typeface="Arial MT"/>
-              </a:rPr>
-              <a:t>el</a:t>
-            </a:r>
-            <a:r>
-              <a:rPr sz="3200" spc="-105" dirty="0">
-                <a:solidFill>
-                  <a:srgbClr val="FFFFFF"/>
-                </a:solidFill>
-                <a:latin typeface="Arial MT"/>
-                <a:cs typeface="Arial MT"/>
-              </a:rPr>
-              <a:t> </a:t>
-            </a:r>
-            <a:r>
-              <a:rPr sz="3200" spc="-50" dirty="0">
-                <a:solidFill>
-                  <a:srgbClr val="FFFFFF"/>
-                </a:solidFill>
-                <a:latin typeface="Arial MT"/>
-                <a:cs typeface="Arial MT"/>
-              </a:rPr>
-              <a:t>)</a:t>
-            </a:r>
-            <a:r>
-              <a:rPr sz="3200" dirty="0">
-                <a:solidFill>
-                  <a:srgbClr val="FFFFFF"/>
-                </a:solidFill>
-                <a:latin typeface="Arial MT"/>
-                <a:cs typeface="Arial MT"/>
-              </a:rPr>
-              <a:t>	</a:t>
-            </a:r>
-            <a:r>
-              <a:rPr sz="3200" dirty="0">
-                <a:solidFill>
-                  <a:srgbClr val="32BD15"/>
-                </a:solidFill>
-                <a:latin typeface="Arial MT"/>
-                <a:cs typeface="Arial MT"/>
-              </a:rPr>
-              <a:t>#adds</a:t>
-            </a:r>
-            <a:r>
-              <a:rPr sz="3200" spc="-175" dirty="0">
-                <a:solidFill>
-                  <a:srgbClr val="32BD15"/>
-                </a:solidFill>
-                <a:latin typeface="Arial MT"/>
-                <a:cs typeface="Arial MT"/>
-              </a:rPr>
-              <a:t> </a:t>
-            </a:r>
-            <a:r>
-              <a:rPr sz="3200" spc="-50" dirty="0">
-                <a:solidFill>
-                  <a:srgbClr val="32BD15"/>
-                </a:solidFill>
-                <a:latin typeface="Arial MT"/>
-                <a:cs typeface="Arial MT"/>
-              </a:rPr>
-              <a:t>an</a:t>
-            </a:r>
-            <a:r>
-              <a:rPr sz="3200" spc="-170" dirty="0">
-                <a:solidFill>
-                  <a:srgbClr val="32BD15"/>
-                </a:solidFill>
-                <a:latin typeface="Arial MT"/>
-                <a:cs typeface="Arial MT"/>
-              </a:rPr>
-              <a:t> </a:t>
-            </a:r>
-            <a:r>
-              <a:rPr sz="3200" spc="-10" dirty="0">
-                <a:solidFill>
-                  <a:srgbClr val="32BD15"/>
-                </a:solidFill>
-                <a:latin typeface="Arial MT"/>
-                <a:cs typeface="Arial MT"/>
-              </a:rPr>
-              <a:t>element</a:t>
-            </a:r>
-            <a:endParaRPr sz="3200">
-              <a:latin typeface="Arial MT"/>
-              <a:cs typeface="Arial MT"/>
-            </a:endParaRPr>
-          </a:p>
-          <a:p>
-            <a:pPr marL="12700" marR="5080">
-              <a:lnSpc>
-                <a:spcPct val="264200"/>
-              </a:lnSpc>
-              <a:tabLst>
-                <a:tab pos="2092325" algn="l"/>
-                <a:tab pos="2964180" algn="l"/>
-              </a:tabLst>
-            </a:pPr>
-            <a:r>
-              <a:rPr sz="3200" spc="-105" dirty="0">
-                <a:solidFill>
-                  <a:srgbClr val="FFFFFF"/>
-                </a:solidFill>
-                <a:latin typeface="Arial MT"/>
-                <a:cs typeface="Arial MT"/>
-              </a:rPr>
-              <a:t>set.</a:t>
-            </a:r>
-            <a:r>
-              <a:rPr sz="3200" b="1" spc="-105" dirty="0">
-                <a:solidFill>
-                  <a:srgbClr val="3BE2EC"/>
-                </a:solidFill>
-                <a:latin typeface="Arial"/>
-                <a:cs typeface="Arial"/>
-              </a:rPr>
-              <a:t>remove</a:t>
-            </a:r>
-            <a:r>
-              <a:rPr sz="3200" b="1" spc="-105" dirty="0">
-                <a:solidFill>
-                  <a:srgbClr val="FFFFFF"/>
-                </a:solidFill>
-                <a:latin typeface="Arial"/>
-                <a:cs typeface="Arial"/>
-              </a:rPr>
-              <a:t>(</a:t>
-            </a:r>
-            <a:r>
-              <a:rPr sz="3200" b="1" spc="-70" dirty="0">
-                <a:solidFill>
-                  <a:srgbClr val="FFFFFF"/>
-                </a:solidFill>
-                <a:latin typeface="Arial"/>
-                <a:cs typeface="Arial"/>
-              </a:rPr>
-              <a:t> </a:t>
-            </a:r>
-            <a:r>
-              <a:rPr sz="3200" dirty="0">
-                <a:solidFill>
-                  <a:srgbClr val="FFFFFF"/>
-                </a:solidFill>
-                <a:latin typeface="Arial MT"/>
-                <a:cs typeface="Arial MT"/>
-              </a:rPr>
-              <a:t>el</a:t>
-            </a:r>
-            <a:r>
-              <a:rPr sz="3200" spc="-145" dirty="0">
-                <a:solidFill>
-                  <a:srgbClr val="FFFFFF"/>
-                </a:solidFill>
-                <a:latin typeface="Arial MT"/>
-                <a:cs typeface="Arial MT"/>
-              </a:rPr>
-              <a:t> </a:t>
-            </a:r>
-            <a:r>
-              <a:rPr sz="3200" b="1" spc="-50" dirty="0">
-                <a:solidFill>
-                  <a:srgbClr val="FFFFFF"/>
-                </a:solidFill>
-                <a:latin typeface="Arial"/>
-                <a:cs typeface="Arial"/>
-              </a:rPr>
-              <a:t>)</a:t>
-            </a:r>
-            <a:r>
-              <a:rPr sz="3200" b="1" dirty="0">
-                <a:solidFill>
-                  <a:srgbClr val="FFFFFF"/>
-                </a:solidFill>
-                <a:latin typeface="Arial"/>
-                <a:cs typeface="Arial"/>
-              </a:rPr>
-              <a:t>	</a:t>
-            </a:r>
-            <a:r>
-              <a:rPr sz="3200" spc="-20" dirty="0">
-                <a:solidFill>
-                  <a:srgbClr val="32BD15"/>
-                </a:solidFill>
-                <a:latin typeface="Arial MT"/>
-                <a:cs typeface="Arial MT"/>
-              </a:rPr>
-              <a:t>#removes</a:t>
-            </a:r>
-            <a:r>
-              <a:rPr sz="3200" spc="-135" dirty="0">
-                <a:solidFill>
-                  <a:srgbClr val="32BD15"/>
-                </a:solidFill>
-                <a:latin typeface="Arial MT"/>
-                <a:cs typeface="Arial MT"/>
-              </a:rPr>
-              <a:t> </a:t>
-            </a:r>
-            <a:r>
-              <a:rPr sz="3200" dirty="0">
-                <a:solidFill>
-                  <a:srgbClr val="32BD15"/>
-                </a:solidFill>
-                <a:latin typeface="Arial MT"/>
-                <a:cs typeface="Arial MT"/>
-              </a:rPr>
-              <a:t>the</a:t>
-            </a:r>
-            <a:r>
-              <a:rPr sz="3200" spc="-135" dirty="0">
-                <a:solidFill>
-                  <a:srgbClr val="32BD15"/>
-                </a:solidFill>
-                <a:latin typeface="Arial MT"/>
-                <a:cs typeface="Arial MT"/>
-              </a:rPr>
-              <a:t> </a:t>
-            </a:r>
-            <a:r>
-              <a:rPr sz="3200" spc="-40" dirty="0">
-                <a:solidFill>
-                  <a:srgbClr val="32BD15"/>
-                </a:solidFill>
-                <a:latin typeface="Arial MT"/>
-                <a:cs typeface="Arial MT"/>
-              </a:rPr>
-              <a:t>elem</a:t>
-            </a:r>
-            <a:r>
-              <a:rPr sz="3200" spc="-135" dirty="0">
-                <a:solidFill>
-                  <a:srgbClr val="32BD15"/>
-                </a:solidFill>
-                <a:latin typeface="Arial MT"/>
-                <a:cs typeface="Arial MT"/>
-              </a:rPr>
-              <a:t> </a:t>
-            </a:r>
-            <a:r>
-              <a:rPr sz="3200" spc="-25" dirty="0">
-                <a:solidFill>
-                  <a:srgbClr val="32BD15"/>
-                </a:solidFill>
-                <a:latin typeface="Arial MT"/>
-                <a:cs typeface="Arial MT"/>
-              </a:rPr>
-              <a:t>an </a:t>
-            </a:r>
-            <a:r>
-              <a:rPr sz="3200" spc="-75" dirty="0">
-                <a:solidFill>
-                  <a:srgbClr val="FFFFFF"/>
-                </a:solidFill>
-                <a:latin typeface="Arial MT"/>
-                <a:cs typeface="Arial MT"/>
-              </a:rPr>
-              <a:t>set.</a:t>
-            </a:r>
-            <a:r>
-              <a:rPr sz="3200" b="1" spc="-75" dirty="0">
-                <a:solidFill>
-                  <a:srgbClr val="3BE2EC"/>
-                </a:solidFill>
-                <a:latin typeface="Arial"/>
-                <a:cs typeface="Arial"/>
-              </a:rPr>
-              <a:t>clear</a:t>
-            </a:r>
-            <a:r>
-              <a:rPr sz="3200" b="1" spc="-75" dirty="0">
-                <a:solidFill>
-                  <a:srgbClr val="FFFFFF"/>
-                </a:solidFill>
-                <a:latin typeface="Arial"/>
-                <a:cs typeface="Arial"/>
-              </a:rPr>
-              <a:t>(</a:t>
-            </a:r>
-            <a:r>
-              <a:rPr sz="3200" b="1" spc="-145" dirty="0">
-                <a:solidFill>
-                  <a:srgbClr val="FFFFFF"/>
-                </a:solidFill>
-                <a:latin typeface="Arial"/>
-                <a:cs typeface="Arial"/>
-              </a:rPr>
-              <a:t> </a:t>
-            </a:r>
-            <a:r>
-              <a:rPr sz="3200" b="1" spc="-50" dirty="0">
-                <a:solidFill>
-                  <a:srgbClr val="FFFFFF"/>
-                </a:solidFill>
-                <a:latin typeface="Arial"/>
-                <a:cs typeface="Arial"/>
-              </a:rPr>
-              <a:t>)</a:t>
-            </a:r>
-            <a:r>
-              <a:rPr sz="3200" b="1" dirty="0">
-                <a:solidFill>
-                  <a:srgbClr val="FFFFFF"/>
-                </a:solidFill>
-                <a:latin typeface="Arial"/>
-                <a:cs typeface="Arial"/>
-              </a:rPr>
-              <a:t>	</a:t>
-            </a:r>
-            <a:r>
-              <a:rPr sz="3200" dirty="0">
-                <a:solidFill>
-                  <a:srgbClr val="32BD15"/>
-                </a:solidFill>
-                <a:latin typeface="Arial MT"/>
-                <a:cs typeface="Arial MT"/>
-              </a:rPr>
-              <a:t>#empties</a:t>
-            </a:r>
-            <a:r>
-              <a:rPr sz="3200" spc="-114" dirty="0">
-                <a:solidFill>
-                  <a:srgbClr val="32BD15"/>
-                </a:solidFill>
-                <a:latin typeface="Arial MT"/>
-                <a:cs typeface="Arial MT"/>
-              </a:rPr>
-              <a:t> </a:t>
-            </a:r>
-            <a:r>
-              <a:rPr sz="3200" dirty="0">
-                <a:solidFill>
-                  <a:srgbClr val="32BD15"/>
-                </a:solidFill>
-                <a:latin typeface="Arial MT"/>
-                <a:cs typeface="Arial MT"/>
-              </a:rPr>
-              <a:t>the</a:t>
-            </a:r>
-            <a:r>
-              <a:rPr sz="3200" spc="-114" dirty="0">
-                <a:solidFill>
-                  <a:srgbClr val="32BD15"/>
-                </a:solidFill>
-                <a:latin typeface="Arial MT"/>
-                <a:cs typeface="Arial MT"/>
-              </a:rPr>
-              <a:t> </a:t>
-            </a:r>
-            <a:r>
-              <a:rPr sz="3200" spc="-25" dirty="0">
-                <a:solidFill>
-                  <a:srgbClr val="32BD15"/>
-                </a:solidFill>
-                <a:latin typeface="Arial MT"/>
-                <a:cs typeface="Arial MT"/>
-              </a:rPr>
-              <a:t>set</a:t>
-            </a:r>
-            <a:endParaRPr sz="3200">
-              <a:latin typeface="Arial MT"/>
-              <a:cs typeface="Arial MT"/>
-            </a:endParaRPr>
-          </a:p>
-          <a:p>
-            <a:pPr>
-              <a:lnSpc>
-                <a:spcPct val="100000"/>
-              </a:lnSpc>
-              <a:spcBef>
-                <a:spcPts val="2605"/>
-              </a:spcBef>
-            </a:pPr>
-            <a:endParaRPr sz="3200">
-              <a:latin typeface="Arial MT"/>
-              <a:cs typeface="Arial MT"/>
-            </a:endParaRPr>
-          </a:p>
-          <a:p>
-            <a:pPr marL="12700">
-              <a:lnSpc>
-                <a:spcPct val="100000"/>
-              </a:lnSpc>
-              <a:spcBef>
-                <a:spcPts val="5"/>
-              </a:spcBef>
-              <a:tabLst>
-                <a:tab pos="1893570" algn="l"/>
-              </a:tabLst>
-            </a:pPr>
-            <a:r>
-              <a:rPr sz="3200" spc="-95" dirty="0">
-                <a:solidFill>
-                  <a:srgbClr val="FFFFFF"/>
-                </a:solidFill>
-                <a:latin typeface="Arial MT"/>
-                <a:cs typeface="Arial MT"/>
-              </a:rPr>
-              <a:t>set.</a:t>
-            </a:r>
-            <a:r>
-              <a:rPr sz="3200" b="1" spc="-95" dirty="0">
-                <a:solidFill>
-                  <a:srgbClr val="3BE2EC"/>
-                </a:solidFill>
-                <a:latin typeface="Arial"/>
-                <a:cs typeface="Arial"/>
-              </a:rPr>
-              <a:t>pop</a:t>
-            </a:r>
-            <a:r>
-              <a:rPr sz="3200" b="1" spc="-95" dirty="0">
-                <a:solidFill>
-                  <a:srgbClr val="FFFFFF"/>
-                </a:solidFill>
-                <a:latin typeface="Arial"/>
-                <a:cs typeface="Arial"/>
-              </a:rPr>
-              <a:t>(</a:t>
-            </a:r>
-            <a:r>
-              <a:rPr sz="3200" b="1" spc="-65" dirty="0">
-                <a:solidFill>
-                  <a:srgbClr val="FFFFFF"/>
-                </a:solidFill>
-                <a:latin typeface="Arial"/>
-                <a:cs typeface="Arial"/>
-              </a:rPr>
-              <a:t> </a:t>
-            </a:r>
-            <a:r>
-              <a:rPr sz="3200" b="1" spc="-50" dirty="0">
-                <a:solidFill>
-                  <a:srgbClr val="FFFFFF"/>
-                </a:solidFill>
-                <a:latin typeface="Arial"/>
-                <a:cs typeface="Arial"/>
-              </a:rPr>
-              <a:t>)</a:t>
-            </a:r>
-            <a:r>
-              <a:rPr sz="3200" b="1" dirty="0">
-                <a:solidFill>
-                  <a:srgbClr val="FFFFFF"/>
-                </a:solidFill>
-                <a:latin typeface="Arial"/>
-                <a:cs typeface="Arial"/>
-              </a:rPr>
-              <a:t>	</a:t>
-            </a:r>
-            <a:r>
-              <a:rPr sz="3200" spc="-20" dirty="0">
-                <a:solidFill>
-                  <a:srgbClr val="32BD15"/>
-                </a:solidFill>
-                <a:latin typeface="Arial MT"/>
-                <a:cs typeface="Arial MT"/>
-              </a:rPr>
-              <a:t>#removes</a:t>
-            </a:r>
-            <a:r>
-              <a:rPr sz="3200" spc="-204" dirty="0">
-                <a:solidFill>
-                  <a:srgbClr val="32BD15"/>
-                </a:solidFill>
-                <a:latin typeface="Arial MT"/>
-                <a:cs typeface="Arial MT"/>
-              </a:rPr>
-              <a:t> </a:t>
-            </a:r>
-            <a:r>
-              <a:rPr sz="3200" spc="-180" dirty="0">
-                <a:solidFill>
-                  <a:srgbClr val="32BD15"/>
-                </a:solidFill>
-                <a:latin typeface="Arial MT"/>
-                <a:cs typeface="Arial MT"/>
-              </a:rPr>
-              <a:t>a</a:t>
-            </a:r>
-            <a:r>
-              <a:rPr sz="3200" spc="-45" dirty="0">
-                <a:solidFill>
-                  <a:srgbClr val="32BD15"/>
-                </a:solidFill>
-                <a:latin typeface="Arial MT"/>
-                <a:cs typeface="Arial MT"/>
-              </a:rPr>
-              <a:t> </a:t>
-            </a:r>
-            <a:r>
-              <a:rPr sz="3200" dirty="0">
-                <a:solidFill>
-                  <a:srgbClr val="32BD15"/>
-                </a:solidFill>
-                <a:latin typeface="Arial MT"/>
-                <a:cs typeface="Arial MT"/>
-              </a:rPr>
-              <a:t>random</a:t>
-            </a:r>
-            <a:r>
-              <a:rPr sz="3200" spc="-150" dirty="0">
-                <a:solidFill>
-                  <a:srgbClr val="32BD15"/>
-                </a:solidFill>
-                <a:latin typeface="Arial MT"/>
-                <a:cs typeface="Arial MT"/>
-              </a:rPr>
-              <a:t> </a:t>
-            </a:r>
-            <a:r>
-              <a:rPr sz="3200" spc="-10" dirty="0">
-                <a:solidFill>
-                  <a:srgbClr val="32BD15"/>
-                </a:solidFill>
-                <a:latin typeface="Arial MT"/>
-                <a:cs typeface="Arial MT"/>
-              </a:rPr>
-              <a:t>value</a:t>
-            </a:r>
-            <a:endParaRPr sz="3200">
-              <a:latin typeface="Arial MT"/>
-              <a:cs typeface="Arial MT"/>
-            </a:endParaRPr>
-          </a:p>
-        </p:txBody>
-      </p:sp>
+      </p:pic>
     </p:spTree>
+    <p:extLst>
+      <p:ext uri="{BB962C8B-B14F-4D97-AF65-F5344CB8AC3E}">
+        <p14:creationId xmlns:p14="http://schemas.microsoft.com/office/powerpoint/2010/main" val="233392375"/>
+      </p:ext>
+    </p:extLst>
   </p:cSld>
   <p:clrMapOvr>
     <a:masterClrMapping/>
